--- a/zanyatiya/Zanyatie_03_Lekciya_Iniciaciya_Slaydy.pptx
+++ b/zanyatiya/Zanyatie_03_Lekciya_Iniciaciya_Slaydy.pptx
@@ -20,9 +20,10 @@
     <p:sldId id="268" r:id="rId14"/>
     <p:sldId id="269" r:id="rId15"/>
     <p:sldId id="270" r:id="rId16"/>
+    <p:sldId id="271" r:id="rId17"/>
   </p:sldIdLst>
   <p:notesMasterIdLst>
-    <p:notesMasterId r:id="rId17"/>
+    <p:notesMasterId r:id="rId18"/>
   </p:notesMasterIdLst>
   <p:sldSz cx="9144000" cy="5143500"/>
   <p:notesSz cx="5143500" cy="9144000"/>
@@ -604,7 +605,7 @@
           <a:p>
             <a:r>
               <a:rPr lang="en-US" dirty="0"/>
-              <a:t>Второй пункт проговорить медленно: студенты не привыкли к мысли, что критерий оценки пишут они сами.</a:t>
+              <a:t>Остановка 3 минуты. Ничего не спрашивать вслух — смысл в честности перед собой, а не в публичном признании.</a:t>
             </a:r>
             <a:endParaRPr lang="en-US" dirty="0"/>
           </a:p>
@@ -692,7 +693,7 @@
           <a:p>
             <a:r>
               <a:rPr lang="en-US" dirty="0"/>
-              <a:t>Самая частая системная ошибка первого курса — SMART на процесс. Разобрать медленно.</a:t>
+              <a:t>Второй пункт проговорить медленно: студенты не привыкли к мысли, что критерий оценки пишут они сами.</a:t>
             </a:r>
             <a:endParaRPr lang="en-US" dirty="0"/>
           </a:p>
@@ -780,7 +781,7 @@
           <a:p>
             <a:r>
               <a:rPr lang="en-US" dirty="0"/>
-              <a:t>Остановка 2 минуты. Дальше сразу переход к смежным проблемам — не давать растечься.</a:t>
+              <a:t>Самая частая системная ошибка первого курса — SMART на процесс. Разобрать медленно.</a:t>
             </a:r>
             <a:endParaRPr lang="en-US" dirty="0"/>
           </a:p>
@@ -868,7 +869,7 @@
           <a:p>
             <a:r>
               <a:rPr lang="en-US" dirty="0"/>
-              <a:t>Это мост к слайду 14. Сказать прямо: я не уговариваю менять — я говорю, что окно ещё открыто.</a:t>
+              <a:t>Остановка 2 минуты. Дальше сразу переход к смежным проблемам — не давать растечься.</a:t>
             </a:r>
             <a:endParaRPr lang="en-US" dirty="0"/>
           </a:p>
@@ -956,7 +957,7 @@
           <a:p>
             <a:r>
               <a:rPr lang="en-US" dirty="0"/>
-              <a:t>Ключевой слайд занятия. Держать паузу после него. Сказать, что решение о замене принимается командой и сообщается вам до 26.09 — письмом или лично.</a:t>
+              <a:t>Это мост к слайду 14. Сказать прямо: я не уговариваю менять — я говорю, что окно ещё открыто.</a:t>
             </a:r>
             <a:endParaRPr lang="en-US" dirty="0"/>
           </a:p>
@@ -1044,7 +1045,7 @@
           <a:p>
             <a:r>
               <a:rPr lang="en-US" dirty="0"/>
-              <a:t>Последний пункт — 60 секунд про «что не сходится» — самый ценный. Сказать прямо: команда, которая честно назовёт свою дыру, получит больше, чем команда, которая сделает вид, что всё гладко.</a:t>
+              <a:t>Ключевой слайд занятия. Держать паузу после него. Сказать, что решение о замене принимается командой и сообщается вам до 26.09 — письмом или лично.</a:t>
             </a:r>
             <a:endParaRPr lang="en-US" dirty="0"/>
           </a:p>
@@ -1068,6 +1069,94 @@
             <a:fld id="{F7021451-1387-4CA6-816F-3879F97B5CBC}" type="slidenum">
               <a:rPr lang="en-US"/>
               <a:t>15</a:t>
+            </a:fld>
+            <a:endParaRPr lang="en-US"/>
+          </a:p>
+        </p:txBody>
+      </p:sp>
+    </p:spTree>
+    <p:extLst>
+      <p:ext uri="{BB962C8B-B14F-4D97-AF65-F5344CB8AC3E}">
+        <p14:creationId xmlns:p14="http://schemas.microsoft.com/office/powerpoint/2010/main" val="1024086991"/>
+      </p:ext>
+    </p:extLst>
+  </p:cSld>
+  <p:clrMapOvr>
+    <a:masterClrMapping/>
+  </p:clrMapOvr>
+</p:notes>
+</file>
+
+<file path=ppt/notesSlides/notesSlide16.xml><?xml version="1.0" encoding="utf-8"?>
+<p:notes xmlns:a="http://schemas.openxmlformats.org/drawingml/2006/main" xmlns:r="http://schemas.openxmlformats.org/officeDocument/2006/relationships" xmlns:p="http://schemas.openxmlformats.org/presentationml/2006/main">
+  <p:cSld>
+    <p:spTree>
+      <p:nvGrpSpPr>
+        <p:cNvPr id="1" name=""/>
+        <p:cNvGrpSpPr/>
+        <p:nvPr/>
+      </p:nvGrpSpPr>
+      <p:grpSpPr>
+        <a:xfrm>
+          <a:off x="0" y="0"/>
+          <a:ext cx="0" cy="0"/>
+          <a:chOff x="0" y="0"/>
+          <a:chExt cx="0" cy="0"/>
+        </a:xfrm>
+      </p:grpSpPr>
+      <p:sp>
+        <p:nvSpPr>
+          <p:cNvPr id="2" name="Slide Image Placeholder 1"/>
+          <p:cNvSpPr>
+            <a:spLocks noGrp="1" noRot="1" noChangeAspect="1"/>
+          </p:cNvSpPr>
+          <p:nvPr>
+            <p:ph type="sldImg"/>
+          </p:nvPr>
+        </p:nvSpPr>
+        <p:spPr/>
+      </p:sp>
+      <p:sp>
+        <p:nvSpPr>
+          <p:cNvPr id="3" name="Notes Placeholder 2"/>
+          <p:cNvSpPr>
+            <a:spLocks noGrp="1"/>
+          </p:cNvSpPr>
+          <p:nvPr>
+            <p:ph type="body" idx="1"/>
+          </p:nvPr>
+        </p:nvSpPr>
+        <p:spPr/>
+        <p:txBody>
+          <a:bodyPr/>
+          <a:lstStyle/>
+          <a:p>
+            <a:r>
+              <a:rPr lang="en-US" dirty="0"/>
+              <a:t>Последний пункт — 60 секунд про «что не сходится» — самый ценный. Сказать прямо: команда, которая честно назовёт свою дыру, получит больше, чем команда, которая сделает вид, что всё гладко.</a:t>
+            </a:r>
+            <a:endParaRPr lang="en-US" dirty="0"/>
+          </a:p>
+        </p:txBody>
+      </p:sp>
+      <p:sp>
+        <p:nvSpPr>
+          <p:cNvPr id="4" name="Slide Number Placeholder 3"/>
+          <p:cNvSpPr>
+            <a:spLocks noGrp="1"/>
+          </p:cNvSpPr>
+          <p:nvPr>
+            <p:ph type="sldNum" sz="quarter" idx="10"/>
+          </p:nvPr>
+        </p:nvSpPr>
+        <p:spPr/>
+        <p:txBody>
+          <a:bodyPr/>
+          <a:lstStyle/>
+          <a:p>
+            <a:fld id="{F7021451-1387-4CA6-816F-3879F97B5CBC}" type="slidenum">
+              <a:rPr lang="en-US"/>
+              <a:t>16</a:t>
             </a:fld>
             <a:endParaRPr lang="en-US"/>
           </a:p>
@@ -1132,7 +1221,7 @@
           <a:p>
             <a:r>
               <a:rPr lang="en-US" dirty="0"/>
-              <a:t>Главный смысл слайда: снять ощущение «нам дали упражнение». Они прошли реальную процедуру.</a:t>
+              <a:t>Слайд показывается на каждом занятии. Смысл: студент всё время видит, сколько осталось и что именно он обязан предъявить на ближайшей вехе. Отсчёт называть вслух — это и есть встроенный тайм-менеджмент, без отдельной лекции про него.</a:t>
             </a:r>
             <a:endParaRPr lang="en-US" dirty="0"/>
           </a:p>
@@ -1220,7 +1309,7 @@
           <a:p>
             <a:r>
               <a:rPr lang="en-US" dirty="0"/>
-              <a:t>Связать с вводной лекцией: это разворот первой из пяти фаз жизненного цикла. Пункт 8 отдельно подчеркнуть — он вернётся на слайде 14.</a:t>
+              <a:t>Главный смысл слайда: снять ощущение «нам дали упражнение». Они прошли реальную процедуру.</a:t>
             </a:r>
             <a:endParaRPr lang="en-US" dirty="0"/>
           </a:p>
@@ -1308,7 +1397,7 @@
           <a:p>
             <a:r>
               <a:rPr lang="en-US" dirty="0"/>
-              <a:t>Третий источник разобрать честно: «сделаем на микроконтроллере» — это ещё не проект, пока не найден носитель проблемы.</a:t>
+              <a:t>Связать с вводной лекцией: это разворот первой из пяти фаз жизненного цикла. Пункт 8 отдельно подчеркнуть — он вернётся на слайде 14.</a:t>
             </a:r>
             <a:endParaRPr lang="en-US" dirty="0"/>
           </a:p>
@@ -1396,7 +1485,7 @@
           <a:p>
             <a:r>
               <a:rPr lang="en-US" dirty="0"/>
-              <a:t>Здесь же ответ на вопрос «а зачем нам социальный вектор, если мы технари» — вектор Б существует, чтобы было из чего выбирать.</a:t>
+              <a:t>Третий источник разобрать честно: «сделаем на микроконтроллере» — это ещё не проект, пока не найден носитель проблемы.</a:t>
             </a:r>
             <a:endParaRPr lang="en-US" dirty="0"/>
           </a:p>
@@ -1484,7 +1573,7 @@
           <a:p>
             <a:r>
               <a:rPr lang="en-US" dirty="0"/>
-              <a:t>Четвёртый пункт — границы объёма. Про него забывают всегда, а именно он спасает семестр.</a:t>
+              <a:t>Здесь же ответ на вопрос «а зачем нам социальный вектор, если мы технари» — вектор Б существует, чтобы было из чего выбирать.</a:t>
             </a:r>
             <a:endParaRPr lang="en-US" dirty="0"/>
           </a:p>
@@ -1572,7 +1661,7 @@
           <a:p>
             <a:r>
               <a:rPr lang="en-US" dirty="0"/>
-              <a:t>Это ответ на немой вопрос «зачем нам эта формула». Функция, а не форма.</a:t>
+              <a:t>Четвёртый пункт — границы объёма. Про него забывают всегда, а именно он спасает семестр.</a:t>
             </a:r>
             <a:endParaRPr lang="en-US" dirty="0"/>
           </a:p>
@@ -1660,7 +1749,7 @@
           <a:p>
             <a:r>
               <a:rPr lang="en-US" dirty="0"/>
-              <a:t>Три проверки продиктовать — их студенты применяют сами, без преподавателя.</a:t>
+              <a:t>Это ответ на немой вопрос «зачем нам эта формула». Функция, а не форма.</a:t>
             </a:r>
             <a:endParaRPr lang="en-US" dirty="0"/>
           </a:p>
@@ -1748,7 +1837,7 @@
           <a:p>
             <a:r>
               <a:rPr lang="en-US" dirty="0"/>
-              <a:t>Остановка 3 минуты. Ничего не спрашивать вслух — смысл в честности перед собой, а не в публичном признании.</a:t>
+              <a:t>Три проверки продиктовать — их студенты применяют сами, без преподавателя.</a:t>
             </a:r>
             <a:endParaRPr lang="en-US" dirty="0"/>
           </a:p>
@@ -2368,7 +2457,1444 @@
                 <a:ea typeface="Arial" pitchFamily="34" charset="-122"/>
                 <a:cs typeface="Arial" pitchFamily="34" charset="-120"/>
               </a:rPr>
-              <a:t>10 / 15</a:t>
+              <a:t>10 / 16</a:t>
+            </a:r>
+            <a:endParaRPr lang="en-US" sz="1000" dirty="0"/>
+          </a:p>
+        </p:txBody>
+      </p:sp>
+      <p:sp>
+        <p:nvSpPr>
+          <p:cNvPr id="3" name="Text 1"/>
+          <p:cNvSpPr txBox="1"/>
+          <p:nvPr/>
+        </p:nvSpPr>
+        <p:spPr>
+          <a:xfrm>
+            <a:off x="502920" y="182880"/>
+            <a:ext cx="8138160" cy="219456"/>
+          </a:xfrm>
+          <a:prstGeom prst="rect">
+            <a:avLst/>
+          </a:prstGeom>
+          <a:noFill/>
+          <a:ln/>
+        </p:spPr>
+        <p:txBody>
+          <a:bodyPr wrap="square" lIns="0" tIns="0" rIns="0" bIns="0" rtlCol="0" anchor="ctr"/>
+          <a:lstStyle/>
+          <a:p>
+            <a:pPr indent="0" marL="0">
+              <a:buNone/>
+            </a:pPr>
+            <a:r>
+              <a:rPr lang="en-US" sz="1100" spc="150" kern="0" dirty="0">
+                <a:solidFill>
+                  <a:srgbClr val="64748B"/>
+                </a:solidFill>
+                <a:latin typeface="Arial" pitchFamily="34" charset="0"/>
+                <a:ea typeface="Arial" pitchFamily="34" charset="-122"/>
+                <a:cs typeface="Arial" pitchFamily="34" charset="-120"/>
+              </a:rPr>
+              <a:t>РАЗБОР · ЦЕННОСТНОЕ ПРЕДЛОЖЕНИЕ</a:t>
+            </a:r>
+            <a:endParaRPr lang="en-US" sz="1100" dirty="0"/>
+          </a:p>
+        </p:txBody>
+      </p:sp>
+      <p:sp>
+        <p:nvSpPr>
+          <p:cNvPr id="4" name="Text 2"/>
+          <p:cNvSpPr txBox="1"/>
+          <p:nvPr/>
+        </p:nvSpPr>
+        <p:spPr>
+          <a:xfrm>
+            <a:off x="502920" y="365760"/>
+            <a:ext cx="8138160" cy="603504"/>
+          </a:xfrm>
+          <a:prstGeom prst="rect">
+            <a:avLst/>
+          </a:prstGeom>
+          <a:noFill/>
+          <a:ln/>
+        </p:spPr>
+        <p:txBody>
+          <a:bodyPr wrap="square" lIns="0" tIns="0" rIns="0" bIns="0" rtlCol="0" anchor="ctr"/>
+          <a:lstStyle/>
+          <a:p>
+            <a:pPr indent="0" marL="0">
+              <a:buNone/>
+            </a:pPr>
+            <a:r>
+              <a:rPr lang="en-US" sz="2600" b="1" dirty="0">
+                <a:solidFill>
+                  <a:srgbClr val="005AAA"/>
+                </a:solidFill>
+                <a:latin typeface="Arial" pitchFamily="34" charset="0"/>
+                <a:ea typeface="Arial" pitchFamily="34" charset="-122"/>
+                <a:cs typeface="Arial" pitchFamily="34" charset="-120"/>
+              </a:rPr>
+              <a:t>Что чаще всего оказалось не так</a:t>
+            </a:r>
+            <a:endParaRPr lang="en-US" sz="2600" dirty="0"/>
+          </a:p>
+        </p:txBody>
+      </p:sp>
+      <p:graphicFrame>
+        <p:nvGraphicFramePr>
+          <p:cNvPr id="11" name="Table 0"/>
+          <p:cNvGraphicFramePr>
+            <a:graphicFrameLocks noGrp="1"/>
+          </p:cNvGraphicFramePr>
+          <p:nvPr>
+            <p:extLst>
+              <p:ext uri="{D42A27DB-BD31-4B8C-83A1-F6EECF244321}">
+                <p14:modId xmlns:p14="http://schemas.microsoft.com/office/powerpoint/2010/main" val="1579011935"/>
+              </p:ext>
+            </p:extLst>
+          </p:nvPr>
+        </p:nvGraphicFramePr>
+        <p:xfrm>
+          <a:off x="502920" y="1051560"/>
+          <a:ext cx="8138160" cy="914400"/>
+        </p:xfrm>
+        <a:graphic>
+          <a:graphicData uri="http://schemas.openxmlformats.org/drawingml/2006/table">
+            <a:tbl>
+              <a:tblPr/>
+              <a:tblGrid>
+                <a:gridCol w="2377440"/>
+                <a:gridCol w="2743200"/>
+                <a:gridCol w="3017520"/>
+              </a:tblGrid>
+              <a:tr h="310896">
+                <a:tc>
+                  <a:txBody>
+                    <a:bodyPr/>
+                    <a:lstStyle/>
+                    <a:p>
+                      <a:pPr indent="0" marL="0">
+                        <a:buNone/>
+                      </a:pPr>
+                      <a:r>
+                        <a:rPr lang="en-US" sz="1150" b="1" dirty="0">
+                          <a:solidFill>
+                            <a:srgbClr val="FFFFFF"/>
+                          </a:solidFill>
+                          <a:latin typeface="Arial" pitchFamily="34" charset="0"/>
+                          <a:ea typeface="Arial" pitchFamily="34" charset="-122"/>
+                          <a:cs typeface="Arial" pitchFamily="34" charset="-120"/>
+                        </a:rPr>
+                        <a:t>Как написано</a:t>
+                      </a:r>
+                      <a:endParaRPr lang="en-US" sz="1150" dirty="0">
+                        <a:latin typeface="Arial" charset="0"/>
+                        <a:ea typeface="Arial" charset="0"/>
+                        <a:cs typeface="Arial" charset="0"/>
+                      </a:endParaRPr>
+                    </a:p>
+                  </a:txBody>
+                  <a:tcPr marL="91440" marR="91440" marT="45720" marB="45720" anchor="ctr">
+                    <a:lnL w="6350" cap="flat" cmpd="sng" algn="ctr">
+                      <a:solidFill>
+                        <a:srgbClr val="D8DEE6"/>
+                      </a:solidFill>
+                      <a:prstDash val="solid"/>
+                      <a:round/>
+                      <a:headEnd type="none" w="med" len="med"/>
+                      <a:tailEnd type="none" w="med" len="med"/>
+                    </a:lnL>
+                    <a:lnR w="6350" cap="flat" cmpd="sng" algn="ctr">
+                      <a:solidFill>
+                        <a:srgbClr val="D8DEE6"/>
+                      </a:solidFill>
+                      <a:prstDash val="solid"/>
+                      <a:round/>
+                      <a:headEnd type="none" w="med" len="med"/>
+                      <a:tailEnd type="none" w="med" len="med"/>
+                    </a:lnR>
+                    <a:lnT w="6350" cap="flat" cmpd="sng" algn="ctr">
+                      <a:solidFill>
+                        <a:srgbClr val="D8DEE6"/>
+                      </a:solidFill>
+                      <a:prstDash val="solid"/>
+                      <a:round/>
+                      <a:headEnd type="none" w="med" len="med"/>
+                      <a:tailEnd type="none" w="med" len="med"/>
+                    </a:lnT>
+                    <a:lnB w="6350" cap="flat" cmpd="sng" algn="ctr">
+                      <a:solidFill>
+                        <a:srgbClr val="D8DEE6"/>
+                      </a:solidFill>
+                      <a:prstDash val="solid"/>
+                      <a:round/>
+                      <a:headEnd type="none" w="med" len="med"/>
+                      <a:tailEnd type="none" w="med" len="med"/>
+                    </a:lnB>
+                    <a:solidFill>
+                      <a:srgbClr val="1E4270"/>
+                    </a:solidFill>
+                  </a:tcPr>
+                </a:tc>
+                <a:tc>
+                  <a:txBody>
+                    <a:bodyPr/>
+                    <a:lstStyle/>
+                    <a:p>
+                      <a:pPr indent="0" marL="0">
+                        <a:buNone/>
+                      </a:pPr>
+                      <a:r>
+                        <a:rPr lang="en-US" sz="1150" b="1" dirty="0">
+                          <a:solidFill>
+                            <a:srgbClr val="FFFFFF"/>
+                          </a:solidFill>
+                          <a:latin typeface="Arial" pitchFamily="34" charset="0"/>
+                          <a:ea typeface="Arial" pitchFamily="34" charset="-122"/>
+                          <a:cs typeface="Arial" pitchFamily="34" charset="-120"/>
+                        </a:rPr>
+                        <a:t>Что не так</a:t>
+                      </a:r>
+                      <a:endParaRPr lang="en-US" sz="1150" dirty="0">
+                        <a:latin typeface="Arial" charset="0"/>
+                        <a:ea typeface="Arial" charset="0"/>
+                        <a:cs typeface="Arial" charset="0"/>
+                      </a:endParaRPr>
+                    </a:p>
+                  </a:txBody>
+                  <a:tcPr marL="91440" marR="91440" marT="45720" marB="45720" anchor="ctr">
+                    <a:lnL w="6350" cap="flat" cmpd="sng" algn="ctr">
+                      <a:solidFill>
+                        <a:srgbClr val="D8DEE6"/>
+                      </a:solidFill>
+                      <a:prstDash val="solid"/>
+                      <a:round/>
+                      <a:headEnd type="none" w="med" len="med"/>
+                      <a:tailEnd type="none" w="med" len="med"/>
+                    </a:lnL>
+                    <a:lnR w="6350" cap="flat" cmpd="sng" algn="ctr">
+                      <a:solidFill>
+                        <a:srgbClr val="D8DEE6"/>
+                      </a:solidFill>
+                      <a:prstDash val="solid"/>
+                      <a:round/>
+                      <a:headEnd type="none" w="med" len="med"/>
+                      <a:tailEnd type="none" w="med" len="med"/>
+                    </a:lnR>
+                    <a:lnT w="6350" cap="flat" cmpd="sng" algn="ctr">
+                      <a:solidFill>
+                        <a:srgbClr val="D8DEE6"/>
+                      </a:solidFill>
+                      <a:prstDash val="solid"/>
+                      <a:round/>
+                      <a:headEnd type="none" w="med" len="med"/>
+                      <a:tailEnd type="none" w="med" len="med"/>
+                    </a:lnT>
+                    <a:lnB w="6350" cap="flat" cmpd="sng" algn="ctr">
+                      <a:solidFill>
+                        <a:srgbClr val="D8DEE6"/>
+                      </a:solidFill>
+                      <a:prstDash val="solid"/>
+                      <a:round/>
+                      <a:headEnd type="none" w="med" len="med"/>
+                      <a:tailEnd type="none" w="med" len="med"/>
+                    </a:lnB>
+                    <a:solidFill>
+                      <a:srgbClr val="1E4270"/>
+                    </a:solidFill>
+                  </a:tcPr>
+                </a:tc>
+                <a:tc>
+                  <a:txBody>
+                    <a:bodyPr/>
+                    <a:lstStyle/>
+                    <a:p>
+                      <a:pPr indent="0" marL="0">
+                        <a:buNone/>
+                      </a:pPr>
+                      <a:r>
+                        <a:rPr lang="en-US" sz="1150" b="1" dirty="0">
+                          <a:solidFill>
+                            <a:srgbClr val="FFFFFF"/>
+                          </a:solidFill>
+                          <a:latin typeface="Arial" pitchFamily="34" charset="0"/>
+                          <a:ea typeface="Arial" pitchFamily="34" charset="-122"/>
+                          <a:cs typeface="Arial" pitchFamily="34" charset="-120"/>
+                        </a:rPr>
+                        <a:t>Как чинить</a:t>
+                      </a:r>
+                      <a:endParaRPr lang="en-US" sz="1150" dirty="0">
+                        <a:latin typeface="Arial" charset="0"/>
+                        <a:ea typeface="Arial" charset="0"/>
+                        <a:cs typeface="Arial" charset="0"/>
+                      </a:endParaRPr>
+                    </a:p>
+                  </a:txBody>
+                  <a:tcPr marL="91440" marR="91440" marT="45720" marB="45720" anchor="ctr">
+                    <a:lnL w="6350" cap="flat" cmpd="sng" algn="ctr">
+                      <a:solidFill>
+                        <a:srgbClr val="D8DEE6"/>
+                      </a:solidFill>
+                      <a:prstDash val="solid"/>
+                      <a:round/>
+                      <a:headEnd type="none" w="med" len="med"/>
+                      <a:tailEnd type="none" w="med" len="med"/>
+                    </a:lnL>
+                    <a:lnR w="6350" cap="flat" cmpd="sng" algn="ctr">
+                      <a:solidFill>
+                        <a:srgbClr val="D8DEE6"/>
+                      </a:solidFill>
+                      <a:prstDash val="solid"/>
+                      <a:round/>
+                      <a:headEnd type="none" w="med" len="med"/>
+                      <a:tailEnd type="none" w="med" len="med"/>
+                    </a:lnR>
+                    <a:lnT w="6350" cap="flat" cmpd="sng" algn="ctr">
+                      <a:solidFill>
+                        <a:srgbClr val="D8DEE6"/>
+                      </a:solidFill>
+                      <a:prstDash val="solid"/>
+                      <a:round/>
+                      <a:headEnd type="none" w="med" len="med"/>
+                      <a:tailEnd type="none" w="med" len="med"/>
+                    </a:lnT>
+                    <a:lnB w="6350" cap="flat" cmpd="sng" algn="ctr">
+                      <a:solidFill>
+                        <a:srgbClr val="D8DEE6"/>
+                      </a:solidFill>
+                      <a:prstDash val="solid"/>
+                      <a:round/>
+                      <a:headEnd type="none" w="med" len="med"/>
+                      <a:tailEnd type="none" w="med" len="med"/>
+                    </a:lnB>
+                    <a:solidFill>
+                      <a:srgbClr val="1E4270"/>
+                    </a:solidFill>
+                  </a:tcPr>
+                </a:tc>
+              </a:tr>
+              <a:tr h="566928">
+                <a:tc>
+                  <a:txBody>
+                    <a:bodyPr/>
+                    <a:lstStyle/>
+                    <a:p>
+                      <a:pPr indent="0" marL="0">
+                        <a:buNone/>
+                      </a:pPr>
+                      <a:r>
+                        <a:rPr lang="en-US" sz="1150" dirty="0">
+                          <a:solidFill>
+                            <a:srgbClr val="1E293B"/>
+                          </a:solidFill>
+                          <a:latin typeface="Arial" pitchFamily="34" charset="0"/>
+                          <a:ea typeface="Arial" pitchFamily="34" charset="-122"/>
+                          <a:cs typeface="Arial" pitchFamily="34" charset="-120"/>
+                        </a:rPr>
+                        <a:t>«Для студентов», «для людей»</a:t>
+                      </a:r>
+                      <a:endParaRPr lang="en-US" sz="1150" dirty="0">
+                        <a:latin typeface="Arial" charset="0"/>
+                        <a:ea typeface="Arial" charset="0"/>
+                        <a:cs typeface="Arial" charset="0"/>
+                      </a:endParaRPr>
+                    </a:p>
+                  </a:txBody>
+                  <a:tcPr marL="91440" marR="91440" marT="45720" marB="45720" anchor="ctr">
+                    <a:lnL w="6350" cap="flat" cmpd="sng" algn="ctr">
+                      <a:solidFill>
+                        <a:srgbClr val="D8DEE6"/>
+                      </a:solidFill>
+                      <a:prstDash val="solid"/>
+                      <a:round/>
+                      <a:headEnd type="none" w="med" len="med"/>
+                      <a:tailEnd type="none" w="med" len="med"/>
+                    </a:lnL>
+                    <a:lnR w="6350" cap="flat" cmpd="sng" algn="ctr">
+                      <a:solidFill>
+                        <a:srgbClr val="D8DEE6"/>
+                      </a:solidFill>
+                      <a:prstDash val="solid"/>
+                      <a:round/>
+                      <a:headEnd type="none" w="med" len="med"/>
+                      <a:tailEnd type="none" w="med" len="med"/>
+                    </a:lnR>
+                    <a:lnT w="6350" cap="flat" cmpd="sng" algn="ctr">
+                      <a:solidFill>
+                        <a:srgbClr val="D8DEE6"/>
+                      </a:solidFill>
+                      <a:prstDash val="solid"/>
+                      <a:round/>
+                      <a:headEnd type="none" w="med" len="med"/>
+                      <a:tailEnd type="none" w="med" len="med"/>
+                    </a:lnT>
+                    <a:lnB w="6350" cap="flat" cmpd="sng" algn="ctr">
+                      <a:solidFill>
+                        <a:srgbClr val="D8DEE6"/>
+                      </a:solidFill>
+                      <a:prstDash val="solid"/>
+                      <a:round/>
+                      <a:headEnd type="none" w="med" len="med"/>
+                      <a:tailEnd type="none" w="med" len="med"/>
+                    </a:lnB>
+                  </a:tcPr>
+                </a:tc>
+                <a:tc>
+                  <a:txBody>
+                    <a:bodyPr/>
+                    <a:lstStyle/>
+                    <a:p>
+                      <a:pPr indent="0" marL="0">
+                        <a:buNone/>
+                      </a:pPr>
+                      <a:r>
+                        <a:rPr lang="en-US" sz="1150" dirty="0">
+                          <a:solidFill>
+                            <a:srgbClr val="1E293B"/>
+                          </a:solidFill>
+                          <a:latin typeface="Arial" pitchFamily="34" charset="0"/>
+                          <a:ea typeface="Arial" pitchFamily="34" charset="-122"/>
+                          <a:cs typeface="Arial" pitchFamily="34" charset="-120"/>
+                        </a:rPr>
+                        <a:t>Группа не сужена — адресат не найден</a:t>
+                      </a:r>
+                      <a:endParaRPr lang="en-US" sz="1150" dirty="0">
+                        <a:latin typeface="Arial" charset="0"/>
+                        <a:ea typeface="Arial" charset="0"/>
+                        <a:cs typeface="Arial" charset="0"/>
+                      </a:endParaRPr>
+                    </a:p>
+                  </a:txBody>
+                  <a:tcPr marL="91440" marR="91440" marT="45720" marB="45720" anchor="ctr">
+                    <a:lnL w="6350" cap="flat" cmpd="sng" algn="ctr">
+                      <a:solidFill>
+                        <a:srgbClr val="D8DEE6"/>
+                      </a:solidFill>
+                      <a:prstDash val="solid"/>
+                      <a:round/>
+                      <a:headEnd type="none" w="med" len="med"/>
+                      <a:tailEnd type="none" w="med" len="med"/>
+                    </a:lnL>
+                    <a:lnR w="6350" cap="flat" cmpd="sng" algn="ctr">
+                      <a:solidFill>
+                        <a:srgbClr val="D8DEE6"/>
+                      </a:solidFill>
+                      <a:prstDash val="solid"/>
+                      <a:round/>
+                      <a:headEnd type="none" w="med" len="med"/>
+                      <a:tailEnd type="none" w="med" len="med"/>
+                    </a:lnR>
+                    <a:lnT w="6350" cap="flat" cmpd="sng" algn="ctr">
+                      <a:solidFill>
+                        <a:srgbClr val="D8DEE6"/>
+                      </a:solidFill>
+                      <a:prstDash val="solid"/>
+                      <a:round/>
+                      <a:headEnd type="none" w="med" len="med"/>
+                      <a:tailEnd type="none" w="med" len="med"/>
+                    </a:lnT>
+                    <a:lnB w="6350" cap="flat" cmpd="sng" algn="ctr">
+                      <a:solidFill>
+                        <a:srgbClr val="D8DEE6"/>
+                      </a:solidFill>
+                      <a:prstDash val="solid"/>
+                      <a:round/>
+                      <a:headEnd type="none" w="med" len="med"/>
+                      <a:tailEnd type="none" w="med" len="med"/>
+                    </a:lnB>
+                  </a:tcPr>
+                </a:tc>
+                <a:tc>
+                  <a:txBody>
+                    <a:bodyPr/>
+                    <a:lstStyle/>
+                    <a:p>
+                      <a:pPr indent="0" marL="0">
+                        <a:buNone/>
+                      </a:pPr>
+                      <a:r>
+                        <a:rPr lang="en-US" sz="1150" dirty="0">
+                          <a:solidFill>
+                            <a:srgbClr val="1E293B"/>
+                          </a:solidFill>
+                          <a:latin typeface="Arial" pitchFamily="34" charset="0"/>
+                          <a:ea typeface="Arial" pitchFamily="34" charset="-122"/>
+                          <a:cs typeface="Arial" pitchFamily="34" charset="-120"/>
+                        </a:rPr>
+                        <a:t>Назвать курс, ситуацию и момент, когда проблема возникает</a:t>
+                      </a:r>
+                      <a:endParaRPr lang="en-US" sz="1150" dirty="0">
+                        <a:latin typeface="Arial" charset="0"/>
+                        <a:ea typeface="Arial" charset="0"/>
+                        <a:cs typeface="Arial" charset="0"/>
+                      </a:endParaRPr>
+                    </a:p>
+                  </a:txBody>
+                  <a:tcPr marL="91440" marR="91440" marT="45720" marB="45720" anchor="ctr">
+                    <a:lnL w="6350" cap="flat" cmpd="sng" algn="ctr">
+                      <a:solidFill>
+                        <a:srgbClr val="D8DEE6"/>
+                      </a:solidFill>
+                      <a:prstDash val="solid"/>
+                      <a:round/>
+                      <a:headEnd type="none" w="med" len="med"/>
+                      <a:tailEnd type="none" w="med" len="med"/>
+                    </a:lnL>
+                    <a:lnR w="6350" cap="flat" cmpd="sng" algn="ctr">
+                      <a:solidFill>
+                        <a:srgbClr val="D8DEE6"/>
+                      </a:solidFill>
+                      <a:prstDash val="solid"/>
+                      <a:round/>
+                      <a:headEnd type="none" w="med" len="med"/>
+                      <a:tailEnd type="none" w="med" len="med"/>
+                    </a:lnR>
+                    <a:lnT w="6350" cap="flat" cmpd="sng" algn="ctr">
+                      <a:solidFill>
+                        <a:srgbClr val="D8DEE6"/>
+                      </a:solidFill>
+                      <a:prstDash val="solid"/>
+                      <a:round/>
+                      <a:headEnd type="none" w="med" len="med"/>
+                      <a:tailEnd type="none" w="med" len="med"/>
+                    </a:lnT>
+                    <a:lnB w="6350" cap="flat" cmpd="sng" algn="ctr">
+                      <a:solidFill>
+                        <a:srgbClr val="D8DEE6"/>
+                      </a:solidFill>
+                      <a:prstDash val="solid"/>
+                      <a:round/>
+                      <a:headEnd type="none" w="med" len="med"/>
+                      <a:tailEnd type="none" w="med" len="med"/>
+                    </a:lnB>
+                  </a:tcPr>
+                </a:tc>
+              </a:tr>
+              <a:tr h="566928">
+                <a:tc>
+                  <a:txBody>
+                    <a:bodyPr/>
+                    <a:lstStyle/>
+                    <a:p>
+                      <a:pPr indent="0" marL="0">
+                        <a:buNone/>
+                      </a:pPr>
+                      <a:r>
+                        <a:rPr lang="en-US" sz="1150" dirty="0">
+                          <a:solidFill>
+                            <a:srgbClr val="1E293B"/>
+                          </a:solidFill>
+                          <a:latin typeface="Arial" pitchFamily="34" charset="0"/>
+                          <a:ea typeface="Arial" pitchFamily="34" charset="-122"/>
+                          <a:cs typeface="Arial" pitchFamily="34" charset="-120"/>
+                        </a:rPr>
+                        <a:t>«Станет удобнее», «эффективнее»</a:t>
+                      </a:r>
+                      <a:endParaRPr lang="en-US" sz="1150" dirty="0">
+                        <a:latin typeface="Arial" charset="0"/>
+                        <a:ea typeface="Arial" charset="0"/>
+                        <a:cs typeface="Arial" charset="0"/>
+                      </a:endParaRPr>
+                    </a:p>
+                  </a:txBody>
+                  <a:tcPr marL="91440" marR="91440" marT="45720" marB="45720" anchor="ctr">
+                    <a:lnL w="6350" cap="flat" cmpd="sng" algn="ctr">
+                      <a:solidFill>
+                        <a:srgbClr val="D8DEE6"/>
+                      </a:solidFill>
+                      <a:prstDash val="solid"/>
+                      <a:round/>
+                      <a:headEnd type="none" w="med" len="med"/>
+                      <a:tailEnd type="none" w="med" len="med"/>
+                    </a:lnL>
+                    <a:lnR w="6350" cap="flat" cmpd="sng" algn="ctr">
+                      <a:solidFill>
+                        <a:srgbClr val="D8DEE6"/>
+                      </a:solidFill>
+                      <a:prstDash val="solid"/>
+                      <a:round/>
+                      <a:headEnd type="none" w="med" len="med"/>
+                      <a:tailEnd type="none" w="med" len="med"/>
+                    </a:lnR>
+                    <a:lnT w="6350" cap="flat" cmpd="sng" algn="ctr">
+                      <a:solidFill>
+                        <a:srgbClr val="D8DEE6"/>
+                      </a:solidFill>
+                      <a:prstDash val="solid"/>
+                      <a:round/>
+                      <a:headEnd type="none" w="med" len="med"/>
+                      <a:tailEnd type="none" w="med" len="med"/>
+                    </a:lnT>
+                    <a:lnB w="6350" cap="flat" cmpd="sng" algn="ctr">
+                      <a:solidFill>
+                        <a:srgbClr val="D8DEE6"/>
+                      </a:solidFill>
+                      <a:prstDash val="solid"/>
+                      <a:round/>
+                      <a:headEnd type="none" w="med" len="med"/>
+                      <a:tailEnd type="none" w="med" len="med"/>
+                    </a:lnB>
+                  </a:tcPr>
+                </a:tc>
+                <a:tc>
+                  <a:txBody>
+                    <a:bodyPr/>
+                    <a:lstStyle/>
+                    <a:p>
+                      <a:pPr indent="0" marL="0">
+                        <a:buNone/>
+                      </a:pPr>
+                      <a:r>
+                        <a:rPr lang="en-US" sz="1150" dirty="0">
+                          <a:solidFill>
+                            <a:srgbClr val="1E293B"/>
+                          </a:solidFill>
+                          <a:latin typeface="Arial" pitchFamily="34" charset="0"/>
+                          <a:ea typeface="Arial" pitchFamily="34" charset="-122"/>
+                          <a:cs typeface="Arial" pitchFamily="34" charset="-120"/>
+                        </a:rPr>
+                        <a:t>Выгода без признака — проверить нечем</a:t>
+                      </a:r>
+                      <a:endParaRPr lang="en-US" sz="1150" dirty="0">
+                        <a:latin typeface="Arial" charset="0"/>
+                        <a:ea typeface="Arial" charset="0"/>
+                        <a:cs typeface="Arial" charset="0"/>
+                      </a:endParaRPr>
+                    </a:p>
+                  </a:txBody>
+                  <a:tcPr marL="91440" marR="91440" marT="45720" marB="45720" anchor="ctr">
+                    <a:lnL w="6350" cap="flat" cmpd="sng" algn="ctr">
+                      <a:solidFill>
+                        <a:srgbClr val="D8DEE6"/>
+                      </a:solidFill>
+                      <a:prstDash val="solid"/>
+                      <a:round/>
+                      <a:headEnd type="none" w="med" len="med"/>
+                      <a:tailEnd type="none" w="med" len="med"/>
+                    </a:lnL>
+                    <a:lnR w="6350" cap="flat" cmpd="sng" algn="ctr">
+                      <a:solidFill>
+                        <a:srgbClr val="D8DEE6"/>
+                      </a:solidFill>
+                      <a:prstDash val="solid"/>
+                      <a:round/>
+                      <a:headEnd type="none" w="med" len="med"/>
+                      <a:tailEnd type="none" w="med" len="med"/>
+                    </a:lnR>
+                    <a:lnT w="6350" cap="flat" cmpd="sng" algn="ctr">
+                      <a:solidFill>
+                        <a:srgbClr val="D8DEE6"/>
+                      </a:solidFill>
+                      <a:prstDash val="solid"/>
+                      <a:round/>
+                      <a:headEnd type="none" w="med" len="med"/>
+                      <a:tailEnd type="none" w="med" len="med"/>
+                    </a:lnT>
+                    <a:lnB w="6350" cap="flat" cmpd="sng" algn="ctr">
+                      <a:solidFill>
+                        <a:srgbClr val="D8DEE6"/>
+                      </a:solidFill>
+                      <a:prstDash val="solid"/>
+                      <a:round/>
+                      <a:headEnd type="none" w="med" len="med"/>
+                      <a:tailEnd type="none" w="med" len="med"/>
+                    </a:lnB>
+                  </a:tcPr>
+                </a:tc>
+                <a:tc>
+                  <a:txBody>
+                    <a:bodyPr/>
+                    <a:lstStyle/>
+                    <a:p>
+                      <a:pPr indent="0" marL="0">
+                        <a:buNone/>
+                      </a:pPr>
+                      <a:r>
+                        <a:rPr lang="en-US" sz="1150" dirty="0">
+                          <a:solidFill>
+                            <a:srgbClr val="1E293B"/>
+                          </a:solidFill>
+                          <a:latin typeface="Arial" pitchFamily="34" charset="0"/>
+                          <a:ea typeface="Arial" pitchFamily="34" charset="-122"/>
+                          <a:cs typeface="Arial" pitchFamily="34" charset="-120"/>
+                        </a:rPr>
+                        <a:t>Сказать, что именно перестанет происходить</a:t>
+                      </a:r>
+                      <a:endParaRPr lang="en-US" sz="1150" dirty="0">
+                        <a:latin typeface="Arial" charset="0"/>
+                        <a:ea typeface="Arial" charset="0"/>
+                        <a:cs typeface="Arial" charset="0"/>
+                      </a:endParaRPr>
+                    </a:p>
+                  </a:txBody>
+                  <a:tcPr marL="91440" marR="91440" marT="45720" marB="45720" anchor="ctr">
+                    <a:lnL w="6350" cap="flat" cmpd="sng" algn="ctr">
+                      <a:solidFill>
+                        <a:srgbClr val="D8DEE6"/>
+                      </a:solidFill>
+                      <a:prstDash val="solid"/>
+                      <a:round/>
+                      <a:headEnd type="none" w="med" len="med"/>
+                      <a:tailEnd type="none" w="med" len="med"/>
+                    </a:lnL>
+                    <a:lnR w="6350" cap="flat" cmpd="sng" algn="ctr">
+                      <a:solidFill>
+                        <a:srgbClr val="D8DEE6"/>
+                      </a:solidFill>
+                      <a:prstDash val="solid"/>
+                      <a:round/>
+                      <a:headEnd type="none" w="med" len="med"/>
+                      <a:tailEnd type="none" w="med" len="med"/>
+                    </a:lnR>
+                    <a:lnT w="6350" cap="flat" cmpd="sng" algn="ctr">
+                      <a:solidFill>
+                        <a:srgbClr val="D8DEE6"/>
+                      </a:solidFill>
+                      <a:prstDash val="solid"/>
+                      <a:round/>
+                      <a:headEnd type="none" w="med" len="med"/>
+                      <a:tailEnd type="none" w="med" len="med"/>
+                    </a:lnT>
+                    <a:lnB w="6350" cap="flat" cmpd="sng" algn="ctr">
+                      <a:solidFill>
+                        <a:srgbClr val="D8DEE6"/>
+                      </a:solidFill>
+                      <a:prstDash val="solid"/>
+                      <a:round/>
+                      <a:headEnd type="none" w="med" len="med"/>
+                      <a:tailEnd type="none" w="med" len="med"/>
+                    </a:lnB>
+                  </a:tcPr>
+                </a:tc>
+              </a:tr>
+              <a:tr h="566928">
+                <a:tc>
+                  <a:txBody>
+                    <a:bodyPr/>
+                    <a:lstStyle/>
+                    <a:p>
+                      <a:pPr indent="0" marL="0">
+                        <a:buNone/>
+                      </a:pPr>
+                      <a:r>
+                        <a:rPr lang="en-US" sz="1150" dirty="0">
+                          <a:solidFill>
+                            <a:srgbClr val="1E293B"/>
+                          </a:solidFill>
+                          <a:latin typeface="Arial" pitchFamily="34" charset="0"/>
+                          <a:ea typeface="Arial" pitchFamily="34" charset="-122"/>
+                          <a:cs typeface="Arial" pitchFamily="34" charset="-120"/>
+                        </a:rPr>
+                        <a:t>«Аналогов нет»</a:t>
+                      </a:r>
+                      <a:endParaRPr lang="en-US" sz="1150" dirty="0">
+                        <a:latin typeface="Arial" charset="0"/>
+                        <a:ea typeface="Arial" charset="0"/>
+                        <a:cs typeface="Arial" charset="0"/>
+                      </a:endParaRPr>
+                    </a:p>
+                  </a:txBody>
+                  <a:tcPr marL="91440" marR="91440" marT="45720" marB="45720" anchor="ctr">
+                    <a:lnL w="6350" cap="flat" cmpd="sng" algn="ctr">
+                      <a:solidFill>
+                        <a:srgbClr val="D8DEE6"/>
+                      </a:solidFill>
+                      <a:prstDash val="solid"/>
+                      <a:round/>
+                      <a:headEnd type="none" w="med" len="med"/>
+                      <a:tailEnd type="none" w="med" len="med"/>
+                    </a:lnL>
+                    <a:lnR w="6350" cap="flat" cmpd="sng" algn="ctr">
+                      <a:solidFill>
+                        <a:srgbClr val="D8DEE6"/>
+                      </a:solidFill>
+                      <a:prstDash val="solid"/>
+                      <a:round/>
+                      <a:headEnd type="none" w="med" len="med"/>
+                      <a:tailEnd type="none" w="med" len="med"/>
+                    </a:lnR>
+                    <a:lnT w="6350" cap="flat" cmpd="sng" algn="ctr">
+                      <a:solidFill>
+                        <a:srgbClr val="D8DEE6"/>
+                      </a:solidFill>
+                      <a:prstDash val="solid"/>
+                      <a:round/>
+                      <a:headEnd type="none" w="med" len="med"/>
+                      <a:tailEnd type="none" w="med" len="med"/>
+                    </a:lnT>
+                    <a:lnB w="6350" cap="flat" cmpd="sng" algn="ctr">
+                      <a:solidFill>
+                        <a:srgbClr val="D8DEE6"/>
+                      </a:solidFill>
+                      <a:prstDash val="solid"/>
+                      <a:round/>
+                      <a:headEnd type="none" w="med" len="med"/>
+                      <a:tailEnd type="none" w="med" len="med"/>
+                    </a:lnB>
+                  </a:tcPr>
+                </a:tc>
+                <a:tc>
+                  <a:txBody>
+                    <a:bodyPr/>
+                    <a:lstStyle/>
+                    <a:p>
+                      <a:pPr indent="0" marL="0">
+                        <a:buNone/>
+                      </a:pPr>
+                      <a:r>
+                        <a:rPr lang="en-US" sz="1150" dirty="0">
+                          <a:solidFill>
+                            <a:srgbClr val="1E293B"/>
+                          </a:solidFill>
+                          <a:latin typeface="Arial" pitchFamily="34" charset="0"/>
+                          <a:ea typeface="Arial" pitchFamily="34" charset="-122"/>
+                          <a:cs typeface="Arial" pitchFamily="34" charset="-120"/>
+                        </a:rPr>
+                        <a:t>Текущий способ не искали</a:t>
+                      </a:r>
+                      <a:endParaRPr lang="en-US" sz="1150" dirty="0">
+                        <a:latin typeface="Arial" charset="0"/>
+                        <a:ea typeface="Arial" charset="0"/>
+                        <a:cs typeface="Arial" charset="0"/>
+                      </a:endParaRPr>
+                    </a:p>
+                  </a:txBody>
+                  <a:tcPr marL="91440" marR="91440" marT="45720" marB="45720" anchor="ctr">
+                    <a:lnL w="6350" cap="flat" cmpd="sng" algn="ctr">
+                      <a:solidFill>
+                        <a:srgbClr val="D8DEE6"/>
+                      </a:solidFill>
+                      <a:prstDash val="solid"/>
+                      <a:round/>
+                      <a:headEnd type="none" w="med" len="med"/>
+                      <a:tailEnd type="none" w="med" len="med"/>
+                    </a:lnL>
+                    <a:lnR w="6350" cap="flat" cmpd="sng" algn="ctr">
+                      <a:solidFill>
+                        <a:srgbClr val="D8DEE6"/>
+                      </a:solidFill>
+                      <a:prstDash val="solid"/>
+                      <a:round/>
+                      <a:headEnd type="none" w="med" len="med"/>
+                      <a:tailEnd type="none" w="med" len="med"/>
+                    </a:lnR>
+                    <a:lnT w="6350" cap="flat" cmpd="sng" algn="ctr">
+                      <a:solidFill>
+                        <a:srgbClr val="D8DEE6"/>
+                      </a:solidFill>
+                      <a:prstDash val="solid"/>
+                      <a:round/>
+                      <a:headEnd type="none" w="med" len="med"/>
+                      <a:tailEnd type="none" w="med" len="med"/>
+                    </a:lnT>
+                    <a:lnB w="6350" cap="flat" cmpd="sng" algn="ctr">
+                      <a:solidFill>
+                        <a:srgbClr val="D8DEE6"/>
+                      </a:solidFill>
+                      <a:prstDash val="solid"/>
+                      <a:round/>
+                      <a:headEnd type="none" w="med" len="med"/>
+                      <a:tailEnd type="none" w="med" len="med"/>
+                    </a:lnB>
+                  </a:tcPr>
+                </a:tc>
+                <a:tc>
+                  <a:txBody>
+                    <a:bodyPr/>
+                    <a:lstStyle/>
+                    <a:p>
+                      <a:pPr indent="0" marL="0">
+                        <a:buNone/>
+                      </a:pPr>
+                      <a:r>
+                        <a:rPr lang="en-US" sz="1150" dirty="0">
+                          <a:solidFill>
+                            <a:srgbClr val="1E293B"/>
+                          </a:solidFill>
+                          <a:latin typeface="Arial" pitchFamily="34" charset="0"/>
+                          <a:ea typeface="Arial" pitchFamily="34" charset="-122"/>
+                          <a:cs typeface="Arial" pitchFamily="34" charset="-120"/>
+                        </a:rPr>
+                        <a:t>Назвать хотя бы один — «делают на глаз», «пишут в чате»</a:t>
+                      </a:r>
+                      <a:endParaRPr lang="en-US" sz="1150" dirty="0">
+                        <a:latin typeface="Arial" charset="0"/>
+                        <a:ea typeface="Arial" charset="0"/>
+                        <a:cs typeface="Arial" charset="0"/>
+                      </a:endParaRPr>
+                    </a:p>
+                  </a:txBody>
+                  <a:tcPr marL="91440" marR="91440" marT="45720" marB="45720" anchor="ctr">
+                    <a:lnL w="6350" cap="flat" cmpd="sng" algn="ctr">
+                      <a:solidFill>
+                        <a:srgbClr val="D8DEE6"/>
+                      </a:solidFill>
+                      <a:prstDash val="solid"/>
+                      <a:round/>
+                      <a:headEnd type="none" w="med" len="med"/>
+                      <a:tailEnd type="none" w="med" len="med"/>
+                    </a:lnL>
+                    <a:lnR w="6350" cap="flat" cmpd="sng" algn="ctr">
+                      <a:solidFill>
+                        <a:srgbClr val="D8DEE6"/>
+                      </a:solidFill>
+                      <a:prstDash val="solid"/>
+                      <a:round/>
+                      <a:headEnd type="none" w="med" len="med"/>
+                      <a:tailEnd type="none" w="med" len="med"/>
+                    </a:lnR>
+                    <a:lnT w="6350" cap="flat" cmpd="sng" algn="ctr">
+                      <a:solidFill>
+                        <a:srgbClr val="D8DEE6"/>
+                      </a:solidFill>
+                      <a:prstDash val="solid"/>
+                      <a:round/>
+                      <a:headEnd type="none" w="med" len="med"/>
+                      <a:tailEnd type="none" w="med" len="med"/>
+                    </a:lnT>
+                    <a:lnB w="6350" cap="flat" cmpd="sng" algn="ctr">
+                      <a:solidFill>
+                        <a:srgbClr val="D8DEE6"/>
+                      </a:solidFill>
+                      <a:prstDash val="solid"/>
+                      <a:round/>
+                      <a:headEnd type="none" w="med" len="med"/>
+                      <a:tailEnd type="none" w="med" len="med"/>
+                    </a:lnB>
+                  </a:tcPr>
+                </a:tc>
+              </a:tr>
+              <a:tr h="566928">
+                <a:tc>
+                  <a:txBody>
+                    <a:bodyPr/>
+                    <a:lstStyle/>
+                    <a:p>
+                      <a:pPr indent="0" marL="0">
+                        <a:buNone/>
+                      </a:pPr>
+                      <a:r>
+                        <a:rPr lang="en-US" sz="1150" dirty="0">
+                          <a:solidFill>
+                            <a:srgbClr val="1E293B"/>
+                          </a:solidFill>
+                          <a:latin typeface="Arial" pitchFamily="34" charset="0"/>
+                          <a:ea typeface="Arial" pitchFamily="34" charset="-122"/>
+                          <a:cs typeface="Arial" pitchFamily="34" charset="-120"/>
+                        </a:rPr>
+                        <a:t>Заказчик — мы сами</a:t>
+                      </a:r>
+                      <a:endParaRPr lang="en-US" sz="1150" dirty="0">
+                        <a:latin typeface="Arial" charset="0"/>
+                        <a:ea typeface="Arial" charset="0"/>
+                        <a:cs typeface="Arial" charset="0"/>
+                      </a:endParaRPr>
+                    </a:p>
+                  </a:txBody>
+                  <a:tcPr marL="91440" marR="91440" marT="45720" marB="45720" anchor="ctr">
+                    <a:lnL w="6350" cap="flat" cmpd="sng" algn="ctr">
+                      <a:solidFill>
+                        <a:srgbClr val="D8DEE6"/>
+                      </a:solidFill>
+                      <a:prstDash val="solid"/>
+                      <a:round/>
+                      <a:headEnd type="none" w="med" len="med"/>
+                      <a:tailEnd type="none" w="med" len="med"/>
+                    </a:lnL>
+                    <a:lnR w="6350" cap="flat" cmpd="sng" algn="ctr">
+                      <a:solidFill>
+                        <a:srgbClr val="D8DEE6"/>
+                      </a:solidFill>
+                      <a:prstDash val="solid"/>
+                      <a:round/>
+                      <a:headEnd type="none" w="med" len="med"/>
+                      <a:tailEnd type="none" w="med" len="med"/>
+                    </a:lnR>
+                    <a:lnT w="6350" cap="flat" cmpd="sng" algn="ctr">
+                      <a:solidFill>
+                        <a:srgbClr val="D8DEE6"/>
+                      </a:solidFill>
+                      <a:prstDash val="solid"/>
+                      <a:round/>
+                      <a:headEnd type="none" w="med" len="med"/>
+                      <a:tailEnd type="none" w="med" len="med"/>
+                    </a:lnT>
+                    <a:lnB w="6350" cap="flat" cmpd="sng" algn="ctr">
+                      <a:solidFill>
+                        <a:srgbClr val="D8DEE6"/>
+                      </a:solidFill>
+                      <a:prstDash val="solid"/>
+                      <a:round/>
+                      <a:headEnd type="none" w="med" len="med"/>
+                      <a:tailEnd type="none" w="med" len="med"/>
+                    </a:lnB>
+                  </a:tcPr>
+                </a:tc>
+                <a:tc>
+                  <a:txBody>
+                    <a:bodyPr/>
+                    <a:lstStyle/>
+                    <a:p>
+                      <a:pPr indent="0" marL="0">
+                        <a:buNone/>
+                      </a:pPr>
+                      <a:r>
+                        <a:rPr lang="en-US" sz="1150" dirty="0">
+                          <a:solidFill>
+                            <a:srgbClr val="1E293B"/>
+                          </a:solidFill>
+                          <a:latin typeface="Arial" pitchFamily="34" charset="0"/>
+                          <a:ea typeface="Arial" pitchFamily="34" charset="-122"/>
+                          <a:cs typeface="Arial" pitchFamily="34" charset="-120"/>
+                        </a:rPr>
+                        <a:t>Внешнего адресата нет, проект замкнут на команду</a:t>
+                      </a:r>
+                      <a:endParaRPr lang="en-US" sz="1150" dirty="0">
+                        <a:latin typeface="Arial" charset="0"/>
+                        <a:ea typeface="Arial" charset="0"/>
+                        <a:cs typeface="Arial" charset="0"/>
+                      </a:endParaRPr>
+                    </a:p>
+                  </a:txBody>
+                  <a:tcPr marL="91440" marR="91440" marT="45720" marB="45720" anchor="ctr">
+                    <a:lnL w="6350" cap="flat" cmpd="sng" algn="ctr">
+                      <a:solidFill>
+                        <a:srgbClr val="D8DEE6"/>
+                      </a:solidFill>
+                      <a:prstDash val="solid"/>
+                      <a:round/>
+                      <a:headEnd type="none" w="med" len="med"/>
+                      <a:tailEnd type="none" w="med" len="med"/>
+                    </a:lnL>
+                    <a:lnR w="6350" cap="flat" cmpd="sng" algn="ctr">
+                      <a:solidFill>
+                        <a:srgbClr val="D8DEE6"/>
+                      </a:solidFill>
+                      <a:prstDash val="solid"/>
+                      <a:round/>
+                      <a:headEnd type="none" w="med" len="med"/>
+                      <a:tailEnd type="none" w="med" len="med"/>
+                    </a:lnR>
+                    <a:lnT w="6350" cap="flat" cmpd="sng" algn="ctr">
+                      <a:solidFill>
+                        <a:srgbClr val="D8DEE6"/>
+                      </a:solidFill>
+                      <a:prstDash val="solid"/>
+                      <a:round/>
+                      <a:headEnd type="none" w="med" len="med"/>
+                      <a:tailEnd type="none" w="med" len="med"/>
+                    </a:lnT>
+                    <a:lnB w="6350" cap="flat" cmpd="sng" algn="ctr">
+                      <a:solidFill>
+                        <a:srgbClr val="D8DEE6"/>
+                      </a:solidFill>
+                      <a:prstDash val="solid"/>
+                      <a:round/>
+                      <a:headEnd type="none" w="med" len="med"/>
+                      <a:tailEnd type="none" w="med" len="med"/>
+                    </a:lnB>
+                  </a:tcPr>
+                </a:tc>
+                <a:tc>
+                  <a:txBody>
+                    <a:bodyPr/>
+                    <a:lstStyle/>
+                    <a:p>
+                      <a:pPr indent="0" marL="0">
+                        <a:buNone/>
+                      </a:pPr>
+                      <a:r>
+                        <a:rPr lang="en-US" sz="1150" dirty="0">
+                          <a:solidFill>
+                            <a:srgbClr val="1E293B"/>
+                          </a:solidFill>
+                          <a:latin typeface="Arial" pitchFamily="34" charset="0"/>
+                          <a:ea typeface="Arial" pitchFamily="34" charset="-122"/>
+                          <a:cs typeface="Arial" pitchFamily="34" charset="-120"/>
+                        </a:rPr>
+                        <a:t>Найти носителя проблемы вне четвёрки</a:t>
+                      </a:r>
+                      <a:endParaRPr lang="en-US" sz="1150" dirty="0">
+                        <a:latin typeface="Arial" charset="0"/>
+                        <a:ea typeface="Arial" charset="0"/>
+                        <a:cs typeface="Arial" charset="0"/>
+                      </a:endParaRPr>
+                    </a:p>
+                  </a:txBody>
+                  <a:tcPr marL="91440" marR="91440" marT="45720" marB="45720" anchor="ctr">
+                    <a:lnL w="6350" cap="flat" cmpd="sng" algn="ctr">
+                      <a:solidFill>
+                        <a:srgbClr val="D8DEE6"/>
+                      </a:solidFill>
+                      <a:prstDash val="solid"/>
+                      <a:round/>
+                      <a:headEnd type="none" w="med" len="med"/>
+                      <a:tailEnd type="none" w="med" len="med"/>
+                    </a:lnL>
+                    <a:lnR w="6350" cap="flat" cmpd="sng" algn="ctr">
+                      <a:solidFill>
+                        <a:srgbClr val="D8DEE6"/>
+                      </a:solidFill>
+                      <a:prstDash val="solid"/>
+                      <a:round/>
+                      <a:headEnd type="none" w="med" len="med"/>
+                      <a:tailEnd type="none" w="med" len="med"/>
+                    </a:lnR>
+                    <a:lnT w="6350" cap="flat" cmpd="sng" algn="ctr">
+                      <a:solidFill>
+                        <a:srgbClr val="D8DEE6"/>
+                      </a:solidFill>
+                      <a:prstDash val="solid"/>
+                      <a:round/>
+                      <a:headEnd type="none" w="med" len="med"/>
+                      <a:tailEnd type="none" w="med" len="med"/>
+                    </a:lnT>
+                    <a:lnB w="6350" cap="flat" cmpd="sng" algn="ctr">
+                      <a:solidFill>
+                        <a:srgbClr val="D8DEE6"/>
+                      </a:solidFill>
+                      <a:prstDash val="solid"/>
+                      <a:round/>
+                      <a:headEnd type="none" w="med" len="med"/>
+                      <a:tailEnd type="none" w="med" len="med"/>
+                    </a:lnB>
+                  </a:tcPr>
+                </a:tc>
+              </a:tr>
+              <a:tr h="566928">
+                <a:tc>
+                  <a:txBody>
+                    <a:bodyPr/>
+                    <a:lstStyle/>
+                    <a:p>
+                      <a:pPr indent="0" marL="0">
+                        <a:buNone/>
+                      </a:pPr>
+                      <a:r>
+                        <a:rPr lang="en-US" sz="1150" dirty="0">
+                          <a:solidFill>
+                            <a:srgbClr val="1E293B"/>
+                          </a:solidFill>
+                          <a:latin typeface="Arial" pitchFamily="34" charset="0"/>
+                          <a:ea typeface="Arial" pitchFamily="34" charset="-122"/>
+                          <a:cs typeface="Arial" pitchFamily="34" charset="-120"/>
+                        </a:rPr>
+                        <a:t>Описана технология</a:t>
+                      </a:r>
+                      <a:endParaRPr lang="en-US" sz="1150" dirty="0">
+                        <a:latin typeface="Arial" charset="0"/>
+                        <a:ea typeface="Arial" charset="0"/>
+                        <a:cs typeface="Arial" charset="0"/>
+                      </a:endParaRPr>
+                    </a:p>
+                  </a:txBody>
+                  <a:tcPr marL="91440" marR="91440" marT="45720" marB="45720" anchor="ctr">
+                    <a:lnL w="6350" cap="flat" cmpd="sng" algn="ctr">
+                      <a:solidFill>
+                        <a:srgbClr val="D8DEE6"/>
+                      </a:solidFill>
+                      <a:prstDash val="solid"/>
+                      <a:round/>
+                      <a:headEnd type="none" w="med" len="med"/>
+                      <a:tailEnd type="none" w="med" len="med"/>
+                    </a:lnL>
+                    <a:lnR w="6350" cap="flat" cmpd="sng" algn="ctr">
+                      <a:solidFill>
+                        <a:srgbClr val="D8DEE6"/>
+                      </a:solidFill>
+                      <a:prstDash val="solid"/>
+                      <a:round/>
+                      <a:headEnd type="none" w="med" len="med"/>
+                      <a:tailEnd type="none" w="med" len="med"/>
+                    </a:lnR>
+                    <a:lnT w="6350" cap="flat" cmpd="sng" algn="ctr">
+                      <a:solidFill>
+                        <a:srgbClr val="D8DEE6"/>
+                      </a:solidFill>
+                      <a:prstDash val="solid"/>
+                      <a:round/>
+                      <a:headEnd type="none" w="med" len="med"/>
+                      <a:tailEnd type="none" w="med" len="med"/>
+                    </a:lnT>
+                    <a:lnB w="6350" cap="flat" cmpd="sng" algn="ctr">
+                      <a:solidFill>
+                        <a:srgbClr val="D8DEE6"/>
+                      </a:solidFill>
+                      <a:prstDash val="solid"/>
+                      <a:round/>
+                      <a:headEnd type="none" w="med" len="med"/>
+                      <a:tailEnd type="none" w="med" len="med"/>
+                    </a:lnB>
+                  </a:tcPr>
+                </a:tc>
+                <a:tc>
+                  <a:txBody>
+                    <a:bodyPr/>
+                    <a:lstStyle/>
+                    <a:p>
+                      <a:pPr indent="0" marL="0">
+                        <a:buNone/>
+                      </a:pPr>
+                      <a:r>
+                        <a:rPr lang="en-US" sz="1150" dirty="0">
+                          <a:solidFill>
+                            <a:srgbClr val="1E293B"/>
+                          </a:solidFill>
+                          <a:latin typeface="Arial" pitchFamily="34" charset="0"/>
+                          <a:ea typeface="Arial" pitchFamily="34" charset="-122"/>
+                          <a:cs typeface="Arial" pitchFamily="34" charset="-120"/>
+                        </a:rPr>
+                        <a:t>Перепутаны «что делаем» и «выгода»</a:t>
+                      </a:r>
+                      <a:endParaRPr lang="en-US" sz="1150" dirty="0">
+                        <a:latin typeface="Arial" charset="0"/>
+                        <a:ea typeface="Arial" charset="0"/>
+                        <a:cs typeface="Arial" charset="0"/>
+                      </a:endParaRPr>
+                    </a:p>
+                  </a:txBody>
+                  <a:tcPr marL="91440" marR="91440" marT="45720" marB="45720" anchor="ctr">
+                    <a:lnL w="6350" cap="flat" cmpd="sng" algn="ctr">
+                      <a:solidFill>
+                        <a:srgbClr val="D8DEE6"/>
+                      </a:solidFill>
+                      <a:prstDash val="solid"/>
+                      <a:round/>
+                      <a:headEnd type="none" w="med" len="med"/>
+                      <a:tailEnd type="none" w="med" len="med"/>
+                    </a:lnL>
+                    <a:lnR w="6350" cap="flat" cmpd="sng" algn="ctr">
+                      <a:solidFill>
+                        <a:srgbClr val="D8DEE6"/>
+                      </a:solidFill>
+                      <a:prstDash val="solid"/>
+                      <a:round/>
+                      <a:headEnd type="none" w="med" len="med"/>
+                      <a:tailEnd type="none" w="med" len="med"/>
+                    </a:lnR>
+                    <a:lnT w="6350" cap="flat" cmpd="sng" algn="ctr">
+                      <a:solidFill>
+                        <a:srgbClr val="D8DEE6"/>
+                      </a:solidFill>
+                      <a:prstDash val="solid"/>
+                      <a:round/>
+                      <a:headEnd type="none" w="med" len="med"/>
+                      <a:tailEnd type="none" w="med" len="med"/>
+                    </a:lnT>
+                    <a:lnB w="6350" cap="flat" cmpd="sng" algn="ctr">
+                      <a:solidFill>
+                        <a:srgbClr val="D8DEE6"/>
+                      </a:solidFill>
+                      <a:prstDash val="solid"/>
+                      <a:round/>
+                      <a:headEnd type="none" w="med" len="med"/>
+                      <a:tailEnd type="none" w="med" len="med"/>
+                    </a:lnB>
+                  </a:tcPr>
+                </a:tc>
+                <a:tc>
+                  <a:txBody>
+                    <a:bodyPr/>
+                    <a:lstStyle/>
+                    <a:p>
+                      <a:pPr indent="0" marL="0">
+                        <a:buNone/>
+                      </a:pPr>
+                      <a:r>
+                        <a:rPr lang="en-US" sz="1150" dirty="0">
+                          <a:solidFill>
+                            <a:srgbClr val="1E293B"/>
+                          </a:solidFill>
+                          <a:latin typeface="Arial" pitchFamily="34" charset="0"/>
+                          <a:ea typeface="Arial" pitchFamily="34" charset="-122"/>
+                          <a:cs typeface="Arial" pitchFamily="34" charset="-120"/>
+                        </a:rPr>
+                        <a:t>Технология — в строку 2, польза человеку — в строку 3</a:t>
+                      </a:r>
+                      <a:endParaRPr lang="en-US" sz="1150" dirty="0">
+                        <a:latin typeface="Arial" charset="0"/>
+                        <a:ea typeface="Arial" charset="0"/>
+                        <a:cs typeface="Arial" charset="0"/>
+                      </a:endParaRPr>
+                    </a:p>
+                  </a:txBody>
+                  <a:tcPr marL="91440" marR="91440" marT="45720" marB="45720" anchor="ctr">
+                    <a:lnL w="6350" cap="flat" cmpd="sng" algn="ctr">
+                      <a:solidFill>
+                        <a:srgbClr val="D8DEE6"/>
+                      </a:solidFill>
+                      <a:prstDash val="solid"/>
+                      <a:round/>
+                      <a:headEnd type="none" w="med" len="med"/>
+                      <a:tailEnd type="none" w="med" len="med"/>
+                    </a:lnL>
+                    <a:lnR w="6350" cap="flat" cmpd="sng" algn="ctr">
+                      <a:solidFill>
+                        <a:srgbClr val="D8DEE6"/>
+                      </a:solidFill>
+                      <a:prstDash val="solid"/>
+                      <a:round/>
+                      <a:headEnd type="none" w="med" len="med"/>
+                      <a:tailEnd type="none" w="med" len="med"/>
+                    </a:lnR>
+                    <a:lnT w="6350" cap="flat" cmpd="sng" algn="ctr">
+                      <a:solidFill>
+                        <a:srgbClr val="D8DEE6"/>
+                      </a:solidFill>
+                      <a:prstDash val="solid"/>
+                      <a:round/>
+                      <a:headEnd type="none" w="med" len="med"/>
+                      <a:tailEnd type="none" w="med" len="med"/>
+                    </a:lnT>
+                    <a:lnB w="6350" cap="flat" cmpd="sng" algn="ctr">
+                      <a:solidFill>
+                        <a:srgbClr val="D8DEE6"/>
+                      </a:solidFill>
+                      <a:prstDash val="solid"/>
+                      <a:round/>
+                      <a:headEnd type="none" w="med" len="med"/>
+                      <a:tailEnd type="none" w="med" len="med"/>
+                    </a:lnB>
+                  </a:tcPr>
+                </a:tc>
+              </a:tr>
+            </a:tbl>
+          </a:graphicData>
+        </a:graphic>
+      </p:graphicFrame>
+      <p:sp>
+        <p:nvSpPr>
+          <p:cNvPr id="6" name="Shape 3"/>
+          <p:cNvSpPr/>
+          <p:nvPr/>
+        </p:nvSpPr>
+        <p:spPr>
+          <a:xfrm>
+            <a:off x="502920" y="4041648"/>
+            <a:ext cx="8138160" cy="658368"/>
+          </a:xfrm>
+          <a:prstGeom prst="roundRect">
+            <a:avLst>
+              <a:gd name="adj" fmla="val 6944"/>
+            </a:avLst>
+          </a:prstGeom>
+          <a:solidFill>
+            <a:srgbClr val="1E4270"/>
+          </a:solidFill>
+          <a:ln w="9525">
+            <a:solidFill>
+              <a:srgbClr val="D8DEE6"/>
+            </a:solidFill>
+            <a:prstDash val="solid"/>
+          </a:ln>
+        </p:spPr>
+      </p:sp>
+      <p:sp>
+        <p:nvSpPr>
+          <p:cNvPr id="7" name="Text 4"/>
+          <p:cNvSpPr txBox="1"/>
+          <p:nvPr/>
+        </p:nvSpPr>
+        <p:spPr>
+          <a:xfrm>
+            <a:off x="777240" y="4187952"/>
+            <a:ext cx="7589520" cy="365760"/>
+          </a:xfrm>
+          <a:prstGeom prst="rect">
+            <a:avLst/>
+          </a:prstGeom>
+          <a:noFill/>
+          <a:ln/>
+        </p:spPr>
+        <p:txBody>
+          <a:bodyPr wrap="square" lIns="0" tIns="0" rIns="0" bIns="0" rtlCol="0" anchor="ctr"/>
+          <a:lstStyle/>
+          <a:p>
+            <a:pPr indent="0" marL="0">
+              <a:buNone/>
+            </a:pPr>
+            <a:r>
+              <a:rPr lang="en-US" sz="1350" b="1" dirty="0">
+                <a:solidFill>
+                  <a:srgbClr val="FFFFFF"/>
+                </a:solidFill>
+                <a:latin typeface="Arial" pitchFamily="34" charset="0"/>
+                <a:ea typeface="Arial" pitchFamily="34" charset="-122"/>
+                <a:cs typeface="Arial" pitchFamily="34" charset="-120"/>
+              </a:rPr>
+              <a:t>Возьмите лист 1. Найдите у себя хотя бы одну из этих пяти. Руку поднимать не надо — три минуты.</a:t>
+            </a:r>
+            <a:endParaRPr lang="en-US" sz="1350" dirty="0"/>
+          </a:p>
+        </p:txBody>
+      </p:sp>
+    </p:spTree>
+  </p:cSld>
+  <p:clrMapOvr>
+    <a:masterClrMapping/>
+  </p:clrMapOvr>
+</p:sld>
+</file>
+
+<file path=ppt/slides/slide11.xml><?xml version="1.0" encoding="utf-8"?>
+<p:sld xmlns:a="http://schemas.openxmlformats.org/drawingml/2006/main" xmlns:r="http://schemas.openxmlformats.org/officeDocument/2006/relationships" xmlns:p="http://schemas.openxmlformats.org/presentationml/2006/main">
+  <p:cSld name="Slide 11">
+    <p:bg>
+      <p:bgPr>
+        <a:solidFill>
+          <a:srgbClr val="FFFFFF"/>
+        </a:solidFill>
+      </p:bgPr>
+    </p:bg>
+    <p:spTree>
+      <p:nvGrpSpPr>
+        <p:cNvPr id="1" name=""/>
+        <p:cNvGrpSpPr/>
+        <p:nvPr/>
+      </p:nvGrpSpPr>
+      <p:grpSpPr>
+        <a:xfrm>
+          <a:off x="0" y="0"/>
+          <a:ext cx="0" cy="0"/>
+          <a:chOff x="0" y="0"/>
+          <a:chExt cx="0" cy="0"/>
+        </a:xfrm>
+      </p:grpSpPr>
+      <p:sp>
+        <p:nvSpPr>
+          <p:cNvPr id="2" name="Text 0"/>
+          <p:cNvSpPr txBox="1"/>
+          <p:nvPr/>
+        </p:nvSpPr>
+        <p:spPr>
+          <a:xfrm>
+            <a:off x="7543800" y="4754880"/>
+            <a:ext cx="1097280" cy="237744"/>
+          </a:xfrm>
+          <a:prstGeom prst="rect">
+            <a:avLst/>
+          </a:prstGeom>
+          <a:noFill/>
+          <a:ln/>
+        </p:spPr>
+        <p:txBody>
+          <a:bodyPr wrap="square" lIns="0" tIns="0" rIns="0" bIns="0" rtlCol="0" anchor="ctr"/>
+          <a:lstStyle/>
+          <a:p>
+            <a:pPr algn="r" indent="0" marL="0">
+              <a:buNone/>
+            </a:pPr>
+            <a:r>
+              <a:rPr lang="en-US" sz="1000" dirty="0">
+                <a:solidFill>
+                  <a:srgbClr val="64748B"/>
+                </a:solidFill>
+                <a:latin typeface="Arial" pitchFamily="34" charset="0"/>
+                <a:ea typeface="Arial" pitchFamily="34" charset="-122"/>
+                <a:cs typeface="Arial" pitchFamily="34" charset="-120"/>
+              </a:rPr>
+              <a:t>11 / 16</a:t>
             </a:r>
             <a:endParaRPr lang="en-US" sz="1000" dirty="0"/>
           </a:p>
@@ -2909,9 +4435,9 @@
 </p:sld>
 </file>
 
-<file path=ppt/slides/slide11.xml><?xml version="1.0" encoding="utf-8"?>
+<file path=ppt/slides/slide12.xml><?xml version="1.0" encoding="utf-8"?>
 <p:sld xmlns:a="http://schemas.openxmlformats.org/drawingml/2006/main" xmlns:r="http://schemas.openxmlformats.org/officeDocument/2006/relationships" xmlns:p="http://schemas.openxmlformats.org/presentationml/2006/main">
-  <p:cSld name="Slide 11">
+  <p:cSld name="Slide 12">
     <p:bg>
       <p:bgPr>
         <a:solidFill>
@@ -2966,7 +4492,7 @@
                 <a:ea typeface="Arial" pitchFamily="34" charset="-122"/>
                 <a:cs typeface="Arial" pitchFamily="34" charset="-120"/>
               </a:rPr>
-              <a:t>11 / 15</a:t>
+              <a:t>12 / 16</a:t>
             </a:r>
             <a:endParaRPr lang="en-US" sz="1000" dirty="0"/>
           </a:p>
@@ -3052,7 +4578,7 @@
       </p:sp>
       <p:graphicFrame>
         <p:nvGraphicFramePr>
-          <p:cNvPr id="12" name="Table 0"/>
+          <p:cNvPr id="13" name="Table 0"/>
           <p:cNvGraphicFramePr>
             <a:graphicFrameLocks noGrp="1"/>
           </p:cNvGraphicFramePr>
@@ -4021,9 +5547,9 @@
 </p:sld>
 </file>
 
-<file path=ppt/slides/slide12.xml><?xml version="1.0" encoding="utf-8"?>
+<file path=ppt/slides/slide13.xml><?xml version="1.0" encoding="utf-8"?>
 <p:sld xmlns:a="http://schemas.openxmlformats.org/drawingml/2006/main" xmlns:r="http://schemas.openxmlformats.org/officeDocument/2006/relationships" xmlns:p="http://schemas.openxmlformats.org/presentationml/2006/main">
-  <p:cSld name="Slide 12">
+  <p:cSld name="Slide 13">
     <p:bg>
       <p:bgPr>
         <a:solidFill>
@@ -4078,7 +5604,7 @@
                 <a:ea typeface="Arial" pitchFamily="34" charset="-122"/>
                 <a:cs typeface="Arial" pitchFamily="34" charset="-120"/>
               </a:rPr>
-              <a:t>12 / 15</a:t>
+              <a:t>13 / 16</a:t>
             </a:r>
             <a:endParaRPr lang="en-US" sz="1000" dirty="0"/>
           </a:p>
@@ -4164,7 +5690,7 @@
       </p:sp>
       <p:graphicFrame>
         <p:nvGraphicFramePr>
-          <p:cNvPr id="13" name="Table 0"/>
+          <p:cNvPr id="14" name="Table 0"/>
           <p:cNvGraphicFramePr>
             <a:graphicFrameLocks noGrp="1"/>
           </p:cNvGraphicFramePr>
@@ -5655,9 +7181,9 @@
 </p:sld>
 </file>
 
-<file path=ppt/slides/slide13.xml><?xml version="1.0" encoding="utf-8"?>
+<file path=ppt/slides/slide14.xml><?xml version="1.0" encoding="utf-8"?>
 <p:sld xmlns:a="http://schemas.openxmlformats.org/drawingml/2006/main" xmlns:r="http://schemas.openxmlformats.org/officeDocument/2006/relationships" xmlns:p="http://schemas.openxmlformats.org/presentationml/2006/main">
-  <p:cSld name="Slide 13">
+  <p:cSld name="Slide 14">
     <p:bg>
       <p:bgPr>
         <a:solidFill>
@@ -5712,7 +7238,7 @@
                 <a:ea typeface="Arial" pitchFamily="34" charset="-122"/>
                 <a:cs typeface="Arial" pitchFamily="34" charset="-120"/>
               </a:rPr>
-              <a:t>13 / 15</a:t>
+              <a:t>14 / 16</a:t>
             </a:r>
             <a:endParaRPr lang="en-US" sz="1000" dirty="0"/>
           </a:p>
@@ -6060,9 +7586,9 @@
 </p:sld>
 </file>
 
-<file path=ppt/slides/slide14.xml><?xml version="1.0" encoding="utf-8"?>
+<file path=ppt/slides/slide15.xml><?xml version="1.0" encoding="utf-8"?>
 <p:sld xmlns:a="http://schemas.openxmlformats.org/drawingml/2006/main" xmlns:r="http://schemas.openxmlformats.org/officeDocument/2006/relationships" xmlns:p="http://schemas.openxmlformats.org/presentationml/2006/main">
-  <p:cSld name="Slide 14">
+  <p:cSld name="Slide 15">
     <p:bg>
       <p:bgPr>
         <a:solidFill>
@@ -6117,7 +7643,7 @@
                 <a:ea typeface="Arial" pitchFamily="34" charset="-122"/>
                 <a:cs typeface="Arial" pitchFamily="34" charset="-120"/>
               </a:rPr>
-              <a:t>14 / 15</a:t>
+              <a:t>15 / 16</a:t>
             </a:r>
             <a:endParaRPr lang="en-US" sz="1000" dirty="0"/>
           </a:p>
@@ -6464,9 +7990,9 @@
 </p:sld>
 </file>
 
-<file path=ppt/slides/slide15.xml><?xml version="1.0" encoding="utf-8"?>
+<file path=ppt/slides/slide16.xml><?xml version="1.0" encoding="utf-8"?>
 <p:sld xmlns:a="http://schemas.openxmlformats.org/drawingml/2006/main" xmlns:r="http://schemas.openxmlformats.org/officeDocument/2006/relationships" xmlns:p="http://schemas.openxmlformats.org/presentationml/2006/main">
-  <p:cSld name="Slide 15">
+  <p:cSld name="Slide 16">
     <p:bg>
       <p:bgPr>
         <a:solidFill>
@@ -6521,7 +8047,7 @@
                 <a:ea typeface="Arial" pitchFamily="34" charset="-122"/>
                 <a:cs typeface="Arial" pitchFamily="34" charset="-120"/>
               </a:rPr>
-              <a:t>15 / 15</a:t>
+              <a:t>16 / 16</a:t>
             </a:r>
             <a:endParaRPr lang="en-US" sz="1000" dirty="0"/>
           </a:p>
@@ -6607,7 +8133,7 @@
       </p:sp>
       <p:graphicFrame>
         <p:nvGraphicFramePr>
-          <p:cNvPr id="16" name="Table 0"/>
+          <p:cNvPr id="17" name="Table 0"/>
           <p:cNvGraphicFramePr>
             <a:graphicFrameLocks noGrp="1"/>
           </p:cNvGraphicFramePr>
@@ -7738,7 +9264,1120 @@
                 <a:ea typeface="Arial" pitchFamily="34" charset="-122"/>
                 <a:cs typeface="Arial" pitchFamily="34" charset="-120"/>
               </a:rPr>
-              <a:t>2 / 15</a:t>
+              <a:t>2 / 16</a:t>
+            </a:r>
+            <a:endParaRPr lang="en-US" sz="1000" dirty="0"/>
+          </a:p>
+        </p:txBody>
+      </p:sp>
+      <p:sp>
+        <p:nvSpPr>
+          <p:cNvPr id="3" name="Text 1"/>
+          <p:cNvSpPr txBox="1"/>
+          <p:nvPr/>
+        </p:nvSpPr>
+        <p:spPr>
+          <a:xfrm>
+            <a:off x="502920" y="182880"/>
+            <a:ext cx="8138160" cy="219456"/>
+          </a:xfrm>
+          <a:prstGeom prst="rect">
+            <a:avLst/>
+          </a:prstGeom>
+          <a:noFill/>
+          <a:ln/>
+        </p:spPr>
+        <p:txBody>
+          <a:bodyPr wrap="square" lIns="0" tIns="0" rIns="0" bIns="0" rtlCol="0" anchor="ctr"/>
+          <a:lstStyle/>
+          <a:p>
+            <a:pPr indent="0" marL="0">
+              <a:buNone/>
+            </a:pPr>
+            <a:r>
+              <a:rPr lang="en-US" sz="1100" spc="150" kern="0" dirty="0">
+                <a:solidFill>
+                  <a:srgbClr val="64748B"/>
+                </a:solidFill>
+                <a:latin typeface="Arial" pitchFamily="34" charset="0"/>
+                <a:ea typeface="Arial" pitchFamily="34" charset="-122"/>
+                <a:cs typeface="Arial" pitchFamily="34" charset="-120"/>
+              </a:rPr>
+              <a:t>ГДЕ МЫ И СКОЛЬКО ОСТАЛОСЬ</a:t>
+            </a:r>
+            <a:endParaRPr lang="en-US" sz="1100" dirty="0"/>
+          </a:p>
+        </p:txBody>
+      </p:sp>
+      <p:sp>
+        <p:nvSpPr>
+          <p:cNvPr id="4" name="Text 2"/>
+          <p:cNvSpPr txBox="1"/>
+          <p:nvPr/>
+        </p:nvSpPr>
+        <p:spPr>
+          <a:xfrm>
+            <a:off x="502920" y="365760"/>
+            <a:ext cx="8138160" cy="566928"/>
+          </a:xfrm>
+          <a:prstGeom prst="rect">
+            <a:avLst/>
+          </a:prstGeom>
+          <a:noFill/>
+          <a:ln/>
+        </p:spPr>
+        <p:txBody>
+          <a:bodyPr wrap="square" lIns="0" tIns="0" rIns="0" bIns="0" rtlCol="0" anchor="ctr"/>
+          <a:lstStyle/>
+          <a:p>
+            <a:pPr indent="0" marL="0">
+              <a:buNone/>
+            </a:pPr>
+            <a:r>
+              <a:rPr lang="en-US" sz="2600" b="1" dirty="0">
+                <a:solidFill>
+                  <a:srgbClr val="005AAA"/>
+                </a:solidFill>
+                <a:latin typeface="Arial" pitchFamily="34" charset="0"/>
+                <a:ea typeface="Arial" pitchFamily="34" charset="-122"/>
+                <a:cs typeface="Arial" pitchFamily="34" charset="-120"/>
+              </a:rPr>
+              <a:t>Дорожная карта курса</a:t>
+            </a:r>
+            <a:endParaRPr lang="en-US" sz="2600" dirty="0"/>
+          </a:p>
+        </p:txBody>
+      </p:sp>
+      <p:sp>
+        <p:nvSpPr>
+          <p:cNvPr id="5" name="Shape 3"/>
+          <p:cNvSpPr/>
+          <p:nvPr/>
+        </p:nvSpPr>
+        <p:spPr>
+          <a:xfrm>
+            <a:off x="502920" y="1005840"/>
+            <a:ext cx="8138160" cy="566928"/>
+          </a:xfrm>
+          <a:prstGeom prst="roundRect">
+            <a:avLst>
+              <a:gd name="adj" fmla="val 8065"/>
+            </a:avLst>
+          </a:prstGeom>
+          <a:solidFill>
+            <a:srgbClr val="1E4270"/>
+          </a:solidFill>
+          <a:ln w="6350">
+            <a:solidFill>
+              <a:srgbClr val="1E4270"/>
+            </a:solidFill>
+            <a:prstDash val="solid"/>
+          </a:ln>
+        </p:spPr>
+      </p:sp>
+      <p:sp>
+        <p:nvSpPr>
+          <p:cNvPr id="6" name="Text 4"/>
+          <p:cNvSpPr txBox="1"/>
+          <p:nvPr/>
+        </p:nvSpPr>
+        <p:spPr>
+          <a:xfrm>
+            <a:off x="731520" y="1097280"/>
+            <a:ext cx="7680960" cy="384048"/>
+          </a:xfrm>
+          <a:prstGeom prst="rect">
+            <a:avLst/>
+          </a:prstGeom>
+          <a:noFill/>
+          <a:ln/>
+        </p:spPr>
+        <p:txBody>
+          <a:bodyPr wrap="square" lIns="0" tIns="0" rIns="0" bIns="0" rtlCol="0" anchor="ctr"/>
+          <a:lstStyle/>
+          <a:p>
+            <a:pPr algn="ctr" indent="0" marL="0">
+              <a:buNone/>
+            </a:pPr>
+            <a:r>
+              <a:rPr lang="en-US" sz="1400" b="1" dirty="0">
+                <a:solidFill>
+                  <a:srgbClr val="FFFFFF"/>
+                </a:solidFill>
+                <a:latin typeface="Arial" pitchFamily="34" charset="0"/>
+                <a:ea typeface="Arial" pitchFamily="34" charset="-122"/>
+                <a:cs typeface="Arial" pitchFamily="34" charset="-120"/>
+              </a:rPr>
+              <a:t>До фиксации темы — 7 дней   ·   до чекпоинта 21.11 — 9 недель   ·   до защиты 26.12 — 14 недель</a:t>
+            </a:r>
+            <a:endParaRPr lang="en-US" sz="1400" dirty="0"/>
+          </a:p>
+        </p:txBody>
+      </p:sp>
+      <p:sp>
+        <p:nvSpPr>
+          <p:cNvPr id="7" name="Shape 5"/>
+          <p:cNvSpPr/>
+          <p:nvPr/>
+        </p:nvSpPr>
+        <p:spPr>
+          <a:xfrm>
+            <a:off x="640080" y="1938528"/>
+            <a:ext cx="7863840" cy="32004"/>
+          </a:xfrm>
+          <a:prstGeom prst="rect">
+            <a:avLst/>
+          </a:prstGeom>
+          <a:solidFill>
+            <a:srgbClr val="D8DEE6"/>
+          </a:solidFill>
+          <a:ln w="12700">
+            <a:solidFill>
+              <a:srgbClr val="333333"/>
+            </a:solidFill>
+            <a:prstDash val="solid"/>
+          </a:ln>
+        </p:spPr>
+      </p:sp>
+      <p:sp>
+        <p:nvSpPr>
+          <p:cNvPr id="8" name="Shape 6"/>
+          <p:cNvSpPr/>
+          <p:nvPr/>
+        </p:nvSpPr>
+        <p:spPr>
+          <a:xfrm>
+            <a:off x="1383030" y="1828800"/>
+            <a:ext cx="164592" cy="164592"/>
+          </a:xfrm>
+          <a:prstGeom prst="ellipse">
+            <a:avLst/>
+          </a:prstGeom>
+          <a:solidFill>
+            <a:srgbClr val="9E4257"/>
+          </a:solidFill>
+          <a:ln w="19050">
+            <a:solidFill>
+              <a:srgbClr val="FFFFFF"/>
+            </a:solidFill>
+            <a:prstDash val="solid"/>
+          </a:ln>
+        </p:spPr>
+      </p:sp>
+      <p:sp>
+        <p:nvSpPr>
+          <p:cNvPr id="9" name="Shape 7"/>
+          <p:cNvSpPr/>
+          <p:nvPr/>
+        </p:nvSpPr>
+        <p:spPr>
+          <a:xfrm>
+            <a:off x="502920" y="2148840"/>
+            <a:ext cx="1924812" cy="1691640"/>
+          </a:xfrm>
+          <a:prstGeom prst="roundRect">
+            <a:avLst>
+              <a:gd name="adj" fmla="val 2703"/>
+            </a:avLst>
+          </a:prstGeom>
+          <a:solidFill>
+            <a:srgbClr val="1E4270"/>
+          </a:solidFill>
+          <a:ln w="9525">
+            <a:solidFill>
+              <a:srgbClr val="1E4270"/>
+            </a:solidFill>
+            <a:prstDash val="solid"/>
+          </a:ln>
+        </p:spPr>
+      </p:sp>
+      <p:sp>
+        <p:nvSpPr>
+          <p:cNvPr id="10" name="Text 8"/>
+          <p:cNvSpPr txBox="1"/>
+          <p:nvPr/>
+        </p:nvSpPr>
+        <p:spPr>
+          <a:xfrm>
+            <a:off x="612648" y="2267712"/>
+            <a:ext cx="1705356" cy="292608"/>
+          </a:xfrm>
+          <a:prstGeom prst="rect">
+            <a:avLst/>
+          </a:prstGeom>
+          <a:noFill/>
+          <a:ln/>
+        </p:spPr>
+        <p:txBody>
+          <a:bodyPr wrap="square" lIns="0" tIns="0" rIns="0" bIns="0" rtlCol="0" anchor="ctr"/>
+          <a:lstStyle/>
+          <a:p>
+            <a:pPr algn="ctr" indent="0" marL="0">
+              <a:buNone/>
+            </a:pPr>
+            <a:r>
+              <a:rPr lang="en-US" sz="1700" b="1" dirty="0">
+                <a:solidFill>
+                  <a:srgbClr val="FFFFFF"/>
+                </a:solidFill>
+                <a:latin typeface="Arial" pitchFamily="34" charset="0"/>
+                <a:ea typeface="Arial" pitchFamily="34" charset="-122"/>
+                <a:cs typeface="Arial" pitchFamily="34" charset="-120"/>
+              </a:rPr>
+              <a:t>26.09</a:t>
+            </a:r>
+            <a:endParaRPr lang="en-US" sz="1700" dirty="0"/>
+          </a:p>
+        </p:txBody>
+      </p:sp>
+      <p:sp>
+        <p:nvSpPr>
+          <p:cNvPr id="11" name="Text 9"/>
+          <p:cNvSpPr txBox="1"/>
+          <p:nvPr/>
+        </p:nvSpPr>
+        <p:spPr>
+          <a:xfrm>
+            <a:off x="612648" y="2578608"/>
+            <a:ext cx="1705356" cy="292608"/>
+          </a:xfrm>
+          <a:prstGeom prst="rect">
+            <a:avLst/>
+          </a:prstGeom>
+          <a:noFill/>
+          <a:ln/>
+        </p:spPr>
+        <p:txBody>
+          <a:bodyPr wrap="square" lIns="0" tIns="0" rIns="0" bIns="0" rtlCol="0" anchor="ctr"/>
+          <a:lstStyle/>
+          <a:p>
+            <a:pPr algn="ctr" indent="0" marL="0">
+              <a:buNone/>
+            </a:pPr>
+            <a:r>
+              <a:rPr lang="en-US" sz="1250" b="1" dirty="0">
+                <a:solidFill>
+                  <a:srgbClr val="FFFFFF"/>
+                </a:solidFill>
+                <a:latin typeface="Arial" pitchFamily="34" charset="0"/>
+                <a:ea typeface="Arial" pitchFamily="34" charset="-122"/>
+                <a:cs typeface="Arial" pitchFamily="34" charset="-120"/>
+              </a:rPr>
+              <a:t>Тема зафиксирована</a:t>
+            </a:r>
+            <a:endParaRPr lang="en-US" sz="1250" dirty="0"/>
+          </a:p>
+        </p:txBody>
+      </p:sp>
+      <p:sp>
+        <p:nvSpPr>
+          <p:cNvPr id="12" name="Text 10"/>
+          <p:cNvSpPr txBox="1"/>
+          <p:nvPr/>
+        </p:nvSpPr>
+        <p:spPr>
+          <a:xfrm>
+            <a:off x="594360" y="2926080"/>
+            <a:ext cx="1741932" cy="822960"/>
+          </a:xfrm>
+          <a:prstGeom prst="rect">
+            <a:avLst/>
+          </a:prstGeom>
+          <a:noFill/>
+          <a:ln/>
+        </p:spPr>
+        <p:txBody>
+          <a:bodyPr wrap="square" lIns="0" tIns="0" rIns="0" bIns="0" rtlCol="0" anchor="ctr"/>
+          <a:lstStyle/>
+          <a:p>
+            <a:pPr algn="ctr" indent="0" marL="0">
+              <a:lnSpc>
+                <a:spcPts val="1400"/>
+              </a:lnSpc>
+              <a:buNone/>
+            </a:pPr>
+            <a:r>
+              <a:rPr lang="en-US" sz="1050" dirty="0">
+                <a:solidFill>
+                  <a:srgbClr val="DCE6F0"/>
+                </a:solidFill>
+                <a:latin typeface="Arial" pitchFamily="34" charset="0"/>
+                <a:ea typeface="Arial" pitchFamily="34" charset="-122"/>
+                <a:cs typeface="Arial" pitchFamily="34" charset="-120"/>
+              </a:rPr>
+              <a:t>Паспорт проекта</a:t>
+            </a:r>
+            <a:endParaRPr lang="en-US" sz="1050" dirty="0"/>
+          </a:p>
+          <a:p>
+            <a:pPr algn="ctr" indent="0" marL="0">
+              <a:lnSpc>
+                <a:spcPts val="1400"/>
+              </a:lnSpc>
+              <a:buNone/>
+            </a:pPr>
+            <a:r>
+              <a:rPr lang="en-US" sz="1050" dirty="0">
+                <a:solidFill>
+                  <a:srgbClr val="DCE6F0"/>
+                </a:solidFill>
+                <a:latin typeface="Arial" pitchFamily="34" charset="0"/>
+                <a:ea typeface="Arial" pitchFamily="34" charset="-122"/>
+                <a:cs typeface="Arial" pitchFamily="34" charset="-120"/>
+              </a:rPr>
+              <a:t>+ представление, 3 минуты</a:t>
+            </a:r>
+            <a:endParaRPr lang="en-US" sz="1050" dirty="0"/>
+          </a:p>
+        </p:txBody>
+      </p:sp>
+      <p:sp>
+        <p:nvSpPr>
+          <p:cNvPr id="13" name="Shape 11"/>
+          <p:cNvSpPr/>
+          <p:nvPr/>
+        </p:nvSpPr>
+        <p:spPr>
+          <a:xfrm>
+            <a:off x="3454146" y="1828800"/>
+            <a:ext cx="164592" cy="164592"/>
+          </a:xfrm>
+          <a:prstGeom prst="ellipse">
+            <a:avLst/>
+          </a:prstGeom>
+          <a:solidFill>
+            <a:srgbClr val="005AAA"/>
+          </a:solidFill>
+          <a:ln w="19050">
+            <a:solidFill>
+              <a:srgbClr val="FFFFFF"/>
+            </a:solidFill>
+            <a:prstDash val="solid"/>
+          </a:ln>
+        </p:spPr>
+      </p:sp>
+      <p:sp>
+        <p:nvSpPr>
+          <p:cNvPr id="14" name="Shape 12"/>
+          <p:cNvSpPr/>
+          <p:nvPr/>
+        </p:nvSpPr>
+        <p:spPr>
+          <a:xfrm>
+            <a:off x="2574036" y="2148840"/>
+            <a:ext cx="1924812" cy="1691640"/>
+          </a:xfrm>
+          <a:prstGeom prst="roundRect">
+            <a:avLst>
+              <a:gd name="adj" fmla="val 2703"/>
+            </a:avLst>
+          </a:prstGeom>
+          <a:solidFill>
+            <a:srgbClr val="F5F7FA"/>
+          </a:solidFill>
+          <a:ln w="9525">
+            <a:solidFill>
+              <a:srgbClr val="D8DEE6"/>
+            </a:solidFill>
+            <a:prstDash val="solid"/>
+          </a:ln>
+        </p:spPr>
+      </p:sp>
+      <p:sp>
+        <p:nvSpPr>
+          <p:cNvPr id="15" name="Text 13"/>
+          <p:cNvSpPr txBox="1"/>
+          <p:nvPr/>
+        </p:nvSpPr>
+        <p:spPr>
+          <a:xfrm>
+            <a:off x="2683764" y="2267712"/>
+            <a:ext cx="1705356" cy="292608"/>
+          </a:xfrm>
+          <a:prstGeom prst="rect">
+            <a:avLst/>
+          </a:prstGeom>
+          <a:noFill/>
+          <a:ln/>
+        </p:spPr>
+        <p:txBody>
+          <a:bodyPr wrap="square" lIns="0" tIns="0" rIns="0" bIns="0" rtlCol="0" anchor="ctr"/>
+          <a:lstStyle/>
+          <a:p>
+            <a:pPr algn="ctr" indent="0" marL="0">
+              <a:buNone/>
+            </a:pPr>
+            <a:r>
+              <a:rPr lang="en-US" sz="1700" b="1" dirty="0">
+                <a:solidFill>
+                  <a:srgbClr val="005AAA"/>
+                </a:solidFill>
+                <a:latin typeface="Arial" pitchFamily="34" charset="0"/>
+                <a:ea typeface="Arial" pitchFamily="34" charset="-122"/>
+                <a:cs typeface="Arial" pitchFamily="34" charset="-120"/>
+              </a:rPr>
+              <a:t>24.10</a:t>
+            </a:r>
+            <a:endParaRPr lang="en-US" sz="1700" dirty="0"/>
+          </a:p>
+        </p:txBody>
+      </p:sp>
+      <p:sp>
+        <p:nvSpPr>
+          <p:cNvPr id="16" name="Text 14"/>
+          <p:cNvSpPr txBox="1"/>
+          <p:nvPr/>
+        </p:nvSpPr>
+        <p:spPr>
+          <a:xfrm>
+            <a:off x="2683764" y="2578608"/>
+            <a:ext cx="1705356" cy="292608"/>
+          </a:xfrm>
+          <a:prstGeom prst="rect">
+            <a:avLst/>
+          </a:prstGeom>
+          <a:noFill/>
+          <a:ln/>
+        </p:spPr>
+        <p:txBody>
+          <a:bodyPr wrap="square" lIns="0" tIns="0" rIns="0" bIns="0" rtlCol="0" anchor="ctr"/>
+          <a:lstStyle/>
+          <a:p>
+            <a:pPr algn="ctr" indent="0" marL="0">
+              <a:buNone/>
+            </a:pPr>
+            <a:r>
+              <a:rPr lang="en-US" sz="1250" b="1" dirty="0">
+                <a:solidFill>
+                  <a:srgbClr val="1E293B"/>
+                </a:solidFill>
+                <a:latin typeface="Arial" pitchFamily="34" charset="0"/>
+                <a:ea typeface="Arial" pitchFamily="34" charset="-122"/>
+                <a:cs typeface="Arial" pitchFamily="34" charset="-120"/>
+              </a:rPr>
+              <a:t>План собран</a:t>
+            </a:r>
+            <a:endParaRPr lang="en-US" sz="1250" dirty="0"/>
+          </a:p>
+        </p:txBody>
+      </p:sp>
+      <p:sp>
+        <p:nvSpPr>
+          <p:cNvPr id="17" name="Text 15"/>
+          <p:cNvSpPr txBox="1"/>
+          <p:nvPr/>
+        </p:nvSpPr>
+        <p:spPr>
+          <a:xfrm>
+            <a:off x="2665476" y="2926080"/>
+            <a:ext cx="1741932" cy="822960"/>
+          </a:xfrm>
+          <a:prstGeom prst="rect">
+            <a:avLst/>
+          </a:prstGeom>
+          <a:noFill/>
+          <a:ln/>
+        </p:spPr>
+        <p:txBody>
+          <a:bodyPr wrap="square" lIns="0" tIns="0" rIns="0" bIns="0" rtlCol="0" anchor="ctr"/>
+          <a:lstStyle/>
+          <a:p>
+            <a:pPr algn="ctr" indent="0" marL="0">
+              <a:lnSpc>
+                <a:spcPts val="1400"/>
+              </a:lnSpc>
+              <a:buNone/>
+            </a:pPr>
+            <a:r>
+              <a:rPr lang="en-US" sz="1050" dirty="0">
+                <a:solidFill>
+                  <a:srgbClr val="64748B"/>
+                </a:solidFill>
+                <a:latin typeface="Arial" pitchFamily="34" charset="0"/>
+                <a:ea typeface="Arial" pitchFamily="34" charset="-122"/>
+                <a:cs typeface="Arial" pitchFamily="34" charset="-120"/>
+              </a:rPr>
+              <a:t>WBS, график Ганта,</a:t>
+            </a:r>
+            <a:endParaRPr lang="en-US" sz="1050" dirty="0"/>
+          </a:p>
+          <a:p>
+            <a:pPr algn="ctr" indent="0" marL="0">
+              <a:lnSpc>
+                <a:spcPts val="1400"/>
+              </a:lnSpc>
+              <a:buNone/>
+            </a:pPr>
+            <a:r>
+              <a:rPr lang="en-US" sz="1050" dirty="0">
+                <a:solidFill>
+                  <a:srgbClr val="64748B"/>
+                </a:solidFill>
+                <a:latin typeface="Arial" pitchFamily="34" charset="0"/>
+                <a:ea typeface="Arial" pitchFamily="34" charset="-122"/>
+                <a:cs typeface="Arial" pitchFamily="34" charset="-120"/>
+              </a:rPr>
+              <a:t>смета и реестр рисков</a:t>
+            </a:r>
+            <a:endParaRPr lang="en-US" sz="1050" dirty="0"/>
+          </a:p>
+        </p:txBody>
+      </p:sp>
+      <p:sp>
+        <p:nvSpPr>
+          <p:cNvPr id="18" name="Shape 16"/>
+          <p:cNvSpPr/>
+          <p:nvPr/>
+        </p:nvSpPr>
+        <p:spPr>
+          <a:xfrm>
+            <a:off x="5525262" y="1828800"/>
+            <a:ext cx="164592" cy="164592"/>
+          </a:xfrm>
+          <a:prstGeom prst="ellipse">
+            <a:avLst/>
+          </a:prstGeom>
+          <a:solidFill>
+            <a:srgbClr val="005AAA"/>
+          </a:solidFill>
+          <a:ln w="19050">
+            <a:solidFill>
+              <a:srgbClr val="FFFFFF"/>
+            </a:solidFill>
+            <a:prstDash val="solid"/>
+          </a:ln>
+        </p:spPr>
+      </p:sp>
+      <p:sp>
+        <p:nvSpPr>
+          <p:cNvPr id="19" name="Shape 17"/>
+          <p:cNvSpPr/>
+          <p:nvPr/>
+        </p:nvSpPr>
+        <p:spPr>
+          <a:xfrm>
+            <a:off x="4645152" y="2148840"/>
+            <a:ext cx="1924812" cy="1691640"/>
+          </a:xfrm>
+          <a:prstGeom prst="roundRect">
+            <a:avLst>
+              <a:gd name="adj" fmla="val 2703"/>
+            </a:avLst>
+          </a:prstGeom>
+          <a:solidFill>
+            <a:srgbClr val="F5F7FA"/>
+          </a:solidFill>
+          <a:ln w="9525">
+            <a:solidFill>
+              <a:srgbClr val="D8DEE6"/>
+            </a:solidFill>
+            <a:prstDash val="solid"/>
+          </a:ln>
+        </p:spPr>
+      </p:sp>
+      <p:sp>
+        <p:nvSpPr>
+          <p:cNvPr id="20" name="Text 18"/>
+          <p:cNvSpPr txBox="1"/>
+          <p:nvPr/>
+        </p:nvSpPr>
+        <p:spPr>
+          <a:xfrm>
+            <a:off x="4754880" y="2267712"/>
+            <a:ext cx="1705356" cy="292608"/>
+          </a:xfrm>
+          <a:prstGeom prst="rect">
+            <a:avLst/>
+          </a:prstGeom>
+          <a:noFill/>
+          <a:ln/>
+        </p:spPr>
+        <p:txBody>
+          <a:bodyPr wrap="square" lIns="0" tIns="0" rIns="0" bIns="0" rtlCol="0" anchor="ctr"/>
+          <a:lstStyle/>
+          <a:p>
+            <a:pPr algn="ctr" indent="0" marL="0">
+              <a:buNone/>
+            </a:pPr>
+            <a:r>
+              <a:rPr lang="en-US" sz="1700" b="1" dirty="0">
+                <a:solidFill>
+                  <a:srgbClr val="005AAA"/>
+                </a:solidFill>
+                <a:latin typeface="Arial" pitchFamily="34" charset="0"/>
+                <a:ea typeface="Arial" pitchFamily="34" charset="-122"/>
+                <a:cs typeface="Arial" pitchFamily="34" charset="-120"/>
+              </a:rPr>
+              <a:t>21.11</a:t>
+            </a:r>
+            <a:endParaRPr lang="en-US" sz="1700" dirty="0"/>
+          </a:p>
+        </p:txBody>
+      </p:sp>
+      <p:sp>
+        <p:nvSpPr>
+          <p:cNvPr id="21" name="Text 19"/>
+          <p:cNvSpPr txBox="1"/>
+          <p:nvPr/>
+        </p:nvSpPr>
+        <p:spPr>
+          <a:xfrm>
+            <a:off x="4754880" y="2578608"/>
+            <a:ext cx="1705356" cy="292608"/>
+          </a:xfrm>
+          <a:prstGeom prst="rect">
+            <a:avLst/>
+          </a:prstGeom>
+          <a:noFill/>
+          <a:ln/>
+        </p:spPr>
+        <p:txBody>
+          <a:bodyPr wrap="square" lIns="0" tIns="0" rIns="0" bIns="0" rtlCol="0" anchor="ctr"/>
+          <a:lstStyle/>
+          <a:p>
+            <a:pPr algn="ctr" indent="0" marL="0">
+              <a:buNone/>
+            </a:pPr>
+            <a:r>
+              <a:rPr lang="en-US" sz="1250" b="1" dirty="0">
+                <a:solidFill>
+                  <a:srgbClr val="1E293B"/>
+                </a:solidFill>
+                <a:latin typeface="Arial" pitchFamily="34" charset="0"/>
+                <a:ea typeface="Arial" pitchFamily="34" charset="-122"/>
+                <a:cs typeface="Arial" pitchFamily="34" charset="-120"/>
+              </a:rPr>
+              <a:t>Чекпоинт</a:t>
+            </a:r>
+            <a:endParaRPr lang="en-US" sz="1250" dirty="0"/>
+          </a:p>
+        </p:txBody>
+      </p:sp>
+      <p:sp>
+        <p:nvSpPr>
+          <p:cNvPr id="22" name="Text 20"/>
+          <p:cNvSpPr txBox="1"/>
+          <p:nvPr/>
+        </p:nvSpPr>
+        <p:spPr>
+          <a:xfrm>
+            <a:off x="4736592" y="2926080"/>
+            <a:ext cx="1741932" cy="822960"/>
+          </a:xfrm>
+          <a:prstGeom prst="rect">
+            <a:avLst/>
+          </a:prstGeom>
+          <a:noFill/>
+          <a:ln/>
+        </p:spPr>
+        <p:txBody>
+          <a:bodyPr wrap="square" lIns="0" tIns="0" rIns="0" bIns="0" rtlCol="0" anchor="ctr"/>
+          <a:lstStyle/>
+          <a:p>
+            <a:pPr algn="ctr" indent="0" marL="0">
+              <a:lnSpc>
+                <a:spcPts val="1400"/>
+              </a:lnSpc>
+              <a:buNone/>
+            </a:pPr>
+            <a:r>
+              <a:rPr lang="en-US" sz="1050" dirty="0">
+                <a:solidFill>
+                  <a:srgbClr val="64748B"/>
+                </a:solidFill>
+                <a:latin typeface="Arial" pitchFamily="34" charset="0"/>
+                <a:ea typeface="Arial" pitchFamily="34" charset="-122"/>
+                <a:cs typeface="Arial" pitchFamily="34" charset="-120"/>
+              </a:rPr>
+              <a:t>Промежуточный результат</a:t>
+            </a:r>
+            <a:endParaRPr lang="en-US" sz="1050" dirty="0"/>
+          </a:p>
+          <a:p>
+            <a:pPr algn="ctr" indent="0" marL="0">
+              <a:lnSpc>
+                <a:spcPts val="1400"/>
+              </a:lnSpc>
+              <a:buNone/>
+            </a:pPr>
+            <a:r>
+              <a:rPr lang="en-US" sz="1050" dirty="0">
+                <a:solidFill>
+                  <a:srgbClr val="64748B"/>
+                </a:solidFill>
+                <a:latin typeface="Arial" pitchFamily="34" charset="0"/>
+                <a:ea typeface="Arial" pitchFamily="34" charset="-122"/>
+                <a:cs typeface="Arial" pitchFamily="34" charset="-120"/>
+              </a:rPr>
+              <a:t>+ сверка «план против факта»</a:t>
+            </a:r>
+            <a:endParaRPr lang="en-US" sz="1050" dirty="0"/>
+          </a:p>
+        </p:txBody>
+      </p:sp>
+      <p:sp>
+        <p:nvSpPr>
+          <p:cNvPr id="23" name="Shape 21"/>
+          <p:cNvSpPr/>
+          <p:nvPr/>
+        </p:nvSpPr>
+        <p:spPr>
+          <a:xfrm>
+            <a:off x="7596378" y="1828800"/>
+            <a:ext cx="164592" cy="164592"/>
+          </a:xfrm>
+          <a:prstGeom prst="ellipse">
+            <a:avLst/>
+          </a:prstGeom>
+          <a:solidFill>
+            <a:srgbClr val="005AAA"/>
+          </a:solidFill>
+          <a:ln w="19050">
+            <a:solidFill>
+              <a:srgbClr val="FFFFFF"/>
+            </a:solidFill>
+            <a:prstDash val="solid"/>
+          </a:ln>
+        </p:spPr>
+      </p:sp>
+      <p:sp>
+        <p:nvSpPr>
+          <p:cNvPr id="24" name="Shape 22"/>
+          <p:cNvSpPr/>
+          <p:nvPr/>
+        </p:nvSpPr>
+        <p:spPr>
+          <a:xfrm>
+            <a:off x="6716268" y="2148840"/>
+            <a:ext cx="1924812" cy="1691640"/>
+          </a:xfrm>
+          <a:prstGeom prst="roundRect">
+            <a:avLst>
+              <a:gd name="adj" fmla="val 2703"/>
+            </a:avLst>
+          </a:prstGeom>
+          <a:solidFill>
+            <a:srgbClr val="F5F7FA"/>
+          </a:solidFill>
+          <a:ln w="9525">
+            <a:solidFill>
+              <a:srgbClr val="D8DEE6"/>
+            </a:solidFill>
+            <a:prstDash val="solid"/>
+          </a:ln>
+        </p:spPr>
+      </p:sp>
+      <p:sp>
+        <p:nvSpPr>
+          <p:cNvPr id="25" name="Text 23"/>
+          <p:cNvSpPr txBox="1"/>
+          <p:nvPr/>
+        </p:nvSpPr>
+        <p:spPr>
+          <a:xfrm>
+            <a:off x="6825996" y="2267712"/>
+            <a:ext cx="1705356" cy="292608"/>
+          </a:xfrm>
+          <a:prstGeom prst="rect">
+            <a:avLst/>
+          </a:prstGeom>
+          <a:noFill/>
+          <a:ln/>
+        </p:spPr>
+        <p:txBody>
+          <a:bodyPr wrap="square" lIns="0" tIns="0" rIns="0" bIns="0" rtlCol="0" anchor="ctr"/>
+          <a:lstStyle/>
+          <a:p>
+            <a:pPr algn="ctr" indent="0" marL="0">
+              <a:buNone/>
+            </a:pPr>
+            <a:r>
+              <a:rPr lang="en-US" sz="1700" b="1" dirty="0">
+                <a:solidFill>
+                  <a:srgbClr val="005AAA"/>
+                </a:solidFill>
+                <a:latin typeface="Arial" pitchFamily="34" charset="0"/>
+                <a:ea typeface="Arial" pitchFamily="34" charset="-122"/>
+                <a:cs typeface="Arial" pitchFamily="34" charset="-120"/>
+              </a:rPr>
+              <a:t>26.12</a:t>
+            </a:r>
+            <a:endParaRPr lang="en-US" sz="1700" dirty="0"/>
+          </a:p>
+        </p:txBody>
+      </p:sp>
+      <p:sp>
+        <p:nvSpPr>
+          <p:cNvPr id="26" name="Text 24"/>
+          <p:cNvSpPr txBox="1"/>
+          <p:nvPr/>
+        </p:nvSpPr>
+        <p:spPr>
+          <a:xfrm>
+            <a:off x="6825996" y="2578608"/>
+            <a:ext cx="1705356" cy="292608"/>
+          </a:xfrm>
+          <a:prstGeom prst="rect">
+            <a:avLst/>
+          </a:prstGeom>
+          <a:noFill/>
+          <a:ln/>
+        </p:spPr>
+        <p:txBody>
+          <a:bodyPr wrap="square" lIns="0" tIns="0" rIns="0" bIns="0" rtlCol="0" anchor="ctr"/>
+          <a:lstStyle/>
+          <a:p>
+            <a:pPr algn="ctr" indent="0" marL="0">
+              <a:buNone/>
+            </a:pPr>
+            <a:r>
+              <a:rPr lang="en-US" sz="1250" b="1" dirty="0">
+                <a:solidFill>
+                  <a:srgbClr val="1E293B"/>
+                </a:solidFill>
+                <a:latin typeface="Arial" pitchFamily="34" charset="0"/>
+                <a:ea typeface="Arial" pitchFamily="34" charset="-122"/>
+                <a:cs typeface="Arial" pitchFamily="34" charset="-120"/>
+              </a:rPr>
+              <a:t>Питч-защита</a:t>
+            </a:r>
+            <a:endParaRPr lang="en-US" sz="1250" dirty="0"/>
+          </a:p>
+        </p:txBody>
+      </p:sp>
+      <p:sp>
+        <p:nvSpPr>
+          <p:cNvPr id="27" name="Text 25"/>
+          <p:cNvSpPr txBox="1"/>
+          <p:nvPr/>
+        </p:nvSpPr>
+        <p:spPr>
+          <a:xfrm>
+            <a:off x="6807708" y="2926080"/>
+            <a:ext cx="1741932" cy="822960"/>
+          </a:xfrm>
+          <a:prstGeom prst="rect">
+            <a:avLst/>
+          </a:prstGeom>
+          <a:noFill/>
+          <a:ln/>
+        </p:spPr>
+        <p:txBody>
+          <a:bodyPr wrap="square" lIns="0" tIns="0" rIns="0" bIns="0" rtlCol="0" anchor="ctr"/>
+          <a:lstStyle/>
+          <a:p>
+            <a:pPr algn="ctr" indent="0" marL="0">
+              <a:lnSpc>
+                <a:spcPts val="1400"/>
+              </a:lnSpc>
+              <a:buNone/>
+            </a:pPr>
+            <a:r>
+              <a:rPr lang="en-US" sz="1050" dirty="0">
+                <a:solidFill>
+                  <a:srgbClr val="64748B"/>
+                </a:solidFill>
+                <a:latin typeface="Arial" pitchFamily="34" charset="0"/>
+                <a:ea typeface="Arial" pitchFamily="34" charset="-122"/>
+                <a:cs typeface="Arial" pitchFamily="34" charset="-120"/>
+              </a:rPr>
+              <a:t>Готовый результат,</a:t>
+            </a:r>
+            <a:endParaRPr lang="en-US" sz="1050" dirty="0"/>
+          </a:p>
+          <a:p>
+            <a:pPr algn="ctr" indent="0" marL="0">
+              <a:lnSpc>
+                <a:spcPts val="1400"/>
+              </a:lnSpc>
+              <a:buNone/>
+            </a:pPr>
+            <a:r>
+              <a:rPr lang="en-US" sz="1050" dirty="0">
+                <a:solidFill>
+                  <a:srgbClr val="64748B"/>
+                </a:solidFill>
+                <a:latin typeface="Arial" pitchFamily="34" charset="0"/>
+                <a:ea typeface="Arial" pitchFamily="34" charset="-122"/>
+                <a:cs typeface="Arial" pitchFamily="34" charset="-120"/>
+              </a:rPr>
+              <a:t>отчёт и защита перед комиссией</a:t>
+            </a:r>
+            <a:endParaRPr lang="en-US" sz="1050" dirty="0"/>
+          </a:p>
+        </p:txBody>
+      </p:sp>
+      <p:sp>
+        <p:nvSpPr>
+          <p:cNvPr id="28" name="Text 26"/>
+          <p:cNvSpPr txBox="1"/>
+          <p:nvPr/>
+        </p:nvSpPr>
+        <p:spPr>
+          <a:xfrm>
+            <a:off x="502920" y="1627632"/>
+            <a:ext cx="1924812" cy="201168"/>
+          </a:xfrm>
+          <a:prstGeom prst="rect">
+            <a:avLst/>
+          </a:prstGeom>
+          <a:noFill/>
+          <a:ln/>
+        </p:spPr>
+        <p:txBody>
+          <a:bodyPr wrap="square" lIns="0" tIns="0" rIns="0" bIns="0" rtlCol="0" anchor="ctr"/>
+          <a:lstStyle/>
+          <a:p>
+            <a:pPr algn="ctr" indent="0" marL="0">
+              <a:buNone/>
+            </a:pPr>
+            <a:r>
+              <a:rPr lang="en-US" sz="1050" b="1" dirty="0">
+                <a:solidFill>
+                  <a:srgbClr val="9E4257"/>
+                </a:solidFill>
+                <a:latin typeface="Arial" pitchFamily="34" charset="0"/>
+                <a:ea typeface="Arial" pitchFamily="34" charset="-122"/>
+                <a:cs typeface="Arial" pitchFamily="34" charset="-120"/>
+              </a:rPr>
+              <a:t>▲ вы здесь</a:t>
+            </a:r>
+            <a:endParaRPr lang="en-US" sz="1050" dirty="0"/>
+          </a:p>
+        </p:txBody>
+      </p:sp>
+      <p:sp>
+        <p:nvSpPr>
+          <p:cNvPr id="29" name="Shape 27"/>
+          <p:cNvSpPr/>
+          <p:nvPr/>
+        </p:nvSpPr>
+        <p:spPr>
+          <a:xfrm>
+            <a:off x="502920" y="3977640"/>
+            <a:ext cx="8138160" cy="530352"/>
+          </a:xfrm>
+          <a:prstGeom prst="roundRect">
+            <a:avLst>
+              <a:gd name="adj" fmla="val 8621"/>
+            </a:avLst>
+          </a:prstGeom>
+          <a:solidFill>
+            <a:srgbClr val="F5F7FA"/>
+          </a:solidFill>
+          <a:ln w="9525">
+            <a:solidFill>
+              <a:srgbClr val="D8DEE6"/>
+            </a:solidFill>
+            <a:prstDash val="solid"/>
+          </a:ln>
+        </p:spPr>
+      </p:sp>
+      <p:sp>
+        <p:nvSpPr>
+          <p:cNvPr id="30" name="Text 28"/>
+          <p:cNvSpPr txBox="1"/>
+          <p:nvPr/>
+        </p:nvSpPr>
+        <p:spPr>
+          <a:xfrm>
+            <a:off x="685800" y="4059936"/>
+            <a:ext cx="7772400" cy="365760"/>
+          </a:xfrm>
+          <a:prstGeom prst="rect">
+            <a:avLst/>
+          </a:prstGeom>
+          <a:noFill/>
+          <a:ln/>
+        </p:spPr>
+        <p:txBody>
+          <a:bodyPr wrap="square" lIns="0" tIns="0" rIns="0" bIns="0" rtlCol="0" anchor="ctr"/>
+          <a:lstStyle/>
+          <a:p>
+            <a:pPr algn="ctr" indent="0" marL="0">
+              <a:buNone/>
+            </a:pPr>
+            <a:r>
+              <a:rPr lang="en-US" sz="1200" dirty="0">
+                <a:solidFill>
+                  <a:srgbClr val="1E293B"/>
+                </a:solidFill>
+                <a:latin typeface="Arial" pitchFamily="34" charset="0"/>
+                <a:ea typeface="Arial" pitchFamily="34" charset="-122"/>
+                <a:cs typeface="Arial" pitchFamily="34" charset="-120"/>
+              </a:rPr>
+              <a:t>Зачётные тесты:  10.10 — тест 1 «Инициация»   ·   28.11 — тест 2 «Планирование и контроль»</a:t>
+            </a:r>
+            <a:endParaRPr lang="en-US" sz="1200" dirty="0"/>
+          </a:p>
+        </p:txBody>
+      </p:sp>
+    </p:spTree>
+  </p:cSld>
+  <p:clrMapOvr>
+    <a:masterClrMapping/>
+  </p:clrMapOvr>
+</p:sld>
+</file>
+
+<file path=ppt/slides/slide3.xml><?xml version="1.0" encoding="utf-8"?>
+<p:sld xmlns:a="http://schemas.openxmlformats.org/drawingml/2006/main" xmlns:r="http://schemas.openxmlformats.org/officeDocument/2006/relationships" xmlns:p="http://schemas.openxmlformats.org/presentationml/2006/main">
+  <p:cSld name="Slide 3">
+    <p:bg>
+      <p:bgPr>
+        <a:solidFill>
+          <a:srgbClr val="FFFFFF"/>
+        </a:solidFill>
+      </p:bgPr>
+    </p:bg>
+    <p:spTree>
+      <p:nvGrpSpPr>
+        <p:cNvPr id="1" name=""/>
+        <p:cNvGrpSpPr/>
+        <p:nvPr/>
+      </p:nvGrpSpPr>
+      <p:grpSpPr>
+        <a:xfrm>
+          <a:off x="0" y="0"/>
+          <a:ext cx="0" cy="0"/>
+          <a:chOff x="0" y="0"/>
+          <a:chExt cx="0" cy="0"/>
+        </a:xfrm>
+      </p:grpSpPr>
+      <p:sp>
+        <p:nvSpPr>
+          <p:cNvPr id="2" name="Text 0"/>
+          <p:cNvSpPr txBox="1"/>
+          <p:nvPr/>
+        </p:nvSpPr>
+        <p:spPr>
+          <a:xfrm>
+            <a:off x="7543800" y="4754880"/>
+            <a:ext cx="1097280" cy="237744"/>
+          </a:xfrm>
+          <a:prstGeom prst="rect">
+            <a:avLst/>
+          </a:prstGeom>
+          <a:noFill/>
+          <a:ln/>
+        </p:spPr>
+        <p:txBody>
+          <a:bodyPr wrap="square" lIns="0" tIns="0" rIns="0" bIns="0" rtlCol="0" anchor="ctr"/>
+          <a:lstStyle/>
+          <a:p>
+            <a:pPr algn="r" indent="0" marL="0">
+              <a:buNone/>
+            </a:pPr>
+            <a:r>
+              <a:rPr lang="en-US" sz="1000" dirty="0">
+                <a:solidFill>
+                  <a:srgbClr val="64748B"/>
+                </a:solidFill>
+                <a:latin typeface="Arial" pitchFamily="34" charset="0"/>
+                <a:ea typeface="Arial" pitchFamily="34" charset="-122"/>
+                <a:cs typeface="Arial" pitchFamily="34" charset="-120"/>
+              </a:rPr>
+              <a:t>3 / 16</a:t>
             </a:r>
             <a:endParaRPr lang="en-US" sz="1000" dirty="0"/>
           </a:p>
@@ -7824,7 +10463,7 @@
       </p:sp>
       <p:graphicFrame>
         <p:nvGraphicFramePr>
-          <p:cNvPr id="3" name="Table 0"/>
+          <p:cNvPr id="4" name="Table 0"/>
           <p:cNvGraphicFramePr>
             <a:graphicFrameLocks noGrp="1"/>
           </p:cNvGraphicFramePr>
@@ -8697,9 +11336,9 @@
 </p:sld>
 </file>
 
-<file path=ppt/slides/slide3.xml><?xml version="1.0" encoding="utf-8"?>
+<file path=ppt/slides/slide4.xml><?xml version="1.0" encoding="utf-8"?>
 <p:sld xmlns:a="http://schemas.openxmlformats.org/drawingml/2006/main" xmlns:r="http://schemas.openxmlformats.org/officeDocument/2006/relationships" xmlns:p="http://schemas.openxmlformats.org/presentationml/2006/main">
-  <p:cSld name="Slide 3">
+  <p:cSld name="Slide 4">
     <p:bg>
       <p:bgPr>
         <a:solidFill>
@@ -8754,7 +11393,7 @@
                 <a:ea typeface="Arial" pitchFamily="34" charset="-122"/>
                 <a:cs typeface="Arial" pitchFamily="34" charset="-120"/>
               </a:rPr>
-              <a:t>3 / 15</a:t>
+              <a:t>4 / 16</a:t>
             </a:r>
             <a:endParaRPr lang="en-US" sz="1000" dirty="0"/>
           </a:p>
@@ -8840,7 +11479,7 @@
       </p:sp>
       <p:graphicFrame>
         <p:nvGraphicFramePr>
-          <p:cNvPr id="4" name="Table 0"/>
+          <p:cNvPr id="5" name="Table 0"/>
           <p:cNvGraphicFramePr>
             <a:graphicFrameLocks noGrp="1"/>
           </p:cNvGraphicFramePr>
@@ -10698,9 +13337,9 @@
 </p:sld>
 </file>
 
-<file path=ppt/slides/slide4.xml><?xml version="1.0" encoding="utf-8"?>
+<file path=ppt/slides/slide5.xml><?xml version="1.0" encoding="utf-8"?>
 <p:sld xmlns:a="http://schemas.openxmlformats.org/drawingml/2006/main" xmlns:r="http://schemas.openxmlformats.org/officeDocument/2006/relationships" xmlns:p="http://schemas.openxmlformats.org/presentationml/2006/main">
-  <p:cSld name="Slide 4">
+  <p:cSld name="Slide 5">
     <p:bg>
       <p:bgPr>
         <a:solidFill>
@@ -10755,7 +13394,7 @@
                 <a:ea typeface="Arial" pitchFamily="34" charset="-122"/>
                 <a:cs typeface="Arial" pitchFamily="34" charset="-120"/>
               </a:rPr>
-              <a:t>4 / 15</a:t>
+              <a:t>5 / 16</a:t>
             </a:r>
             <a:endParaRPr lang="en-US" sz="1000" dirty="0"/>
           </a:p>
@@ -11393,9 +14032,9 @@
 </p:sld>
 </file>
 
-<file path=ppt/slides/slide5.xml><?xml version="1.0" encoding="utf-8"?>
+<file path=ppt/slides/slide6.xml><?xml version="1.0" encoding="utf-8"?>
 <p:sld xmlns:a="http://schemas.openxmlformats.org/drawingml/2006/main" xmlns:r="http://schemas.openxmlformats.org/officeDocument/2006/relationships" xmlns:p="http://schemas.openxmlformats.org/presentationml/2006/main">
-  <p:cSld name="Slide 5">
+  <p:cSld name="Slide 6">
     <p:bg>
       <p:bgPr>
         <a:solidFill>
@@ -11450,7 +14089,7 @@
                 <a:ea typeface="Arial" pitchFamily="34" charset="-122"/>
                 <a:cs typeface="Arial" pitchFamily="34" charset="-120"/>
               </a:rPr>
-              <a:t>5 / 15</a:t>
+              <a:t>6 / 16</a:t>
             </a:r>
             <a:endParaRPr lang="en-US" sz="1000" dirty="0"/>
           </a:p>
@@ -11992,9 +14631,9 @@
 </p:sld>
 </file>
 
-<file path=ppt/slides/slide6.xml><?xml version="1.0" encoding="utf-8"?>
+<file path=ppt/slides/slide7.xml><?xml version="1.0" encoding="utf-8"?>
 <p:sld xmlns:a="http://schemas.openxmlformats.org/drawingml/2006/main" xmlns:r="http://schemas.openxmlformats.org/officeDocument/2006/relationships" xmlns:p="http://schemas.openxmlformats.org/presentationml/2006/main">
-  <p:cSld name="Slide 6">
+  <p:cSld name="Slide 7">
     <p:bg>
       <p:bgPr>
         <a:solidFill>
@@ -12049,7 +14688,7 @@
                 <a:ea typeface="Arial" pitchFamily="34" charset="-122"/>
                 <a:cs typeface="Arial" pitchFamily="34" charset="-120"/>
               </a:rPr>
-              <a:t>6 / 15</a:t>
+              <a:t>7 / 16</a:t>
             </a:r>
             <a:endParaRPr lang="en-US" sz="1000" dirty="0"/>
           </a:p>
@@ -12135,7 +14774,7 @@
       </p:sp>
       <p:graphicFrame>
         <p:nvGraphicFramePr>
-          <p:cNvPr id="7" name="Table 0"/>
+          <p:cNvPr id="8" name="Table 0"/>
           <p:cNvGraphicFramePr>
             <a:graphicFrameLocks noGrp="1"/>
           </p:cNvGraphicFramePr>
@@ -13077,9 +15716,9 @@
 </p:sld>
 </file>
 
-<file path=ppt/slides/slide7.xml><?xml version="1.0" encoding="utf-8"?>
+<file path=ppt/slides/slide8.xml><?xml version="1.0" encoding="utf-8"?>
 <p:sld xmlns:a="http://schemas.openxmlformats.org/drawingml/2006/main" xmlns:r="http://schemas.openxmlformats.org/officeDocument/2006/relationships" xmlns:p="http://schemas.openxmlformats.org/presentationml/2006/main">
-  <p:cSld name="Slide 7">
+  <p:cSld name="Slide 8">
     <p:bg>
       <p:bgPr>
         <a:solidFill>
@@ -13134,7 +15773,7 @@
                 <a:ea typeface="Arial" pitchFamily="34" charset="-122"/>
                 <a:cs typeface="Arial" pitchFamily="34" charset="-120"/>
               </a:rPr>
-              <a:t>7 / 15</a:t>
+              <a:t>8 / 16</a:t>
             </a:r>
             <a:endParaRPr lang="en-US" sz="1000" dirty="0"/>
           </a:p>
@@ -13694,9 +16333,9 @@
 </p:sld>
 </file>
 
-<file path=ppt/slides/slide8.xml><?xml version="1.0" encoding="utf-8"?>
+<file path=ppt/slides/slide9.xml><?xml version="1.0" encoding="utf-8"?>
 <p:sld xmlns:a="http://schemas.openxmlformats.org/drawingml/2006/main" xmlns:r="http://schemas.openxmlformats.org/officeDocument/2006/relationships" xmlns:p="http://schemas.openxmlformats.org/presentationml/2006/main">
-  <p:cSld name="Slide 8">
+  <p:cSld name="Slide 9">
     <p:bg>
       <p:bgPr>
         <a:solidFill>
@@ -13751,7 +16390,7 @@
                 <a:ea typeface="Arial" pitchFamily="34" charset="-122"/>
                 <a:cs typeface="Arial" pitchFamily="34" charset="-120"/>
               </a:rPr>
-              <a:t>8 / 15</a:t>
+              <a:t>9 / 16</a:t>
             </a:r>
             <a:endParaRPr lang="en-US" sz="1000" dirty="0"/>
           </a:p>
@@ -13876,7 +16515,7 @@
       </p:sp>
       <p:graphicFrame>
         <p:nvGraphicFramePr>
-          <p:cNvPr id="9" name="Table 0"/>
+          <p:cNvPr id="10" name="Table 0"/>
           <p:cNvGraphicFramePr>
             <a:graphicFrameLocks noGrp="1"/>
           </p:cNvGraphicFramePr>
@@ -14572,7 +17211,7 @@
       </p:graphicFrame>
       <p:graphicFrame>
         <p:nvGraphicFramePr>
-          <p:cNvPr id="17" name="Table 1"/>
+          <p:cNvPr id="19" name="Table 1"/>
           <p:cNvGraphicFramePr>
             <a:graphicFrameLocks noGrp="1"/>
           </p:cNvGraphicFramePr>
@@ -15134,1443 +17773,6 @@
           </a:graphicData>
         </a:graphic>
       </p:graphicFrame>
-    </p:spTree>
-  </p:cSld>
-  <p:clrMapOvr>
-    <a:masterClrMapping/>
-  </p:clrMapOvr>
-</p:sld>
-</file>
-
-<file path=ppt/slides/slide9.xml><?xml version="1.0" encoding="utf-8"?>
-<p:sld xmlns:a="http://schemas.openxmlformats.org/drawingml/2006/main" xmlns:r="http://schemas.openxmlformats.org/officeDocument/2006/relationships" xmlns:p="http://schemas.openxmlformats.org/presentationml/2006/main">
-  <p:cSld name="Slide 9">
-    <p:bg>
-      <p:bgPr>
-        <a:solidFill>
-          <a:srgbClr val="FFFFFF"/>
-        </a:solidFill>
-      </p:bgPr>
-    </p:bg>
-    <p:spTree>
-      <p:nvGrpSpPr>
-        <p:cNvPr id="1" name=""/>
-        <p:cNvGrpSpPr/>
-        <p:nvPr/>
-      </p:nvGrpSpPr>
-      <p:grpSpPr>
-        <a:xfrm>
-          <a:off x="0" y="0"/>
-          <a:ext cx="0" cy="0"/>
-          <a:chOff x="0" y="0"/>
-          <a:chExt cx="0" cy="0"/>
-        </a:xfrm>
-      </p:grpSpPr>
-      <p:sp>
-        <p:nvSpPr>
-          <p:cNvPr id="2" name="Text 0"/>
-          <p:cNvSpPr txBox="1"/>
-          <p:nvPr/>
-        </p:nvSpPr>
-        <p:spPr>
-          <a:xfrm>
-            <a:off x="7543800" y="4754880"/>
-            <a:ext cx="1097280" cy="237744"/>
-          </a:xfrm>
-          <a:prstGeom prst="rect">
-            <a:avLst/>
-          </a:prstGeom>
-          <a:noFill/>
-          <a:ln/>
-        </p:spPr>
-        <p:txBody>
-          <a:bodyPr wrap="square" lIns="0" tIns="0" rIns="0" bIns="0" rtlCol="0" anchor="ctr"/>
-          <a:lstStyle/>
-          <a:p>
-            <a:pPr algn="r" indent="0" marL="0">
-              <a:buNone/>
-            </a:pPr>
-            <a:r>
-              <a:rPr lang="en-US" sz="1000" dirty="0">
-                <a:solidFill>
-                  <a:srgbClr val="64748B"/>
-                </a:solidFill>
-                <a:latin typeface="Arial" pitchFamily="34" charset="0"/>
-                <a:ea typeface="Arial" pitchFamily="34" charset="-122"/>
-                <a:cs typeface="Arial" pitchFamily="34" charset="-120"/>
-              </a:rPr>
-              <a:t>9 / 15</a:t>
-            </a:r>
-            <a:endParaRPr lang="en-US" sz="1000" dirty="0"/>
-          </a:p>
-        </p:txBody>
-      </p:sp>
-      <p:sp>
-        <p:nvSpPr>
-          <p:cNvPr id="3" name="Text 1"/>
-          <p:cNvSpPr txBox="1"/>
-          <p:nvPr/>
-        </p:nvSpPr>
-        <p:spPr>
-          <a:xfrm>
-            <a:off x="502920" y="182880"/>
-            <a:ext cx="8138160" cy="219456"/>
-          </a:xfrm>
-          <a:prstGeom prst="rect">
-            <a:avLst/>
-          </a:prstGeom>
-          <a:noFill/>
-          <a:ln/>
-        </p:spPr>
-        <p:txBody>
-          <a:bodyPr wrap="square" lIns="0" tIns="0" rIns="0" bIns="0" rtlCol="0" anchor="ctr"/>
-          <a:lstStyle/>
-          <a:p>
-            <a:pPr indent="0" marL="0">
-              <a:buNone/>
-            </a:pPr>
-            <a:r>
-              <a:rPr lang="en-US" sz="1100" spc="150" kern="0" dirty="0">
-                <a:solidFill>
-                  <a:srgbClr val="64748B"/>
-                </a:solidFill>
-                <a:latin typeface="Arial" pitchFamily="34" charset="0"/>
-                <a:ea typeface="Arial" pitchFamily="34" charset="-122"/>
-                <a:cs typeface="Arial" pitchFamily="34" charset="-120"/>
-              </a:rPr>
-              <a:t>РАЗБОР · ЦЕННОСТНОЕ ПРЕДЛОЖЕНИЕ</a:t>
-            </a:r>
-            <a:endParaRPr lang="en-US" sz="1100" dirty="0"/>
-          </a:p>
-        </p:txBody>
-      </p:sp>
-      <p:sp>
-        <p:nvSpPr>
-          <p:cNvPr id="4" name="Text 2"/>
-          <p:cNvSpPr txBox="1"/>
-          <p:nvPr/>
-        </p:nvSpPr>
-        <p:spPr>
-          <a:xfrm>
-            <a:off x="502920" y="365760"/>
-            <a:ext cx="8138160" cy="603504"/>
-          </a:xfrm>
-          <a:prstGeom prst="rect">
-            <a:avLst/>
-          </a:prstGeom>
-          <a:noFill/>
-          <a:ln/>
-        </p:spPr>
-        <p:txBody>
-          <a:bodyPr wrap="square" lIns="0" tIns="0" rIns="0" bIns="0" rtlCol="0" anchor="ctr"/>
-          <a:lstStyle/>
-          <a:p>
-            <a:pPr indent="0" marL="0">
-              <a:buNone/>
-            </a:pPr>
-            <a:r>
-              <a:rPr lang="en-US" sz="2600" b="1" dirty="0">
-                <a:solidFill>
-                  <a:srgbClr val="005AAA"/>
-                </a:solidFill>
-                <a:latin typeface="Arial" pitchFamily="34" charset="0"/>
-                <a:ea typeface="Arial" pitchFamily="34" charset="-122"/>
-                <a:cs typeface="Arial" pitchFamily="34" charset="-120"/>
-              </a:rPr>
-              <a:t>Что чаще всего оказалось не так</a:t>
-            </a:r>
-            <a:endParaRPr lang="en-US" sz="2600" dirty="0"/>
-          </a:p>
-        </p:txBody>
-      </p:sp>
-      <p:graphicFrame>
-        <p:nvGraphicFramePr>
-          <p:cNvPr id="10" name="Table 0"/>
-          <p:cNvGraphicFramePr>
-            <a:graphicFrameLocks noGrp="1"/>
-          </p:cNvGraphicFramePr>
-          <p:nvPr>
-            <p:extLst>
-              <p:ext uri="{D42A27DB-BD31-4B8C-83A1-F6EECF244321}">
-                <p14:modId xmlns:p14="http://schemas.microsoft.com/office/powerpoint/2010/main" val="1579011935"/>
-              </p:ext>
-            </p:extLst>
-          </p:nvPr>
-        </p:nvGraphicFramePr>
-        <p:xfrm>
-          <a:off x="502920" y="1051560"/>
-          <a:ext cx="8138160" cy="914400"/>
-        </p:xfrm>
-        <a:graphic>
-          <a:graphicData uri="http://schemas.openxmlformats.org/drawingml/2006/table">
-            <a:tbl>
-              <a:tblPr/>
-              <a:tblGrid>
-                <a:gridCol w="2377440"/>
-                <a:gridCol w="2743200"/>
-                <a:gridCol w="3017520"/>
-              </a:tblGrid>
-              <a:tr h="310896">
-                <a:tc>
-                  <a:txBody>
-                    <a:bodyPr/>
-                    <a:lstStyle/>
-                    <a:p>
-                      <a:pPr indent="0" marL="0">
-                        <a:buNone/>
-                      </a:pPr>
-                      <a:r>
-                        <a:rPr lang="en-US" sz="1150" b="1" dirty="0">
-                          <a:solidFill>
-                            <a:srgbClr val="FFFFFF"/>
-                          </a:solidFill>
-                          <a:latin typeface="Arial" pitchFamily="34" charset="0"/>
-                          <a:ea typeface="Arial" pitchFamily="34" charset="-122"/>
-                          <a:cs typeface="Arial" pitchFamily="34" charset="-120"/>
-                        </a:rPr>
-                        <a:t>Как написано</a:t>
-                      </a:r>
-                      <a:endParaRPr lang="en-US" sz="1150" dirty="0">
-                        <a:latin typeface="Arial" charset="0"/>
-                        <a:ea typeface="Arial" charset="0"/>
-                        <a:cs typeface="Arial" charset="0"/>
-                      </a:endParaRPr>
-                    </a:p>
-                  </a:txBody>
-                  <a:tcPr marL="91440" marR="91440" marT="45720" marB="45720" anchor="ctr">
-                    <a:lnL w="6350" cap="flat" cmpd="sng" algn="ctr">
-                      <a:solidFill>
-                        <a:srgbClr val="D8DEE6"/>
-                      </a:solidFill>
-                      <a:prstDash val="solid"/>
-                      <a:round/>
-                      <a:headEnd type="none" w="med" len="med"/>
-                      <a:tailEnd type="none" w="med" len="med"/>
-                    </a:lnL>
-                    <a:lnR w="6350" cap="flat" cmpd="sng" algn="ctr">
-                      <a:solidFill>
-                        <a:srgbClr val="D8DEE6"/>
-                      </a:solidFill>
-                      <a:prstDash val="solid"/>
-                      <a:round/>
-                      <a:headEnd type="none" w="med" len="med"/>
-                      <a:tailEnd type="none" w="med" len="med"/>
-                    </a:lnR>
-                    <a:lnT w="6350" cap="flat" cmpd="sng" algn="ctr">
-                      <a:solidFill>
-                        <a:srgbClr val="D8DEE6"/>
-                      </a:solidFill>
-                      <a:prstDash val="solid"/>
-                      <a:round/>
-                      <a:headEnd type="none" w="med" len="med"/>
-                      <a:tailEnd type="none" w="med" len="med"/>
-                    </a:lnT>
-                    <a:lnB w="6350" cap="flat" cmpd="sng" algn="ctr">
-                      <a:solidFill>
-                        <a:srgbClr val="D8DEE6"/>
-                      </a:solidFill>
-                      <a:prstDash val="solid"/>
-                      <a:round/>
-                      <a:headEnd type="none" w="med" len="med"/>
-                      <a:tailEnd type="none" w="med" len="med"/>
-                    </a:lnB>
-                    <a:solidFill>
-                      <a:srgbClr val="1E4270"/>
-                    </a:solidFill>
-                  </a:tcPr>
-                </a:tc>
-                <a:tc>
-                  <a:txBody>
-                    <a:bodyPr/>
-                    <a:lstStyle/>
-                    <a:p>
-                      <a:pPr indent="0" marL="0">
-                        <a:buNone/>
-                      </a:pPr>
-                      <a:r>
-                        <a:rPr lang="en-US" sz="1150" b="1" dirty="0">
-                          <a:solidFill>
-                            <a:srgbClr val="FFFFFF"/>
-                          </a:solidFill>
-                          <a:latin typeface="Arial" pitchFamily="34" charset="0"/>
-                          <a:ea typeface="Arial" pitchFamily="34" charset="-122"/>
-                          <a:cs typeface="Arial" pitchFamily="34" charset="-120"/>
-                        </a:rPr>
-                        <a:t>Что не так</a:t>
-                      </a:r>
-                      <a:endParaRPr lang="en-US" sz="1150" dirty="0">
-                        <a:latin typeface="Arial" charset="0"/>
-                        <a:ea typeface="Arial" charset="0"/>
-                        <a:cs typeface="Arial" charset="0"/>
-                      </a:endParaRPr>
-                    </a:p>
-                  </a:txBody>
-                  <a:tcPr marL="91440" marR="91440" marT="45720" marB="45720" anchor="ctr">
-                    <a:lnL w="6350" cap="flat" cmpd="sng" algn="ctr">
-                      <a:solidFill>
-                        <a:srgbClr val="D8DEE6"/>
-                      </a:solidFill>
-                      <a:prstDash val="solid"/>
-                      <a:round/>
-                      <a:headEnd type="none" w="med" len="med"/>
-                      <a:tailEnd type="none" w="med" len="med"/>
-                    </a:lnL>
-                    <a:lnR w="6350" cap="flat" cmpd="sng" algn="ctr">
-                      <a:solidFill>
-                        <a:srgbClr val="D8DEE6"/>
-                      </a:solidFill>
-                      <a:prstDash val="solid"/>
-                      <a:round/>
-                      <a:headEnd type="none" w="med" len="med"/>
-                      <a:tailEnd type="none" w="med" len="med"/>
-                    </a:lnR>
-                    <a:lnT w="6350" cap="flat" cmpd="sng" algn="ctr">
-                      <a:solidFill>
-                        <a:srgbClr val="D8DEE6"/>
-                      </a:solidFill>
-                      <a:prstDash val="solid"/>
-                      <a:round/>
-                      <a:headEnd type="none" w="med" len="med"/>
-                      <a:tailEnd type="none" w="med" len="med"/>
-                    </a:lnT>
-                    <a:lnB w="6350" cap="flat" cmpd="sng" algn="ctr">
-                      <a:solidFill>
-                        <a:srgbClr val="D8DEE6"/>
-                      </a:solidFill>
-                      <a:prstDash val="solid"/>
-                      <a:round/>
-                      <a:headEnd type="none" w="med" len="med"/>
-                      <a:tailEnd type="none" w="med" len="med"/>
-                    </a:lnB>
-                    <a:solidFill>
-                      <a:srgbClr val="1E4270"/>
-                    </a:solidFill>
-                  </a:tcPr>
-                </a:tc>
-                <a:tc>
-                  <a:txBody>
-                    <a:bodyPr/>
-                    <a:lstStyle/>
-                    <a:p>
-                      <a:pPr indent="0" marL="0">
-                        <a:buNone/>
-                      </a:pPr>
-                      <a:r>
-                        <a:rPr lang="en-US" sz="1150" b="1" dirty="0">
-                          <a:solidFill>
-                            <a:srgbClr val="FFFFFF"/>
-                          </a:solidFill>
-                          <a:latin typeface="Arial" pitchFamily="34" charset="0"/>
-                          <a:ea typeface="Arial" pitchFamily="34" charset="-122"/>
-                          <a:cs typeface="Arial" pitchFamily="34" charset="-120"/>
-                        </a:rPr>
-                        <a:t>Как чинить</a:t>
-                      </a:r>
-                      <a:endParaRPr lang="en-US" sz="1150" dirty="0">
-                        <a:latin typeface="Arial" charset="0"/>
-                        <a:ea typeface="Arial" charset="0"/>
-                        <a:cs typeface="Arial" charset="0"/>
-                      </a:endParaRPr>
-                    </a:p>
-                  </a:txBody>
-                  <a:tcPr marL="91440" marR="91440" marT="45720" marB="45720" anchor="ctr">
-                    <a:lnL w="6350" cap="flat" cmpd="sng" algn="ctr">
-                      <a:solidFill>
-                        <a:srgbClr val="D8DEE6"/>
-                      </a:solidFill>
-                      <a:prstDash val="solid"/>
-                      <a:round/>
-                      <a:headEnd type="none" w="med" len="med"/>
-                      <a:tailEnd type="none" w="med" len="med"/>
-                    </a:lnL>
-                    <a:lnR w="6350" cap="flat" cmpd="sng" algn="ctr">
-                      <a:solidFill>
-                        <a:srgbClr val="D8DEE6"/>
-                      </a:solidFill>
-                      <a:prstDash val="solid"/>
-                      <a:round/>
-                      <a:headEnd type="none" w="med" len="med"/>
-                      <a:tailEnd type="none" w="med" len="med"/>
-                    </a:lnR>
-                    <a:lnT w="6350" cap="flat" cmpd="sng" algn="ctr">
-                      <a:solidFill>
-                        <a:srgbClr val="D8DEE6"/>
-                      </a:solidFill>
-                      <a:prstDash val="solid"/>
-                      <a:round/>
-                      <a:headEnd type="none" w="med" len="med"/>
-                      <a:tailEnd type="none" w="med" len="med"/>
-                    </a:lnT>
-                    <a:lnB w="6350" cap="flat" cmpd="sng" algn="ctr">
-                      <a:solidFill>
-                        <a:srgbClr val="D8DEE6"/>
-                      </a:solidFill>
-                      <a:prstDash val="solid"/>
-                      <a:round/>
-                      <a:headEnd type="none" w="med" len="med"/>
-                      <a:tailEnd type="none" w="med" len="med"/>
-                    </a:lnB>
-                    <a:solidFill>
-                      <a:srgbClr val="1E4270"/>
-                    </a:solidFill>
-                  </a:tcPr>
-                </a:tc>
-              </a:tr>
-              <a:tr h="566928">
-                <a:tc>
-                  <a:txBody>
-                    <a:bodyPr/>
-                    <a:lstStyle/>
-                    <a:p>
-                      <a:pPr indent="0" marL="0">
-                        <a:buNone/>
-                      </a:pPr>
-                      <a:r>
-                        <a:rPr lang="en-US" sz="1150" dirty="0">
-                          <a:solidFill>
-                            <a:srgbClr val="1E293B"/>
-                          </a:solidFill>
-                          <a:latin typeface="Arial" pitchFamily="34" charset="0"/>
-                          <a:ea typeface="Arial" pitchFamily="34" charset="-122"/>
-                          <a:cs typeface="Arial" pitchFamily="34" charset="-120"/>
-                        </a:rPr>
-                        <a:t>«Для студентов», «для людей»</a:t>
-                      </a:r>
-                      <a:endParaRPr lang="en-US" sz="1150" dirty="0">
-                        <a:latin typeface="Arial" charset="0"/>
-                        <a:ea typeface="Arial" charset="0"/>
-                        <a:cs typeface="Arial" charset="0"/>
-                      </a:endParaRPr>
-                    </a:p>
-                  </a:txBody>
-                  <a:tcPr marL="91440" marR="91440" marT="45720" marB="45720" anchor="ctr">
-                    <a:lnL w="6350" cap="flat" cmpd="sng" algn="ctr">
-                      <a:solidFill>
-                        <a:srgbClr val="D8DEE6"/>
-                      </a:solidFill>
-                      <a:prstDash val="solid"/>
-                      <a:round/>
-                      <a:headEnd type="none" w="med" len="med"/>
-                      <a:tailEnd type="none" w="med" len="med"/>
-                    </a:lnL>
-                    <a:lnR w="6350" cap="flat" cmpd="sng" algn="ctr">
-                      <a:solidFill>
-                        <a:srgbClr val="D8DEE6"/>
-                      </a:solidFill>
-                      <a:prstDash val="solid"/>
-                      <a:round/>
-                      <a:headEnd type="none" w="med" len="med"/>
-                      <a:tailEnd type="none" w="med" len="med"/>
-                    </a:lnR>
-                    <a:lnT w="6350" cap="flat" cmpd="sng" algn="ctr">
-                      <a:solidFill>
-                        <a:srgbClr val="D8DEE6"/>
-                      </a:solidFill>
-                      <a:prstDash val="solid"/>
-                      <a:round/>
-                      <a:headEnd type="none" w="med" len="med"/>
-                      <a:tailEnd type="none" w="med" len="med"/>
-                    </a:lnT>
-                    <a:lnB w="6350" cap="flat" cmpd="sng" algn="ctr">
-                      <a:solidFill>
-                        <a:srgbClr val="D8DEE6"/>
-                      </a:solidFill>
-                      <a:prstDash val="solid"/>
-                      <a:round/>
-                      <a:headEnd type="none" w="med" len="med"/>
-                      <a:tailEnd type="none" w="med" len="med"/>
-                    </a:lnB>
-                  </a:tcPr>
-                </a:tc>
-                <a:tc>
-                  <a:txBody>
-                    <a:bodyPr/>
-                    <a:lstStyle/>
-                    <a:p>
-                      <a:pPr indent="0" marL="0">
-                        <a:buNone/>
-                      </a:pPr>
-                      <a:r>
-                        <a:rPr lang="en-US" sz="1150" dirty="0">
-                          <a:solidFill>
-                            <a:srgbClr val="1E293B"/>
-                          </a:solidFill>
-                          <a:latin typeface="Arial" pitchFamily="34" charset="0"/>
-                          <a:ea typeface="Arial" pitchFamily="34" charset="-122"/>
-                          <a:cs typeface="Arial" pitchFamily="34" charset="-120"/>
-                        </a:rPr>
-                        <a:t>Группа не сужена — адресат не найден</a:t>
-                      </a:r>
-                      <a:endParaRPr lang="en-US" sz="1150" dirty="0">
-                        <a:latin typeface="Arial" charset="0"/>
-                        <a:ea typeface="Arial" charset="0"/>
-                        <a:cs typeface="Arial" charset="0"/>
-                      </a:endParaRPr>
-                    </a:p>
-                  </a:txBody>
-                  <a:tcPr marL="91440" marR="91440" marT="45720" marB="45720" anchor="ctr">
-                    <a:lnL w="6350" cap="flat" cmpd="sng" algn="ctr">
-                      <a:solidFill>
-                        <a:srgbClr val="D8DEE6"/>
-                      </a:solidFill>
-                      <a:prstDash val="solid"/>
-                      <a:round/>
-                      <a:headEnd type="none" w="med" len="med"/>
-                      <a:tailEnd type="none" w="med" len="med"/>
-                    </a:lnL>
-                    <a:lnR w="6350" cap="flat" cmpd="sng" algn="ctr">
-                      <a:solidFill>
-                        <a:srgbClr val="D8DEE6"/>
-                      </a:solidFill>
-                      <a:prstDash val="solid"/>
-                      <a:round/>
-                      <a:headEnd type="none" w="med" len="med"/>
-                      <a:tailEnd type="none" w="med" len="med"/>
-                    </a:lnR>
-                    <a:lnT w="6350" cap="flat" cmpd="sng" algn="ctr">
-                      <a:solidFill>
-                        <a:srgbClr val="D8DEE6"/>
-                      </a:solidFill>
-                      <a:prstDash val="solid"/>
-                      <a:round/>
-                      <a:headEnd type="none" w="med" len="med"/>
-                      <a:tailEnd type="none" w="med" len="med"/>
-                    </a:lnT>
-                    <a:lnB w="6350" cap="flat" cmpd="sng" algn="ctr">
-                      <a:solidFill>
-                        <a:srgbClr val="D8DEE6"/>
-                      </a:solidFill>
-                      <a:prstDash val="solid"/>
-                      <a:round/>
-                      <a:headEnd type="none" w="med" len="med"/>
-                      <a:tailEnd type="none" w="med" len="med"/>
-                    </a:lnB>
-                  </a:tcPr>
-                </a:tc>
-                <a:tc>
-                  <a:txBody>
-                    <a:bodyPr/>
-                    <a:lstStyle/>
-                    <a:p>
-                      <a:pPr indent="0" marL="0">
-                        <a:buNone/>
-                      </a:pPr>
-                      <a:r>
-                        <a:rPr lang="en-US" sz="1150" dirty="0">
-                          <a:solidFill>
-                            <a:srgbClr val="1E293B"/>
-                          </a:solidFill>
-                          <a:latin typeface="Arial" pitchFamily="34" charset="0"/>
-                          <a:ea typeface="Arial" pitchFamily="34" charset="-122"/>
-                          <a:cs typeface="Arial" pitchFamily="34" charset="-120"/>
-                        </a:rPr>
-                        <a:t>Назвать курс, ситуацию и момент, когда проблема возникает</a:t>
-                      </a:r>
-                      <a:endParaRPr lang="en-US" sz="1150" dirty="0">
-                        <a:latin typeface="Arial" charset="0"/>
-                        <a:ea typeface="Arial" charset="0"/>
-                        <a:cs typeface="Arial" charset="0"/>
-                      </a:endParaRPr>
-                    </a:p>
-                  </a:txBody>
-                  <a:tcPr marL="91440" marR="91440" marT="45720" marB="45720" anchor="ctr">
-                    <a:lnL w="6350" cap="flat" cmpd="sng" algn="ctr">
-                      <a:solidFill>
-                        <a:srgbClr val="D8DEE6"/>
-                      </a:solidFill>
-                      <a:prstDash val="solid"/>
-                      <a:round/>
-                      <a:headEnd type="none" w="med" len="med"/>
-                      <a:tailEnd type="none" w="med" len="med"/>
-                    </a:lnL>
-                    <a:lnR w="6350" cap="flat" cmpd="sng" algn="ctr">
-                      <a:solidFill>
-                        <a:srgbClr val="D8DEE6"/>
-                      </a:solidFill>
-                      <a:prstDash val="solid"/>
-                      <a:round/>
-                      <a:headEnd type="none" w="med" len="med"/>
-                      <a:tailEnd type="none" w="med" len="med"/>
-                    </a:lnR>
-                    <a:lnT w="6350" cap="flat" cmpd="sng" algn="ctr">
-                      <a:solidFill>
-                        <a:srgbClr val="D8DEE6"/>
-                      </a:solidFill>
-                      <a:prstDash val="solid"/>
-                      <a:round/>
-                      <a:headEnd type="none" w="med" len="med"/>
-                      <a:tailEnd type="none" w="med" len="med"/>
-                    </a:lnT>
-                    <a:lnB w="6350" cap="flat" cmpd="sng" algn="ctr">
-                      <a:solidFill>
-                        <a:srgbClr val="D8DEE6"/>
-                      </a:solidFill>
-                      <a:prstDash val="solid"/>
-                      <a:round/>
-                      <a:headEnd type="none" w="med" len="med"/>
-                      <a:tailEnd type="none" w="med" len="med"/>
-                    </a:lnB>
-                  </a:tcPr>
-                </a:tc>
-              </a:tr>
-              <a:tr h="566928">
-                <a:tc>
-                  <a:txBody>
-                    <a:bodyPr/>
-                    <a:lstStyle/>
-                    <a:p>
-                      <a:pPr indent="0" marL="0">
-                        <a:buNone/>
-                      </a:pPr>
-                      <a:r>
-                        <a:rPr lang="en-US" sz="1150" dirty="0">
-                          <a:solidFill>
-                            <a:srgbClr val="1E293B"/>
-                          </a:solidFill>
-                          <a:latin typeface="Arial" pitchFamily="34" charset="0"/>
-                          <a:ea typeface="Arial" pitchFamily="34" charset="-122"/>
-                          <a:cs typeface="Arial" pitchFamily="34" charset="-120"/>
-                        </a:rPr>
-                        <a:t>«Станет удобнее», «эффективнее»</a:t>
-                      </a:r>
-                      <a:endParaRPr lang="en-US" sz="1150" dirty="0">
-                        <a:latin typeface="Arial" charset="0"/>
-                        <a:ea typeface="Arial" charset="0"/>
-                        <a:cs typeface="Arial" charset="0"/>
-                      </a:endParaRPr>
-                    </a:p>
-                  </a:txBody>
-                  <a:tcPr marL="91440" marR="91440" marT="45720" marB="45720" anchor="ctr">
-                    <a:lnL w="6350" cap="flat" cmpd="sng" algn="ctr">
-                      <a:solidFill>
-                        <a:srgbClr val="D8DEE6"/>
-                      </a:solidFill>
-                      <a:prstDash val="solid"/>
-                      <a:round/>
-                      <a:headEnd type="none" w="med" len="med"/>
-                      <a:tailEnd type="none" w="med" len="med"/>
-                    </a:lnL>
-                    <a:lnR w="6350" cap="flat" cmpd="sng" algn="ctr">
-                      <a:solidFill>
-                        <a:srgbClr val="D8DEE6"/>
-                      </a:solidFill>
-                      <a:prstDash val="solid"/>
-                      <a:round/>
-                      <a:headEnd type="none" w="med" len="med"/>
-                      <a:tailEnd type="none" w="med" len="med"/>
-                    </a:lnR>
-                    <a:lnT w="6350" cap="flat" cmpd="sng" algn="ctr">
-                      <a:solidFill>
-                        <a:srgbClr val="D8DEE6"/>
-                      </a:solidFill>
-                      <a:prstDash val="solid"/>
-                      <a:round/>
-                      <a:headEnd type="none" w="med" len="med"/>
-                      <a:tailEnd type="none" w="med" len="med"/>
-                    </a:lnT>
-                    <a:lnB w="6350" cap="flat" cmpd="sng" algn="ctr">
-                      <a:solidFill>
-                        <a:srgbClr val="D8DEE6"/>
-                      </a:solidFill>
-                      <a:prstDash val="solid"/>
-                      <a:round/>
-                      <a:headEnd type="none" w="med" len="med"/>
-                      <a:tailEnd type="none" w="med" len="med"/>
-                    </a:lnB>
-                  </a:tcPr>
-                </a:tc>
-                <a:tc>
-                  <a:txBody>
-                    <a:bodyPr/>
-                    <a:lstStyle/>
-                    <a:p>
-                      <a:pPr indent="0" marL="0">
-                        <a:buNone/>
-                      </a:pPr>
-                      <a:r>
-                        <a:rPr lang="en-US" sz="1150" dirty="0">
-                          <a:solidFill>
-                            <a:srgbClr val="1E293B"/>
-                          </a:solidFill>
-                          <a:latin typeface="Arial" pitchFamily="34" charset="0"/>
-                          <a:ea typeface="Arial" pitchFamily="34" charset="-122"/>
-                          <a:cs typeface="Arial" pitchFamily="34" charset="-120"/>
-                        </a:rPr>
-                        <a:t>Выгода без признака — проверить нечем</a:t>
-                      </a:r>
-                      <a:endParaRPr lang="en-US" sz="1150" dirty="0">
-                        <a:latin typeface="Arial" charset="0"/>
-                        <a:ea typeface="Arial" charset="0"/>
-                        <a:cs typeface="Arial" charset="0"/>
-                      </a:endParaRPr>
-                    </a:p>
-                  </a:txBody>
-                  <a:tcPr marL="91440" marR="91440" marT="45720" marB="45720" anchor="ctr">
-                    <a:lnL w="6350" cap="flat" cmpd="sng" algn="ctr">
-                      <a:solidFill>
-                        <a:srgbClr val="D8DEE6"/>
-                      </a:solidFill>
-                      <a:prstDash val="solid"/>
-                      <a:round/>
-                      <a:headEnd type="none" w="med" len="med"/>
-                      <a:tailEnd type="none" w="med" len="med"/>
-                    </a:lnL>
-                    <a:lnR w="6350" cap="flat" cmpd="sng" algn="ctr">
-                      <a:solidFill>
-                        <a:srgbClr val="D8DEE6"/>
-                      </a:solidFill>
-                      <a:prstDash val="solid"/>
-                      <a:round/>
-                      <a:headEnd type="none" w="med" len="med"/>
-                      <a:tailEnd type="none" w="med" len="med"/>
-                    </a:lnR>
-                    <a:lnT w="6350" cap="flat" cmpd="sng" algn="ctr">
-                      <a:solidFill>
-                        <a:srgbClr val="D8DEE6"/>
-                      </a:solidFill>
-                      <a:prstDash val="solid"/>
-                      <a:round/>
-                      <a:headEnd type="none" w="med" len="med"/>
-                      <a:tailEnd type="none" w="med" len="med"/>
-                    </a:lnT>
-                    <a:lnB w="6350" cap="flat" cmpd="sng" algn="ctr">
-                      <a:solidFill>
-                        <a:srgbClr val="D8DEE6"/>
-                      </a:solidFill>
-                      <a:prstDash val="solid"/>
-                      <a:round/>
-                      <a:headEnd type="none" w="med" len="med"/>
-                      <a:tailEnd type="none" w="med" len="med"/>
-                    </a:lnB>
-                  </a:tcPr>
-                </a:tc>
-                <a:tc>
-                  <a:txBody>
-                    <a:bodyPr/>
-                    <a:lstStyle/>
-                    <a:p>
-                      <a:pPr indent="0" marL="0">
-                        <a:buNone/>
-                      </a:pPr>
-                      <a:r>
-                        <a:rPr lang="en-US" sz="1150" dirty="0">
-                          <a:solidFill>
-                            <a:srgbClr val="1E293B"/>
-                          </a:solidFill>
-                          <a:latin typeface="Arial" pitchFamily="34" charset="0"/>
-                          <a:ea typeface="Arial" pitchFamily="34" charset="-122"/>
-                          <a:cs typeface="Arial" pitchFamily="34" charset="-120"/>
-                        </a:rPr>
-                        <a:t>Сказать, что именно перестанет происходить</a:t>
-                      </a:r>
-                      <a:endParaRPr lang="en-US" sz="1150" dirty="0">
-                        <a:latin typeface="Arial" charset="0"/>
-                        <a:ea typeface="Arial" charset="0"/>
-                        <a:cs typeface="Arial" charset="0"/>
-                      </a:endParaRPr>
-                    </a:p>
-                  </a:txBody>
-                  <a:tcPr marL="91440" marR="91440" marT="45720" marB="45720" anchor="ctr">
-                    <a:lnL w="6350" cap="flat" cmpd="sng" algn="ctr">
-                      <a:solidFill>
-                        <a:srgbClr val="D8DEE6"/>
-                      </a:solidFill>
-                      <a:prstDash val="solid"/>
-                      <a:round/>
-                      <a:headEnd type="none" w="med" len="med"/>
-                      <a:tailEnd type="none" w="med" len="med"/>
-                    </a:lnL>
-                    <a:lnR w="6350" cap="flat" cmpd="sng" algn="ctr">
-                      <a:solidFill>
-                        <a:srgbClr val="D8DEE6"/>
-                      </a:solidFill>
-                      <a:prstDash val="solid"/>
-                      <a:round/>
-                      <a:headEnd type="none" w="med" len="med"/>
-                      <a:tailEnd type="none" w="med" len="med"/>
-                    </a:lnR>
-                    <a:lnT w="6350" cap="flat" cmpd="sng" algn="ctr">
-                      <a:solidFill>
-                        <a:srgbClr val="D8DEE6"/>
-                      </a:solidFill>
-                      <a:prstDash val="solid"/>
-                      <a:round/>
-                      <a:headEnd type="none" w="med" len="med"/>
-                      <a:tailEnd type="none" w="med" len="med"/>
-                    </a:lnT>
-                    <a:lnB w="6350" cap="flat" cmpd="sng" algn="ctr">
-                      <a:solidFill>
-                        <a:srgbClr val="D8DEE6"/>
-                      </a:solidFill>
-                      <a:prstDash val="solid"/>
-                      <a:round/>
-                      <a:headEnd type="none" w="med" len="med"/>
-                      <a:tailEnd type="none" w="med" len="med"/>
-                    </a:lnB>
-                  </a:tcPr>
-                </a:tc>
-              </a:tr>
-              <a:tr h="566928">
-                <a:tc>
-                  <a:txBody>
-                    <a:bodyPr/>
-                    <a:lstStyle/>
-                    <a:p>
-                      <a:pPr indent="0" marL="0">
-                        <a:buNone/>
-                      </a:pPr>
-                      <a:r>
-                        <a:rPr lang="en-US" sz="1150" dirty="0">
-                          <a:solidFill>
-                            <a:srgbClr val="1E293B"/>
-                          </a:solidFill>
-                          <a:latin typeface="Arial" pitchFamily="34" charset="0"/>
-                          <a:ea typeface="Arial" pitchFamily="34" charset="-122"/>
-                          <a:cs typeface="Arial" pitchFamily="34" charset="-120"/>
-                        </a:rPr>
-                        <a:t>«Аналогов нет»</a:t>
-                      </a:r>
-                      <a:endParaRPr lang="en-US" sz="1150" dirty="0">
-                        <a:latin typeface="Arial" charset="0"/>
-                        <a:ea typeface="Arial" charset="0"/>
-                        <a:cs typeface="Arial" charset="0"/>
-                      </a:endParaRPr>
-                    </a:p>
-                  </a:txBody>
-                  <a:tcPr marL="91440" marR="91440" marT="45720" marB="45720" anchor="ctr">
-                    <a:lnL w="6350" cap="flat" cmpd="sng" algn="ctr">
-                      <a:solidFill>
-                        <a:srgbClr val="D8DEE6"/>
-                      </a:solidFill>
-                      <a:prstDash val="solid"/>
-                      <a:round/>
-                      <a:headEnd type="none" w="med" len="med"/>
-                      <a:tailEnd type="none" w="med" len="med"/>
-                    </a:lnL>
-                    <a:lnR w="6350" cap="flat" cmpd="sng" algn="ctr">
-                      <a:solidFill>
-                        <a:srgbClr val="D8DEE6"/>
-                      </a:solidFill>
-                      <a:prstDash val="solid"/>
-                      <a:round/>
-                      <a:headEnd type="none" w="med" len="med"/>
-                      <a:tailEnd type="none" w="med" len="med"/>
-                    </a:lnR>
-                    <a:lnT w="6350" cap="flat" cmpd="sng" algn="ctr">
-                      <a:solidFill>
-                        <a:srgbClr val="D8DEE6"/>
-                      </a:solidFill>
-                      <a:prstDash val="solid"/>
-                      <a:round/>
-                      <a:headEnd type="none" w="med" len="med"/>
-                      <a:tailEnd type="none" w="med" len="med"/>
-                    </a:lnT>
-                    <a:lnB w="6350" cap="flat" cmpd="sng" algn="ctr">
-                      <a:solidFill>
-                        <a:srgbClr val="D8DEE6"/>
-                      </a:solidFill>
-                      <a:prstDash val="solid"/>
-                      <a:round/>
-                      <a:headEnd type="none" w="med" len="med"/>
-                      <a:tailEnd type="none" w="med" len="med"/>
-                    </a:lnB>
-                  </a:tcPr>
-                </a:tc>
-                <a:tc>
-                  <a:txBody>
-                    <a:bodyPr/>
-                    <a:lstStyle/>
-                    <a:p>
-                      <a:pPr indent="0" marL="0">
-                        <a:buNone/>
-                      </a:pPr>
-                      <a:r>
-                        <a:rPr lang="en-US" sz="1150" dirty="0">
-                          <a:solidFill>
-                            <a:srgbClr val="1E293B"/>
-                          </a:solidFill>
-                          <a:latin typeface="Arial" pitchFamily="34" charset="0"/>
-                          <a:ea typeface="Arial" pitchFamily="34" charset="-122"/>
-                          <a:cs typeface="Arial" pitchFamily="34" charset="-120"/>
-                        </a:rPr>
-                        <a:t>Текущий способ не искали</a:t>
-                      </a:r>
-                      <a:endParaRPr lang="en-US" sz="1150" dirty="0">
-                        <a:latin typeface="Arial" charset="0"/>
-                        <a:ea typeface="Arial" charset="0"/>
-                        <a:cs typeface="Arial" charset="0"/>
-                      </a:endParaRPr>
-                    </a:p>
-                  </a:txBody>
-                  <a:tcPr marL="91440" marR="91440" marT="45720" marB="45720" anchor="ctr">
-                    <a:lnL w="6350" cap="flat" cmpd="sng" algn="ctr">
-                      <a:solidFill>
-                        <a:srgbClr val="D8DEE6"/>
-                      </a:solidFill>
-                      <a:prstDash val="solid"/>
-                      <a:round/>
-                      <a:headEnd type="none" w="med" len="med"/>
-                      <a:tailEnd type="none" w="med" len="med"/>
-                    </a:lnL>
-                    <a:lnR w="6350" cap="flat" cmpd="sng" algn="ctr">
-                      <a:solidFill>
-                        <a:srgbClr val="D8DEE6"/>
-                      </a:solidFill>
-                      <a:prstDash val="solid"/>
-                      <a:round/>
-                      <a:headEnd type="none" w="med" len="med"/>
-                      <a:tailEnd type="none" w="med" len="med"/>
-                    </a:lnR>
-                    <a:lnT w="6350" cap="flat" cmpd="sng" algn="ctr">
-                      <a:solidFill>
-                        <a:srgbClr val="D8DEE6"/>
-                      </a:solidFill>
-                      <a:prstDash val="solid"/>
-                      <a:round/>
-                      <a:headEnd type="none" w="med" len="med"/>
-                      <a:tailEnd type="none" w="med" len="med"/>
-                    </a:lnT>
-                    <a:lnB w="6350" cap="flat" cmpd="sng" algn="ctr">
-                      <a:solidFill>
-                        <a:srgbClr val="D8DEE6"/>
-                      </a:solidFill>
-                      <a:prstDash val="solid"/>
-                      <a:round/>
-                      <a:headEnd type="none" w="med" len="med"/>
-                      <a:tailEnd type="none" w="med" len="med"/>
-                    </a:lnB>
-                  </a:tcPr>
-                </a:tc>
-                <a:tc>
-                  <a:txBody>
-                    <a:bodyPr/>
-                    <a:lstStyle/>
-                    <a:p>
-                      <a:pPr indent="0" marL="0">
-                        <a:buNone/>
-                      </a:pPr>
-                      <a:r>
-                        <a:rPr lang="en-US" sz="1150" dirty="0">
-                          <a:solidFill>
-                            <a:srgbClr val="1E293B"/>
-                          </a:solidFill>
-                          <a:latin typeface="Arial" pitchFamily="34" charset="0"/>
-                          <a:ea typeface="Arial" pitchFamily="34" charset="-122"/>
-                          <a:cs typeface="Arial" pitchFamily="34" charset="-120"/>
-                        </a:rPr>
-                        <a:t>Назвать хотя бы один — «делают на глаз», «пишут в чате»</a:t>
-                      </a:r>
-                      <a:endParaRPr lang="en-US" sz="1150" dirty="0">
-                        <a:latin typeface="Arial" charset="0"/>
-                        <a:ea typeface="Arial" charset="0"/>
-                        <a:cs typeface="Arial" charset="0"/>
-                      </a:endParaRPr>
-                    </a:p>
-                  </a:txBody>
-                  <a:tcPr marL="91440" marR="91440" marT="45720" marB="45720" anchor="ctr">
-                    <a:lnL w="6350" cap="flat" cmpd="sng" algn="ctr">
-                      <a:solidFill>
-                        <a:srgbClr val="D8DEE6"/>
-                      </a:solidFill>
-                      <a:prstDash val="solid"/>
-                      <a:round/>
-                      <a:headEnd type="none" w="med" len="med"/>
-                      <a:tailEnd type="none" w="med" len="med"/>
-                    </a:lnL>
-                    <a:lnR w="6350" cap="flat" cmpd="sng" algn="ctr">
-                      <a:solidFill>
-                        <a:srgbClr val="D8DEE6"/>
-                      </a:solidFill>
-                      <a:prstDash val="solid"/>
-                      <a:round/>
-                      <a:headEnd type="none" w="med" len="med"/>
-                      <a:tailEnd type="none" w="med" len="med"/>
-                    </a:lnR>
-                    <a:lnT w="6350" cap="flat" cmpd="sng" algn="ctr">
-                      <a:solidFill>
-                        <a:srgbClr val="D8DEE6"/>
-                      </a:solidFill>
-                      <a:prstDash val="solid"/>
-                      <a:round/>
-                      <a:headEnd type="none" w="med" len="med"/>
-                      <a:tailEnd type="none" w="med" len="med"/>
-                    </a:lnT>
-                    <a:lnB w="6350" cap="flat" cmpd="sng" algn="ctr">
-                      <a:solidFill>
-                        <a:srgbClr val="D8DEE6"/>
-                      </a:solidFill>
-                      <a:prstDash val="solid"/>
-                      <a:round/>
-                      <a:headEnd type="none" w="med" len="med"/>
-                      <a:tailEnd type="none" w="med" len="med"/>
-                    </a:lnB>
-                  </a:tcPr>
-                </a:tc>
-              </a:tr>
-              <a:tr h="566928">
-                <a:tc>
-                  <a:txBody>
-                    <a:bodyPr/>
-                    <a:lstStyle/>
-                    <a:p>
-                      <a:pPr indent="0" marL="0">
-                        <a:buNone/>
-                      </a:pPr>
-                      <a:r>
-                        <a:rPr lang="en-US" sz="1150" dirty="0">
-                          <a:solidFill>
-                            <a:srgbClr val="1E293B"/>
-                          </a:solidFill>
-                          <a:latin typeface="Arial" pitchFamily="34" charset="0"/>
-                          <a:ea typeface="Arial" pitchFamily="34" charset="-122"/>
-                          <a:cs typeface="Arial" pitchFamily="34" charset="-120"/>
-                        </a:rPr>
-                        <a:t>Заказчик — мы сами</a:t>
-                      </a:r>
-                      <a:endParaRPr lang="en-US" sz="1150" dirty="0">
-                        <a:latin typeface="Arial" charset="0"/>
-                        <a:ea typeface="Arial" charset="0"/>
-                        <a:cs typeface="Arial" charset="0"/>
-                      </a:endParaRPr>
-                    </a:p>
-                  </a:txBody>
-                  <a:tcPr marL="91440" marR="91440" marT="45720" marB="45720" anchor="ctr">
-                    <a:lnL w="6350" cap="flat" cmpd="sng" algn="ctr">
-                      <a:solidFill>
-                        <a:srgbClr val="D8DEE6"/>
-                      </a:solidFill>
-                      <a:prstDash val="solid"/>
-                      <a:round/>
-                      <a:headEnd type="none" w="med" len="med"/>
-                      <a:tailEnd type="none" w="med" len="med"/>
-                    </a:lnL>
-                    <a:lnR w="6350" cap="flat" cmpd="sng" algn="ctr">
-                      <a:solidFill>
-                        <a:srgbClr val="D8DEE6"/>
-                      </a:solidFill>
-                      <a:prstDash val="solid"/>
-                      <a:round/>
-                      <a:headEnd type="none" w="med" len="med"/>
-                      <a:tailEnd type="none" w="med" len="med"/>
-                    </a:lnR>
-                    <a:lnT w="6350" cap="flat" cmpd="sng" algn="ctr">
-                      <a:solidFill>
-                        <a:srgbClr val="D8DEE6"/>
-                      </a:solidFill>
-                      <a:prstDash val="solid"/>
-                      <a:round/>
-                      <a:headEnd type="none" w="med" len="med"/>
-                      <a:tailEnd type="none" w="med" len="med"/>
-                    </a:lnT>
-                    <a:lnB w="6350" cap="flat" cmpd="sng" algn="ctr">
-                      <a:solidFill>
-                        <a:srgbClr val="D8DEE6"/>
-                      </a:solidFill>
-                      <a:prstDash val="solid"/>
-                      <a:round/>
-                      <a:headEnd type="none" w="med" len="med"/>
-                      <a:tailEnd type="none" w="med" len="med"/>
-                    </a:lnB>
-                  </a:tcPr>
-                </a:tc>
-                <a:tc>
-                  <a:txBody>
-                    <a:bodyPr/>
-                    <a:lstStyle/>
-                    <a:p>
-                      <a:pPr indent="0" marL="0">
-                        <a:buNone/>
-                      </a:pPr>
-                      <a:r>
-                        <a:rPr lang="en-US" sz="1150" dirty="0">
-                          <a:solidFill>
-                            <a:srgbClr val="1E293B"/>
-                          </a:solidFill>
-                          <a:latin typeface="Arial" pitchFamily="34" charset="0"/>
-                          <a:ea typeface="Arial" pitchFamily="34" charset="-122"/>
-                          <a:cs typeface="Arial" pitchFamily="34" charset="-120"/>
-                        </a:rPr>
-                        <a:t>Внешнего адресата нет, проект замкнут на команду</a:t>
-                      </a:r>
-                      <a:endParaRPr lang="en-US" sz="1150" dirty="0">
-                        <a:latin typeface="Arial" charset="0"/>
-                        <a:ea typeface="Arial" charset="0"/>
-                        <a:cs typeface="Arial" charset="0"/>
-                      </a:endParaRPr>
-                    </a:p>
-                  </a:txBody>
-                  <a:tcPr marL="91440" marR="91440" marT="45720" marB="45720" anchor="ctr">
-                    <a:lnL w="6350" cap="flat" cmpd="sng" algn="ctr">
-                      <a:solidFill>
-                        <a:srgbClr val="D8DEE6"/>
-                      </a:solidFill>
-                      <a:prstDash val="solid"/>
-                      <a:round/>
-                      <a:headEnd type="none" w="med" len="med"/>
-                      <a:tailEnd type="none" w="med" len="med"/>
-                    </a:lnL>
-                    <a:lnR w="6350" cap="flat" cmpd="sng" algn="ctr">
-                      <a:solidFill>
-                        <a:srgbClr val="D8DEE6"/>
-                      </a:solidFill>
-                      <a:prstDash val="solid"/>
-                      <a:round/>
-                      <a:headEnd type="none" w="med" len="med"/>
-                      <a:tailEnd type="none" w="med" len="med"/>
-                    </a:lnR>
-                    <a:lnT w="6350" cap="flat" cmpd="sng" algn="ctr">
-                      <a:solidFill>
-                        <a:srgbClr val="D8DEE6"/>
-                      </a:solidFill>
-                      <a:prstDash val="solid"/>
-                      <a:round/>
-                      <a:headEnd type="none" w="med" len="med"/>
-                      <a:tailEnd type="none" w="med" len="med"/>
-                    </a:lnT>
-                    <a:lnB w="6350" cap="flat" cmpd="sng" algn="ctr">
-                      <a:solidFill>
-                        <a:srgbClr val="D8DEE6"/>
-                      </a:solidFill>
-                      <a:prstDash val="solid"/>
-                      <a:round/>
-                      <a:headEnd type="none" w="med" len="med"/>
-                      <a:tailEnd type="none" w="med" len="med"/>
-                    </a:lnB>
-                  </a:tcPr>
-                </a:tc>
-                <a:tc>
-                  <a:txBody>
-                    <a:bodyPr/>
-                    <a:lstStyle/>
-                    <a:p>
-                      <a:pPr indent="0" marL="0">
-                        <a:buNone/>
-                      </a:pPr>
-                      <a:r>
-                        <a:rPr lang="en-US" sz="1150" dirty="0">
-                          <a:solidFill>
-                            <a:srgbClr val="1E293B"/>
-                          </a:solidFill>
-                          <a:latin typeface="Arial" pitchFamily="34" charset="0"/>
-                          <a:ea typeface="Arial" pitchFamily="34" charset="-122"/>
-                          <a:cs typeface="Arial" pitchFamily="34" charset="-120"/>
-                        </a:rPr>
-                        <a:t>Найти носителя проблемы вне четвёрки</a:t>
-                      </a:r>
-                      <a:endParaRPr lang="en-US" sz="1150" dirty="0">
-                        <a:latin typeface="Arial" charset="0"/>
-                        <a:ea typeface="Arial" charset="0"/>
-                        <a:cs typeface="Arial" charset="0"/>
-                      </a:endParaRPr>
-                    </a:p>
-                  </a:txBody>
-                  <a:tcPr marL="91440" marR="91440" marT="45720" marB="45720" anchor="ctr">
-                    <a:lnL w="6350" cap="flat" cmpd="sng" algn="ctr">
-                      <a:solidFill>
-                        <a:srgbClr val="D8DEE6"/>
-                      </a:solidFill>
-                      <a:prstDash val="solid"/>
-                      <a:round/>
-                      <a:headEnd type="none" w="med" len="med"/>
-                      <a:tailEnd type="none" w="med" len="med"/>
-                    </a:lnL>
-                    <a:lnR w="6350" cap="flat" cmpd="sng" algn="ctr">
-                      <a:solidFill>
-                        <a:srgbClr val="D8DEE6"/>
-                      </a:solidFill>
-                      <a:prstDash val="solid"/>
-                      <a:round/>
-                      <a:headEnd type="none" w="med" len="med"/>
-                      <a:tailEnd type="none" w="med" len="med"/>
-                    </a:lnR>
-                    <a:lnT w="6350" cap="flat" cmpd="sng" algn="ctr">
-                      <a:solidFill>
-                        <a:srgbClr val="D8DEE6"/>
-                      </a:solidFill>
-                      <a:prstDash val="solid"/>
-                      <a:round/>
-                      <a:headEnd type="none" w="med" len="med"/>
-                      <a:tailEnd type="none" w="med" len="med"/>
-                    </a:lnT>
-                    <a:lnB w="6350" cap="flat" cmpd="sng" algn="ctr">
-                      <a:solidFill>
-                        <a:srgbClr val="D8DEE6"/>
-                      </a:solidFill>
-                      <a:prstDash val="solid"/>
-                      <a:round/>
-                      <a:headEnd type="none" w="med" len="med"/>
-                      <a:tailEnd type="none" w="med" len="med"/>
-                    </a:lnB>
-                  </a:tcPr>
-                </a:tc>
-              </a:tr>
-              <a:tr h="566928">
-                <a:tc>
-                  <a:txBody>
-                    <a:bodyPr/>
-                    <a:lstStyle/>
-                    <a:p>
-                      <a:pPr indent="0" marL="0">
-                        <a:buNone/>
-                      </a:pPr>
-                      <a:r>
-                        <a:rPr lang="en-US" sz="1150" dirty="0">
-                          <a:solidFill>
-                            <a:srgbClr val="1E293B"/>
-                          </a:solidFill>
-                          <a:latin typeface="Arial" pitchFamily="34" charset="0"/>
-                          <a:ea typeface="Arial" pitchFamily="34" charset="-122"/>
-                          <a:cs typeface="Arial" pitchFamily="34" charset="-120"/>
-                        </a:rPr>
-                        <a:t>Описана технология</a:t>
-                      </a:r>
-                      <a:endParaRPr lang="en-US" sz="1150" dirty="0">
-                        <a:latin typeface="Arial" charset="0"/>
-                        <a:ea typeface="Arial" charset="0"/>
-                        <a:cs typeface="Arial" charset="0"/>
-                      </a:endParaRPr>
-                    </a:p>
-                  </a:txBody>
-                  <a:tcPr marL="91440" marR="91440" marT="45720" marB="45720" anchor="ctr">
-                    <a:lnL w="6350" cap="flat" cmpd="sng" algn="ctr">
-                      <a:solidFill>
-                        <a:srgbClr val="D8DEE6"/>
-                      </a:solidFill>
-                      <a:prstDash val="solid"/>
-                      <a:round/>
-                      <a:headEnd type="none" w="med" len="med"/>
-                      <a:tailEnd type="none" w="med" len="med"/>
-                    </a:lnL>
-                    <a:lnR w="6350" cap="flat" cmpd="sng" algn="ctr">
-                      <a:solidFill>
-                        <a:srgbClr val="D8DEE6"/>
-                      </a:solidFill>
-                      <a:prstDash val="solid"/>
-                      <a:round/>
-                      <a:headEnd type="none" w="med" len="med"/>
-                      <a:tailEnd type="none" w="med" len="med"/>
-                    </a:lnR>
-                    <a:lnT w="6350" cap="flat" cmpd="sng" algn="ctr">
-                      <a:solidFill>
-                        <a:srgbClr val="D8DEE6"/>
-                      </a:solidFill>
-                      <a:prstDash val="solid"/>
-                      <a:round/>
-                      <a:headEnd type="none" w="med" len="med"/>
-                      <a:tailEnd type="none" w="med" len="med"/>
-                    </a:lnT>
-                    <a:lnB w="6350" cap="flat" cmpd="sng" algn="ctr">
-                      <a:solidFill>
-                        <a:srgbClr val="D8DEE6"/>
-                      </a:solidFill>
-                      <a:prstDash val="solid"/>
-                      <a:round/>
-                      <a:headEnd type="none" w="med" len="med"/>
-                      <a:tailEnd type="none" w="med" len="med"/>
-                    </a:lnB>
-                  </a:tcPr>
-                </a:tc>
-                <a:tc>
-                  <a:txBody>
-                    <a:bodyPr/>
-                    <a:lstStyle/>
-                    <a:p>
-                      <a:pPr indent="0" marL="0">
-                        <a:buNone/>
-                      </a:pPr>
-                      <a:r>
-                        <a:rPr lang="en-US" sz="1150" dirty="0">
-                          <a:solidFill>
-                            <a:srgbClr val="1E293B"/>
-                          </a:solidFill>
-                          <a:latin typeface="Arial" pitchFamily="34" charset="0"/>
-                          <a:ea typeface="Arial" pitchFamily="34" charset="-122"/>
-                          <a:cs typeface="Arial" pitchFamily="34" charset="-120"/>
-                        </a:rPr>
-                        <a:t>Перепутаны «что делаем» и «выгода»</a:t>
-                      </a:r>
-                      <a:endParaRPr lang="en-US" sz="1150" dirty="0">
-                        <a:latin typeface="Arial" charset="0"/>
-                        <a:ea typeface="Arial" charset="0"/>
-                        <a:cs typeface="Arial" charset="0"/>
-                      </a:endParaRPr>
-                    </a:p>
-                  </a:txBody>
-                  <a:tcPr marL="91440" marR="91440" marT="45720" marB="45720" anchor="ctr">
-                    <a:lnL w="6350" cap="flat" cmpd="sng" algn="ctr">
-                      <a:solidFill>
-                        <a:srgbClr val="D8DEE6"/>
-                      </a:solidFill>
-                      <a:prstDash val="solid"/>
-                      <a:round/>
-                      <a:headEnd type="none" w="med" len="med"/>
-                      <a:tailEnd type="none" w="med" len="med"/>
-                    </a:lnL>
-                    <a:lnR w="6350" cap="flat" cmpd="sng" algn="ctr">
-                      <a:solidFill>
-                        <a:srgbClr val="D8DEE6"/>
-                      </a:solidFill>
-                      <a:prstDash val="solid"/>
-                      <a:round/>
-                      <a:headEnd type="none" w="med" len="med"/>
-                      <a:tailEnd type="none" w="med" len="med"/>
-                    </a:lnR>
-                    <a:lnT w="6350" cap="flat" cmpd="sng" algn="ctr">
-                      <a:solidFill>
-                        <a:srgbClr val="D8DEE6"/>
-                      </a:solidFill>
-                      <a:prstDash val="solid"/>
-                      <a:round/>
-                      <a:headEnd type="none" w="med" len="med"/>
-                      <a:tailEnd type="none" w="med" len="med"/>
-                    </a:lnT>
-                    <a:lnB w="6350" cap="flat" cmpd="sng" algn="ctr">
-                      <a:solidFill>
-                        <a:srgbClr val="D8DEE6"/>
-                      </a:solidFill>
-                      <a:prstDash val="solid"/>
-                      <a:round/>
-                      <a:headEnd type="none" w="med" len="med"/>
-                      <a:tailEnd type="none" w="med" len="med"/>
-                    </a:lnB>
-                  </a:tcPr>
-                </a:tc>
-                <a:tc>
-                  <a:txBody>
-                    <a:bodyPr/>
-                    <a:lstStyle/>
-                    <a:p>
-                      <a:pPr indent="0" marL="0">
-                        <a:buNone/>
-                      </a:pPr>
-                      <a:r>
-                        <a:rPr lang="en-US" sz="1150" dirty="0">
-                          <a:solidFill>
-                            <a:srgbClr val="1E293B"/>
-                          </a:solidFill>
-                          <a:latin typeface="Arial" pitchFamily="34" charset="0"/>
-                          <a:ea typeface="Arial" pitchFamily="34" charset="-122"/>
-                          <a:cs typeface="Arial" pitchFamily="34" charset="-120"/>
-                        </a:rPr>
-                        <a:t>Технология — в строку 2, польза человеку — в строку 3</a:t>
-                      </a:r>
-                      <a:endParaRPr lang="en-US" sz="1150" dirty="0">
-                        <a:latin typeface="Arial" charset="0"/>
-                        <a:ea typeface="Arial" charset="0"/>
-                        <a:cs typeface="Arial" charset="0"/>
-                      </a:endParaRPr>
-                    </a:p>
-                  </a:txBody>
-                  <a:tcPr marL="91440" marR="91440" marT="45720" marB="45720" anchor="ctr">
-                    <a:lnL w="6350" cap="flat" cmpd="sng" algn="ctr">
-                      <a:solidFill>
-                        <a:srgbClr val="D8DEE6"/>
-                      </a:solidFill>
-                      <a:prstDash val="solid"/>
-                      <a:round/>
-                      <a:headEnd type="none" w="med" len="med"/>
-                      <a:tailEnd type="none" w="med" len="med"/>
-                    </a:lnL>
-                    <a:lnR w="6350" cap="flat" cmpd="sng" algn="ctr">
-                      <a:solidFill>
-                        <a:srgbClr val="D8DEE6"/>
-                      </a:solidFill>
-                      <a:prstDash val="solid"/>
-                      <a:round/>
-                      <a:headEnd type="none" w="med" len="med"/>
-                      <a:tailEnd type="none" w="med" len="med"/>
-                    </a:lnR>
-                    <a:lnT w="6350" cap="flat" cmpd="sng" algn="ctr">
-                      <a:solidFill>
-                        <a:srgbClr val="D8DEE6"/>
-                      </a:solidFill>
-                      <a:prstDash val="solid"/>
-                      <a:round/>
-                      <a:headEnd type="none" w="med" len="med"/>
-                      <a:tailEnd type="none" w="med" len="med"/>
-                    </a:lnT>
-                    <a:lnB w="6350" cap="flat" cmpd="sng" algn="ctr">
-                      <a:solidFill>
-                        <a:srgbClr val="D8DEE6"/>
-                      </a:solidFill>
-                      <a:prstDash val="solid"/>
-                      <a:round/>
-                      <a:headEnd type="none" w="med" len="med"/>
-                      <a:tailEnd type="none" w="med" len="med"/>
-                    </a:lnB>
-                  </a:tcPr>
-                </a:tc>
-              </a:tr>
-            </a:tbl>
-          </a:graphicData>
-        </a:graphic>
-      </p:graphicFrame>
-      <p:sp>
-        <p:nvSpPr>
-          <p:cNvPr id="6" name="Shape 3"/>
-          <p:cNvSpPr/>
-          <p:nvPr/>
-        </p:nvSpPr>
-        <p:spPr>
-          <a:xfrm>
-            <a:off x="502920" y="4041648"/>
-            <a:ext cx="8138160" cy="658368"/>
-          </a:xfrm>
-          <a:prstGeom prst="roundRect">
-            <a:avLst>
-              <a:gd name="adj" fmla="val 6944"/>
-            </a:avLst>
-          </a:prstGeom>
-          <a:solidFill>
-            <a:srgbClr val="1E4270"/>
-          </a:solidFill>
-          <a:ln w="9525">
-            <a:solidFill>
-              <a:srgbClr val="D8DEE6"/>
-            </a:solidFill>
-            <a:prstDash val="solid"/>
-          </a:ln>
-        </p:spPr>
-      </p:sp>
-      <p:sp>
-        <p:nvSpPr>
-          <p:cNvPr id="7" name="Text 4"/>
-          <p:cNvSpPr txBox="1"/>
-          <p:nvPr/>
-        </p:nvSpPr>
-        <p:spPr>
-          <a:xfrm>
-            <a:off x="777240" y="4187952"/>
-            <a:ext cx="7589520" cy="365760"/>
-          </a:xfrm>
-          <a:prstGeom prst="rect">
-            <a:avLst/>
-          </a:prstGeom>
-          <a:noFill/>
-          <a:ln/>
-        </p:spPr>
-        <p:txBody>
-          <a:bodyPr wrap="square" lIns="0" tIns="0" rIns="0" bIns="0" rtlCol="0" anchor="ctr"/>
-          <a:lstStyle/>
-          <a:p>
-            <a:pPr indent="0" marL="0">
-              <a:buNone/>
-            </a:pPr>
-            <a:r>
-              <a:rPr lang="en-US" sz="1350" b="1" dirty="0">
-                <a:solidFill>
-                  <a:srgbClr val="FFFFFF"/>
-                </a:solidFill>
-                <a:latin typeface="Arial" pitchFamily="34" charset="0"/>
-                <a:ea typeface="Arial" pitchFamily="34" charset="-122"/>
-                <a:cs typeface="Arial" pitchFamily="34" charset="-120"/>
-              </a:rPr>
-              <a:t>Возьмите лист 1. Найдите у себя хотя бы одну из этих пяти. Руку поднимать не надо — три минуты.</a:t>
-            </a:r>
-            <a:endParaRPr lang="en-US" sz="1350" dirty="0"/>
-          </a:p>
-        </p:txBody>
-      </p:sp>
     </p:spTree>
   </p:cSld>
   <p:clrMapOvr>

--- a/zanyatiya/Zanyatie_03_Lekciya_Iniciaciya_Slaydy.pptx
+++ b/zanyatiya/Zanyatie_03_Lekciya_Iniciaciya_Slaydy.pptx
@@ -21,9 +21,18 @@
     <p:sldId id="269" r:id="rId15"/>
     <p:sldId id="270" r:id="rId16"/>
     <p:sldId id="271" r:id="rId17"/>
+    <p:sldId id="272" r:id="rId18"/>
+    <p:sldId id="273" r:id="rId19"/>
+    <p:sldId id="274" r:id="rId20"/>
+    <p:sldId id="275" r:id="rId21"/>
+    <p:sldId id="276" r:id="rId22"/>
+    <p:sldId id="277" r:id="rId23"/>
+    <p:sldId id="278" r:id="rId24"/>
+    <p:sldId id="279" r:id="rId25"/>
+    <p:sldId id="280" r:id="rId26"/>
   </p:sldIdLst>
   <p:notesMasterIdLst>
-    <p:notesMasterId r:id="rId18"/>
+    <p:notesMasterId r:id="rId27"/>
   </p:notesMasterIdLst>
   <p:sldSz cx="12192000" cy="6858000"/>
   <p:notesSz cx="6858000" cy="12192000"/>
@@ -517,7 +526,7 @@
           <a:p>
             <a:r>
               <a:rPr lang="en-US" dirty="0"/>
-              <a:t>Заявить рамку сразу: сегодня не новая тема, сегодня разбор того, что вы уже сделали. Анонсировать окно замены проекта.</a:t>
+              <a:t>Заявить рамку сразу: сегодня разбор того, что вы уже сделали, приведённый к понятийной структуре. Анонсировать окно замены проекта.</a:t>
             </a:r>
             <a:endParaRPr lang="en-US" dirty="0"/>
           </a:p>
@@ -1175,6 +1184,270 @@
 </p:notes>
 </file>
 
+<file path=ppt/notesSlides/notesSlide17.xml><?xml version="1.0" encoding="utf-8"?>
+<p:notes xmlns:a="http://schemas.openxmlformats.org/drawingml/2006/main" xmlns:r="http://schemas.openxmlformats.org/officeDocument/2006/relationships" xmlns:p="http://schemas.openxmlformats.org/presentationml/2006/main">
+  <p:cSld>
+    <p:spTree>
+      <p:nvGrpSpPr>
+        <p:cNvPr id="1" name=""/>
+        <p:cNvGrpSpPr/>
+        <p:nvPr/>
+      </p:nvGrpSpPr>
+      <p:grpSpPr>
+        <a:xfrm>
+          <a:off x="0" y="0"/>
+          <a:ext cx="0" cy="0"/>
+          <a:chOff x="0" y="0"/>
+          <a:chExt cx="0" cy="0"/>
+        </a:xfrm>
+      </p:grpSpPr>
+      <p:sp>
+        <p:nvSpPr>
+          <p:cNvPr id="2" name="Slide Image Placeholder 1"/>
+          <p:cNvSpPr>
+            <a:spLocks noGrp="1" noRot="1" noChangeAspect="1"/>
+          </p:cNvSpPr>
+          <p:nvPr>
+            <p:ph type="sldImg"/>
+          </p:nvPr>
+        </p:nvSpPr>
+        <p:spPr/>
+      </p:sp>
+      <p:sp>
+        <p:nvSpPr>
+          <p:cNvPr id="3" name="Notes Placeholder 2"/>
+          <p:cNvSpPr>
+            <a:spLocks noGrp="1"/>
+          </p:cNvSpPr>
+          <p:nvPr>
+            <p:ph type="body" idx="1"/>
+          </p:nvPr>
+        </p:nvSpPr>
+        <p:spPr/>
+        <p:txBody>
+          <a:bodyPr/>
+          <a:lstStyle/>
+          <a:p>
+            <a:r>
+              <a:rPr lang="en-US" dirty="0"/>
+              <a:t/>
+            </a:r>
+            <a:endParaRPr lang="en-US" dirty="0"/>
+          </a:p>
+        </p:txBody>
+      </p:sp>
+      <p:sp>
+        <p:nvSpPr>
+          <p:cNvPr id="4" name="Slide Number Placeholder 3"/>
+          <p:cNvSpPr>
+            <a:spLocks noGrp="1"/>
+          </p:cNvSpPr>
+          <p:nvPr>
+            <p:ph type="sldNum" sz="quarter" idx="10"/>
+          </p:nvPr>
+        </p:nvSpPr>
+        <p:spPr/>
+        <p:txBody>
+          <a:bodyPr/>
+          <a:lstStyle/>
+          <a:p>
+            <a:fld id="{F7021451-1387-4CA6-816F-3879F97B5CBC}" type="slidenum">
+              <a:rPr lang="en-US"/>
+              <a:t>17</a:t>
+            </a:fld>
+            <a:endParaRPr lang="en-US"/>
+          </a:p>
+        </p:txBody>
+      </p:sp>
+    </p:spTree>
+    <p:extLst>
+      <p:ext uri="{BB962C8B-B14F-4D97-AF65-F5344CB8AC3E}">
+        <p14:creationId xmlns:p14="http://schemas.microsoft.com/office/powerpoint/2010/main" val="1024086991"/>
+      </p:ext>
+    </p:extLst>
+  </p:cSld>
+  <p:clrMapOvr>
+    <a:masterClrMapping/>
+  </p:clrMapOvr>
+</p:notes>
+</file>
+
+<file path=ppt/notesSlides/notesSlide18.xml><?xml version="1.0" encoding="utf-8"?>
+<p:notes xmlns:a="http://schemas.openxmlformats.org/drawingml/2006/main" xmlns:r="http://schemas.openxmlformats.org/officeDocument/2006/relationships" xmlns:p="http://schemas.openxmlformats.org/presentationml/2006/main">
+  <p:cSld>
+    <p:spTree>
+      <p:nvGrpSpPr>
+        <p:cNvPr id="1" name=""/>
+        <p:cNvGrpSpPr/>
+        <p:nvPr/>
+      </p:nvGrpSpPr>
+      <p:grpSpPr>
+        <a:xfrm>
+          <a:off x="0" y="0"/>
+          <a:ext cx="0" cy="0"/>
+          <a:chOff x="0" y="0"/>
+          <a:chExt cx="0" cy="0"/>
+        </a:xfrm>
+      </p:grpSpPr>
+      <p:sp>
+        <p:nvSpPr>
+          <p:cNvPr id="2" name="Slide Image Placeholder 1"/>
+          <p:cNvSpPr>
+            <a:spLocks noGrp="1" noRot="1" noChangeAspect="1"/>
+          </p:cNvSpPr>
+          <p:nvPr>
+            <p:ph type="sldImg"/>
+          </p:nvPr>
+        </p:nvSpPr>
+        <p:spPr/>
+      </p:sp>
+      <p:sp>
+        <p:nvSpPr>
+          <p:cNvPr id="3" name="Notes Placeholder 2"/>
+          <p:cNvSpPr>
+            <a:spLocks noGrp="1"/>
+          </p:cNvSpPr>
+          <p:nvPr>
+            <p:ph type="body" idx="1"/>
+          </p:nvPr>
+        </p:nvSpPr>
+        <p:spPr/>
+        <p:txBody>
+          <a:bodyPr/>
+          <a:lstStyle/>
+          <a:p>
+            <a:r>
+              <a:rPr lang="en-US" dirty="0"/>
+              <a:t/>
+            </a:r>
+            <a:endParaRPr lang="en-US" dirty="0"/>
+          </a:p>
+        </p:txBody>
+      </p:sp>
+      <p:sp>
+        <p:nvSpPr>
+          <p:cNvPr id="4" name="Slide Number Placeholder 3"/>
+          <p:cNvSpPr>
+            <a:spLocks noGrp="1"/>
+          </p:cNvSpPr>
+          <p:nvPr>
+            <p:ph type="sldNum" sz="quarter" idx="10"/>
+          </p:nvPr>
+        </p:nvSpPr>
+        <p:spPr/>
+        <p:txBody>
+          <a:bodyPr/>
+          <a:lstStyle/>
+          <a:p>
+            <a:fld id="{F7021451-1387-4CA6-816F-3879F97B5CBC}" type="slidenum">
+              <a:rPr lang="en-US"/>
+              <a:t>18</a:t>
+            </a:fld>
+            <a:endParaRPr lang="en-US"/>
+          </a:p>
+        </p:txBody>
+      </p:sp>
+    </p:spTree>
+    <p:extLst>
+      <p:ext uri="{BB962C8B-B14F-4D97-AF65-F5344CB8AC3E}">
+        <p14:creationId xmlns:p14="http://schemas.microsoft.com/office/powerpoint/2010/main" val="1024086991"/>
+      </p:ext>
+    </p:extLst>
+  </p:cSld>
+  <p:clrMapOvr>
+    <a:masterClrMapping/>
+  </p:clrMapOvr>
+</p:notes>
+</file>
+
+<file path=ppt/notesSlides/notesSlide19.xml><?xml version="1.0" encoding="utf-8"?>
+<p:notes xmlns:a="http://schemas.openxmlformats.org/drawingml/2006/main" xmlns:r="http://schemas.openxmlformats.org/officeDocument/2006/relationships" xmlns:p="http://schemas.openxmlformats.org/presentationml/2006/main">
+  <p:cSld>
+    <p:spTree>
+      <p:nvGrpSpPr>
+        <p:cNvPr id="1" name=""/>
+        <p:cNvGrpSpPr/>
+        <p:nvPr/>
+      </p:nvGrpSpPr>
+      <p:grpSpPr>
+        <a:xfrm>
+          <a:off x="0" y="0"/>
+          <a:ext cx="0" cy="0"/>
+          <a:chOff x="0" y="0"/>
+          <a:chExt cx="0" cy="0"/>
+        </a:xfrm>
+      </p:grpSpPr>
+      <p:sp>
+        <p:nvSpPr>
+          <p:cNvPr id="2" name="Slide Image Placeholder 1"/>
+          <p:cNvSpPr>
+            <a:spLocks noGrp="1" noRot="1" noChangeAspect="1"/>
+          </p:cNvSpPr>
+          <p:nvPr>
+            <p:ph type="sldImg"/>
+          </p:nvPr>
+        </p:nvSpPr>
+        <p:spPr/>
+      </p:sp>
+      <p:sp>
+        <p:nvSpPr>
+          <p:cNvPr id="3" name="Notes Placeholder 2"/>
+          <p:cNvSpPr>
+            <a:spLocks noGrp="1"/>
+          </p:cNvSpPr>
+          <p:nvPr>
+            <p:ph type="body" idx="1"/>
+          </p:nvPr>
+        </p:nvSpPr>
+        <p:spPr/>
+        <p:txBody>
+          <a:bodyPr/>
+          <a:lstStyle/>
+          <a:p>
+            <a:r>
+              <a:rPr lang="en-US" dirty="0"/>
+              <a:t/>
+            </a:r>
+            <a:endParaRPr lang="en-US" dirty="0"/>
+          </a:p>
+        </p:txBody>
+      </p:sp>
+      <p:sp>
+        <p:nvSpPr>
+          <p:cNvPr id="4" name="Slide Number Placeholder 3"/>
+          <p:cNvSpPr>
+            <a:spLocks noGrp="1"/>
+          </p:cNvSpPr>
+          <p:nvPr>
+            <p:ph type="sldNum" sz="quarter" idx="10"/>
+          </p:nvPr>
+        </p:nvSpPr>
+        <p:spPr/>
+        <p:txBody>
+          <a:bodyPr/>
+          <a:lstStyle/>
+          <a:p>
+            <a:fld id="{F7021451-1387-4CA6-816F-3879F97B5CBC}" type="slidenum">
+              <a:rPr lang="en-US"/>
+              <a:t>19</a:t>
+            </a:fld>
+            <a:endParaRPr lang="en-US"/>
+          </a:p>
+        </p:txBody>
+      </p:sp>
+    </p:spTree>
+    <p:extLst>
+      <p:ext uri="{BB962C8B-B14F-4D97-AF65-F5344CB8AC3E}">
+        <p14:creationId xmlns:p14="http://schemas.microsoft.com/office/powerpoint/2010/main" val="1024086991"/>
+      </p:ext>
+    </p:extLst>
+  </p:cSld>
+  <p:clrMapOvr>
+    <a:masterClrMapping/>
+  </p:clrMapOvr>
+</p:notes>
+</file>
+
 <file path=ppt/notesSlides/notesSlide2.xml><?xml version="1.0" encoding="utf-8"?>
 <p:notes xmlns:a="http://schemas.openxmlformats.org/drawingml/2006/main" xmlns:r="http://schemas.openxmlformats.org/officeDocument/2006/relationships" xmlns:p="http://schemas.openxmlformats.org/presentationml/2006/main">
   <p:cSld>
@@ -1221,7 +1494,7 @@
           <a:p>
             <a:r>
               <a:rPr lang="en-US" dirty="0"/>
-              <a:t>Отсчёт называть вслух на каждом занятии — это и есть встроенный тайм-менеджмент.</a:t>
+              <a:t/>
             </a:r>
             <a:endParaRPr lang="en-US" dirty="0"/>
           </a:p>
@@ -1245,6 +1518,534 @@
             <a:fld id="{F7021451-1387-4CA6-816F-3879F97B5CBC}" type="slidenum">
               <a:rPr lang="en-US"/>
               <a:t>2</a:t>
+            </a:fld>
+            <a:endParaRPr lang="en-US"/>
+          </a:p>
+        </p:txBody>
+      </p:sp>
+    </p:spTree>
+    <p:extLst>
+      <p:ext uri="{BB962C8B-B14F-4D97-AF65-F5344CB8AC3E}">
+        <p14:creationId xmlns:p14="http://schemas.microsoft.com/office/powerpoint/2010/main" val="1024086991"/>
+      </p:ext>
+    </p:extLst>
+  </p:cSld>
+  <p:clrMapOvr>
+    <a:masterClrMapping/>
+  </p:clrMapOvr>
+</p:notes>
+</file>
+
+<file path=ppt/notesSlides/notesSlide20.xml><?xml version="1.0" encoding="utf-8"?>
+<p:notes xmlns:a="http://schemas.openxmlformats.org/drawingml/2006/main" xmlns:r="http://schemas.openxmlformats.org/officeDocument/2006/relationships" xmlns:p="http://schemas.openxmlformats.org/presentationml/2006/main">
+  <p:cSld>
+    <p:spTree>
+      <p:nvGrpSpPr>
+        <p:cNvPr id="1" name=""/>
+        <p:cNvGrpSpPr/>
+        <p:nvPr/>
+      </p:nvGrpSpPr>
+      <p:grpSpPr>
+        <a:xfrm>
+          <a:off x="0" y="0"/>
+          <a:ext cx="0" cy="0"/>
+          <a:chOff x="0" y="0"/>
+          <a:chExt cx="0" cy="0"/>
+        </a:xfrm>
+      </p:grpSpPr>
+      <p:sp>
+        <p:nvSpPr>
+          <p:cNvPr id="2" name="Slide Image Placeholder 1"/>
+          <p:cNvSpPr>
+            <a:spLocks noGrp="1" noRot="1" noChangeAspect="1"/>
+          </p:cNvSpPr>
+          <p:nvPr>
+            <p:ph type="sldImg"/>
+          </p:nvPr>
+        </p:nvSpPr>
+        <p:spPr/>
+      </p:sp>
+      <p:sp>
+        <p:nvSpPr>
+          <p:cNvPr id="3" name="Notes Placeholder 2"/>
+          <p:cNvSpPr>
+            <a:spLocks noGrp="1"/>
+          </p:cNvSpPr>
+          <p:nvPr>
+            <p:ph type="body" idx="1"/>
+          </p:nvPr>
+        </p:nvSpPr>
+        <p:spPr/>
+        <p:txBody>
+          <a:bodyPr/>
+          <a:lstStyle/>
+          <a:p>
+            <a:r>
+              <a:rPr lang="en-US" dirty="0"/>
+              <a:t/>
+            </a:r>
+            <a:endParaRPr lang="en-US" dirty="0"/>
+          </a:p>
+        </p:txBody>
+      </p:sp>
+      <p:sp>
+        <p:nvSpPr>
+          <p:cNvPr id="4" name="Slide Number Placeholder 3"/>
+          <p:cNvSpPr>
+            <a:spLocks noGrp="1"/>
+          </p:cNvSpPr>
+          <p:nvPr>
+            <p:ph type="sldNum" sz="quarter" idx="10"/>
+          </p:nvPr>
+        </p:nvSpPr>
+        <p:spPr/>
+        <p:txBody>
+          <a:bodyPr/>
+          <a:lstStyle/>
+          <a:p>
+            <a:fld id="{F7021451-1387-4CA6-816F-3879F97B5CBC}" type="slidenum">
+              <a:rPr lang="en-US"/>
+              <a:t>20</a:t>
+            </a:fld>
+            <a:endParaRPr lang="en-US"/>
+          </a:p>
+        </p:txBody>
+      </p:sp>
+    </p:spTree>
+    <p:extLst>
+      <p:ext uri="{BB962C8B-B14F-4D97-AF65-F5344CB8AC3E}">
+        <p14:creationId xmlns:p14="http://schemas.microsoft.com/office/powerpoint/2010/main" val="1024086991"/>
+      </p:ext>
+    </p:extLst>
+  </p:cSld>
+  <p:clrMapOvr>
+    <a:masterClrMapping/>
+  </p:clrMapOvr>
+</p:notes>
+</file>
+
+<file path=ppt/notesSlides/notesSlide21.xml><?xml version="1.0" encoding="utf-8"?>
+<p:notes xmlns:a="http://schemas.openxmlformats.org/drawingml/2006/main" xmlns:r="http://schemas.openxmlformats.org/officeDocument/2006/relationships" xmlns:p="http://schemas.openxmlformats.org/presentationml/2006/main">
+  <p:cSld>
+    <p:spTree>
+      <p:nvGrpSpPr>
+        <p:cNvPr id="1" name=""/>
+        <p:cNvGrpSpPr/>
+        <p:nvPr/>
+      </p:nvGrpSpPr>
+      <p:grpSpPr>
+        <a:xfrm>
+          <a:off x="0" y="0"/>
+          <a:ext cx="0" cy="0"/>
+          <a:chOff x="0" y="0"/>
+          <a:chExt cx="0" cy="0"/>
+        </a:xfrm>
+      </p:grpSpPr>
+      <p:sp>
+        <p:nvSpPr>
+          <p:cNvPr id="2" name="Slide Image Placeholder 1"/>
+          <p:cNvSpPr>
+            <a:spLocks noGrp="1" noRot="1" noChangeAspect="1"/>
+          </p:cNvSpPr>
+          <p:nvPr>
+            <p:ph type="sldImg"/>
+          </p:nvPr>
+        </p:nvSpPr>
+        <p:spPr/>
+      </p:sp>
+      <p:sp>
+        <p:nvSpPr>
+          <p:cNvPr id="3" name="Notes Placeholder 2"/>
+          <p:cNvSpPr>
+            <a:spLocks noGrp="1"/>
+          </p:cNvSpPr>
+          <p:nvPr>
+            <p:ph type="body" idx="1"/>
+          </p:nvPr>
+        </p:nvSpPr>
+        <p:spPr/>
+        <p:txBody>
+          <a:bodyPr/>
+          <a:lstStyle/>
+          <a:p>
+            <a:r>
+              <a:rPr lang="en-US" dirty="0"/>
+              <a:t/>
+            </a:r>
+            <a:endParaRPr lang="en-US" dirty="0"/>
+          </a:p>
+        </p:txBody>
+      </p:sp>
+      <p:sp>
+        <p:nvSpPr>
+          <p:cNvPr id="4" name="Slide Number Placeholder 3"/>
+          <p:cNvSpPr>
+            <a:spLocks noGrp="1"/>
+          </p:cNvSpPr>
+          <p:nvPr>
+            <p:ph type="sldNum" sz="quarter" idx="10"/>
+          </p:nvPr>
+        </p:nvSpPr>
+        <p:spPr/>
+        <p:txBody>
+          <a:bodyPr/>
+          <a:lstStyle/>
+          <a:p>
+            <a:fld id="{F7021451-1387-4CA6-816F-3879F97B5CBC}" type="slidenum">
+              <a:rPr lang="en-US"/>
+              <a:t>21</a:t>
+            </a:fld>
+            <a:endParaRPr lang="en-US"/>
+          </a:p>
+        </p:txBody>
+      </p:sp>
+    </p:spTree>
+    <p:extLst>
+      <p:ext uri="{BB962C8B-B14F-4D97-AF65-F5344CB8AC3E}">
+        <p14:creationId xmlns:p14="http://schemas.microsoft.com/office/powerpoint/2010/main" val="1024086991"/>
+      </p:ext>
+    </p:extLst>
+  </p:cSld>
+  <p:clrMapOvr>
+    <a:masterClrMapping/>
+  </p:clrMapOvr>
+</p:notes>
+</file>
+
+<file path=ppt/notesSlides/notesSlide22.xml><?xml version="1.0" encoding="utf-8"?>
+<p:notes xmlns:a="http://schemas.openxmlformats.org/drawingml/2006/main" xmlns:r="http://schemas.openxmlformats.org/officeDocument/2006/relationships" xmlns:p="http://schemas.openxmlformats.org/presentationml/2006/main">
+  <p:cSld>
+    <p:spTree>
+      <p:nvGrpSpPr>
+        <p:cNvPr id="1" name=""/>
+        <p:cNvGrpSpPr/>
+        <p:nvPr/>
+      </p:nvGrpSpPr>
+      <p:grpSpPr>
+        <a:xfrm>
+          <a:off x="0" y="0"/>
+          <a:ext cx="0" cy="0"/>
+          <a:chOff x="0" y="0"/>
+          <a:chExt cx="0" cy="0"/>
+        </a:xfrm>
+      </p:grpSpPr>
+      <p:sp>
+        <p:nvSpPr>
+          <p:cNvPr id="2" name="Slide Image Placeholder 1"/>
+          <p:cNvSpPr>
+            <a:spLocks noGrp="1" noRot="1" noChangeAspect="1"/>
+          </p:cNvSpPr>
+          <p:nvPr>
+            <p:ph type="sldImg"/>
+          </p:nvPr>
+        </p:nvSpPr>
+        <p:spPr/>
+      </p:sp>
+      <p:sp>
+        <p:nvSpPr>
+          <p:cNvPr id="3" name="Notes Placeholder 2"/>
+          <p:cNvSpPr>
+            <a:spLocks noGrp="1"/>
+          </p:cNvSpPr>
+          <p:nvPr>
+            <p:ph type="body" idx="1"/>
+          </p:nvPr>
+        </p:nvSpPr>
+        <p:spPr/>
+        <p:txBody>
+          <a:bodyPr/>
+          <a:lstStyle/>
+          <a:p>
+            <a:r>
+              <a:rPr lang="en-US" dirty="0"/>
+              <a:t/>
+            </a:r>
+            <a:endParaRPr lang="en-US" dirty="0"/>
+          </a:p>
+        </p:txBody>
+      </p:sp>
+      <p:sp>
+        <p:nvSpPr>
+          <p:cNvPr id="4" name="Slide Number Placeholder 3"/>
+          <p:cNvSpPr>
+            <a:spLocks noGrp="1"/>
+          </p:cNvSpPr>
+          <p:nvPr>
+            <p:ph type="sldNum" sz="quarter" idx="10"/>
+          </p:nvPr>
+        </p:nvSpPr>
+        <p:spPr/>
+        <p:txBody>
+          <a:bodyPr/>
+          <a:lstStyle/>
+          <a:p>
+            <a:fld id="{F7021451-1387-4CA6-816F-3879F97B5CBC}" type="slidenum">
+              <a:rPr lang="en-US"/>
+              <a:t>22</a:t>
+            </a:fld>
+            <a:endParaRPr lang="en-US"/>
+          </a:p>
+        </p:txBody>
+      </p:sp>
+    </p:spTree>
+    <p:extLst>
+      <p:ext uri="{BB962C8B-B14F-4D97-AF65-F5344CB8AC3E}">
+        <p14:creationId xmlns:p14="http://schemas.microsoft.com/office/powerpoint/2010/main" val="1024086991"/>
+      </p:ext>
+    </p:extLst>
+  </p:cSld>
+  <p:clrMapOvr>
+    <a:masterClrMapping/>
+  </p:clrMapOvr>
+</p:notes>
+</file>
+
+<file path=ppt/notesSlides/notesSlide23.xml><?xml version="1.0" encoding="utf-8"?>
+<p:notes xmlns:a="http://schemas.openxmlformats.org/drawingml/2006/main" xmlns:r="http://schemas.openxmlformats.org/officeDocument/2006/relationships" xmlns:p="http://schemas.openxmlformats.org/presentationml/2006/main">
+  <p:cSld>
+    <p:spTree>
+      <p:nvGrpSpPr>
+        <p:cNvPr id="1" name=""/>
+        <p:cNvGrpSpPr/>
+        <p:nvPr/>
+      </p:nvGrpSpPr>
+      <p:grpSpPr>
+        <a:xfrm>
+          <a:off x="0" y="0"/>
+          <a:ext cx="0" cy="0"/>
+          <a:chOff x="0" y="0"/>
+          <a:chExt cx="0" cy="0"/>
+        </a:xfrm>
+      </p:grpSpPr>
+      <p:sp>
+        <p:nvSpPr>
+          <p:cNvPr id="2" name="Slide Image Placeholder 1"/>
+          <p:cNvSpPr>
+            <a:spLocks noGrp="1" noRot="1" noChangeAspect="1"/>
+          </p:cNvSpPr>
+          <p:nvPr>
+            <p:ph type="sldImg"/>
+          </p:nvPr>
+        </p:nvSpPr>
+        <p:spPr/>
+      </p:sp>
+      <p:sp>
+        <p:nvSpPr>
+          <p:cNvPr id="3" name="Notes Placeholder 2"/>
+          <p:cNvSpPr>
+            <a:spLocks noGrp="1"/>
+          </p:cNvSpPr>
+          <p:nvPr>
+            <p:ph type="body" idx="1"/>
+          </p:nvPr>
+        </p:nvSpPr>
+        <p:spPr/>
+        <p:txBody>
+          <a:bodyPr/>
+          <a:lstStyle/>
+          <a:p>
+            <a:r>
+              <a:rPr lang="en-US" dirty="0"/>
+              <a:t/>
+            </a:r>
+            <a:endParaRPr lang="en-US" dirty="0"/>
+          </a:p>
+        </p:txBody>
+      </p:sp>
+      <p:sp>
+        <p:nvSpPr>
+          <p:cNvPr id="4" name="Slide Number Placeholder 3"/>
+          <p:cNvSpPr>
+            <a:spLocks noGrp="1"/>
+          </p:cNvSpPr>
+          <p:nvPr>
+            <p:ph type="sldNum" sz="quarter" idx="10"/>
+          </p:nvPr>
+        </p:nvSpPr>
+        <p:spPr/>
+        <p:txBody>
+          <a:bodyPr/>
+          <a:lstStyle/>
+          <a:p>
+            <a:fld id="{F7021451-1387-4CA6-816F-3879F97B5CBC}" type="slidenum">
+              <a:rPr lang="en-US"/>
+              <a:t>23</a:t>
+            </a:fld>
+            <a:endParaRPr lang="en-US"/>
+          </a:p>
+        </p:txBody>
+      </p:sp>
+    </p:spTree>
+    <p:extLst>
+      <p:ext uri="{BB962C8B-B14F-4D97-AF65-F5344CB8AC3E}">
+        <p14:creationId xmlns:p14="http://schemas.microsoft.com/office/powerpoint/2010/main" val="1024086991"/>
+      </p:ext>
+    </p:extLst>
+  </p:cSld>
+  <p:clrMapOvr>
+    <a:masterClrMapping/>
+  </p:clrMapOvr>
+</p:notes>
+</file>
+
+<file path=ppt/notesSlides/notesSlide24.xml><?xml version="1.0" encoding="utf-8"?>
+<p:notes xmlns:a="http://schemas.openxmlformats.org/drawingml/2006/main" xmlns:r="http://schemas.openxmlformats.org/officeDocument/2006/relationships" xmlns:p="http://schemas.openxmlformats.org/presentationml/2006/main">
+  <p:cSld>
+    <p:spTree>
+      <p:nvGrpSpPr>
+        <p:cNvPr id="1" name=""/>
+        <p:cNvGrpSpPr/>
+        <p:nvPr/>
+      </p:nvGrpSpPr>
+      <p:grpSpPr>
+        <a:xfrm>
+          <a:off x="0" y="0"/>
+          <a:ext cx="0" cy="0"/>
+          <a:chOff x="0" y="0"/>
+          <a:chExt cx="0" cy="0"/>
+        </a:xfrm>
+      </p:grpSpPr>
+      <p:sp>
+        <p:nvSpPr>
+          <p:cNvPr id="2" name="Slide Image Placeholder 1"/>
+          <p:cNvSpPr>
+            <a:spLocks noGrp="1" noRot="1" noChangeAspect="1"/>
+          </p:cNvSpPr>
+          <p:nvPr>
+            <p:ph type="sldImg"/>
+          </p:nvPr>
+        </p:nvSpPr>
+        <p:spPr/>
+      </p:sp>
+      <p:sp>
+        <p:nvSpPr>
+          <p:cNvPr id="3" name="Notes Placeholder 2"/>
+          <p:cNvSpPr>
+            <a:spLocks noGrp="1"/>
+          </p:cNvSpPr>
+          <p:nvPr>
+            <p:ph type="body" idx="1"/>
+          </p:nvPr>
+        </p:nvSpPr>
+        <p:spPr/>
+        <p:txBody>
+          <a:bodyPr/>
+          <a:lstStyle/>
+          <a:p>
+            <a:r>
+              <a:rPr lang="en-US" dirty="0"/>
+              <a:t/>
+            </a:r>
+            <a:endParaRPr lang="en-US" dirty="0"/>
+          </a:p>
+        </p:txBody>
+      </p:sp>
+      <p:sp>
+        <p:nvSpPr>
+          <p:cNvPr id="4" name="Slide Number Placeholder 3"/>
+          <p:cNvSpPr>
+            <a:spLocks noGrp="1"/>
+          </p:cNvSpPr>
+          <p:nvPr>
+            <p:ph type="sldNum" sz="quarter" idx="10"/>
+          </p:nvPr>
+        </p:nvSpPr>
+        <p:spPr/>
+        <p:txBody>
+          <a:bodyPr/>
+          <a:lstStyle/>
+          <a:p>
+            <a:fld id="{F7021451-1387-4CA6-816F-3879F97B5CBC}" type="slidenum">
+              <a:rPr lang="en-US"/>
+              <a:t>24</a:t>
+            </a:fld>
+            <a:endParaRPr lang="en-US"/>
+          </a:p>
+        </p:txBody>
+      </p:sp>
+    </p:spTree>
+    <p:extLst>
+      <p:ext uri="{BB962C8B-B14F-4D97-AF65-F5344CB8AC3E}">
+        <p14:creationId xmlns:p14="http://schemas.microsoft.com/office/powerpoint/2010/main" val="1024086991"/>
+      </p:ext>
+    </p:extLst>
+  </p:cSld>
+  <p:clrMapOvr>
+    <a:masterClrMapping/>
+  </p:clrMapOvr>
+</p:notes>
+</file>
+
+<file path=ppt/notesSlides/notesSlide25.xml><?xml version="1.0" encoding="utf-8"?>
+<p:notes xmlns:a="http://schemas.openxmlformats.org/drawingml/2006/main" xmlns:r="http://schemas.openxmlformats.org/officeDocument/2006/relationships" xmlns:p="http://schemas.openxmlformats.org/presentationml/2006/main">
+  <p:cSld>
+    <p:spTree>
+      <p:nvGrpSpPr>
+        <p:cNvPr id="1" name=""/>
+        <p:cNvGrpSpPr/>
+        <p:nvPr/>
+      </p:nvGrpSpPr>
+      <p:grpSpPr>
+        <a:xfrm>
+          <a:off x="0" y="0"/>
+          <a:ext cx="0" cy="0"/>
+          <a:chOff x="0" y="0"/>
+          <a:chExt cx="0" cy="0"/>
+        </a:xfrm>
+      </p:grpSpPr>
+      <p:sp>
+        <p:nvSpPr>
+          <p:cNvPr id="2" name="Slide Image Placeholder 1"/>
+          <p:cNvSpPr>
+            <a:spLocks noGrp="1" noRot="1" noChangeAspect="1"/>
+          </p:cNvSpPr>
+          <p:nvPr>
+            <p:ph type="sldImg"/>
+          </p:nvPr>
+        </p:nvSpPr>
+        <p:spPr/>
+      </p:sp>
+      <p:sp>
+        <p:nvSpPr>
+          <p:cNvPr id="3" name="Notes Placeholder 2"/>
+          <p:cNvSpPr>
+            <a:spLocks noGrp="1"/>
+          </p:cNvSpPr>
+          <p:nvPr>
+            <p:ph type="body" idx="1"/>
+          </p:nvPr>
+        </p:nvSpPr>
+        <p:spPr/>
+        <p:txBody>
+          <a:bodyPr/>
+          <a:lstStyle/>
+          <a:p>
+            <a:r>
+              <a:rPr lang="en-US" dirty="0"/>
+              <a:t/>
+            </a:r>
+            <a:endParaRPr lang="en-US" dirty="0"/>
+          </a:p>
+        </p:txBody>
+      </p:sp>
+      <p:sp>
+        <p:nvSpPr>
+          <p:cNvPr id="4" name="Slide Number Placeholder 3"/>
+          <p:cNvSpPr>
+            <a:spLocks noGrp="1"/>
+          </p:cNvSpPr>
+          <p:nvPr>
+            <p:ph type="sldNum" sz="quarter" idx="10"/>
+          </p:nvPr>
+        </p:nvSpPr>
+        <p:spPr/>
+        <p:txBody>
+          <a:bodyPr/>
+          <a:lstStyle/>
+          <a:p>
+            <a:fld id="{F7021451-1387-4CA6-816F-3879F97B5CBC}" type="slidenum">
+              <a:rPr lang="en-US"/>
+              <a:t>25</a:t>
             </a:fld>
             <a:endParaRPr lang="en-US"/>
           </a:p>
@@ -2498,9 +3299,360 @@
 </p:sld>
 </file>
 
+<file path=ppt/slides/slide17.xml><?xml version="1.0" encoding="utf-8"?>
+<p:sld xmlns:a="http://schemas.openxmlformats.org/drawingml/2006/main" xmlns:r="http://schemas.openxmlformats.org/officeDocument/2006/relationships" xmlns:p="http://schemas.openxmlformats.org/presentationml/2006/main">
+  <p:cSld name="Slide 17">
+    <p:bg>
+      <p:bgPr>
+        <a:blipFill dpi="0" rotWithShape="1">
+          <a:blip r:embed="rId1">
+            <a:lum/>
+          </a:blip>
+          <a:srcRect/>
+          <a:stretch>
+            <a:fillRect/>
+          </a:stretch>
+        </a:blipFill>
+        <a:effectLst/>
+      </p:bgPr>
+    </p:bg>
+    <p:spTree>
+      <p:nvGrpSpPr>
+        <p:cNvPr id="1" name=""/>
+        <p:cNvGrpSpPr/>
+        <p:nvPr/>
+      </p:nvGrpSpPr>
+      <p:grpSpPr>
+        <a:xfrm>
+          <a:off x="0" y="0"/>
+          <a:ext cx="0" cy="0"/>
+          <a:chOff x="0" y="0"/>
+          <a:chExt cx="0" cy="0"/>
+        </a:xfrm>
+      </p:grpSpPr>
+    </p:spTree>
+  </p:cSld>
+  <p:clrMapOvr>
+    <a:masterClrMapping/>
+  </p:clrMapOvr>
+</p:sld>
+</file>
+
+<file path=ppt/slides/slide18.xml><?xml version="1.0" encoding="utf-8"?>
+<p:sld xmlns:a="http://schemas.openxmlformats.org/drawingml/2006/main" xmlns:r="http://schemas.openxmlformats.org/officeDocument/2006/relationships" xmlns:p="http://schemas.openxmlformats.org/presentationml/2006/main">
+  <p:cSld name="Slide 18">
+    <p:bg>
+      <p:bgPr>
+        <a:blipFill dpi="0" rotWithShape="1">
+          <a:blip r:embed="rId1">
+            <a:lum/>
+          </a:blip>
+          <a:srcRect/>
+          <a:stretch>
+            <a:fillRect/>
+          </a:stretch>
+        </a:blipFill>
+        <a:effectLst/>
+      </p:bgPr>
+    </p:bg>
+    <p:spTree>
+      <p:nvGrpSpPr>
+        <p:cNvPr id="1" name=""/>
+        <p:cNvGrpSpPr/>
+        <p:nvPr/>
+      </p:nvGrpSpPr>
+      <p:grpSpPr>
+        <a:xfrm>
+          <a:off x="0" y="0"/>
+          <a:ext cx="0" cy="0"/>
+          <a:chOff x="0" y="0"/>
+          <a:chExt cx="0" cy="0"/>
+        </a:xfrm>
+      </p:grpSpPr>
+    </p:spTree>
+  </p:cSld>
+  <p:clrMapOvr>
+    <a:masterClrMapping/>
+  </p:clrMapOvr>
+</p:sld>
+</file>
+
+<file path=ppt/slides/slide19.xml><?xml version="1.0" encoding="utf-8"?>
+<p:sld xmlns:a="http://schemas.openxmlformats.org/drawingml/2006/main" xmlns:r="http://schemas.openxmlformats.org/officeDocument/2006/relationships" xmlns:p="http://schemas.openxmlformats.org/presentationml/2006/main">
+  <p:cSld name="Slide 19">
+    <p:bg>
+      <p:bgPr>
+        <a:blipFill dpi="0" rotWithShape="1">
+          <a:blip r:embed="rId1">
+            <a:lum/>
+          </a:blip>
+          <a:srcRect/>
+          <a:stretch>
+            <a:fillRect/>
+          </a:stretch>
+        </a:blipFill>
+        <a:effectLst/>
+      </p:bgPr>
+    </p:bg>
+    <p:spTree>
+      <p:nvGrpSpPr>
+        <p:cNvPr id="1" name=""/>
+        <p:cNvGrpSpPr/>
+        <p:nvPr/>
+      </p:nvGrpSpPr>
+      <p:grpSpPr>
+        <a:xfrm>
+          <a:off x="0" y="0"/>
+          <a:ext cx="0" cy="0"/>
+          <a:chOff x="0" y="0"/>
+          <a:chExt cx="0" cy="0"/>
+        </a:xfrm>
+      </p:grpSpPr>
+    </p:spTree>
+  </p:cSld>
+  <p:clrMapOvr>
+    <a:masterClrMapping/>
+  </p:clrMapOvr>
+</p:sld>
+</file>
+
 <file path=ppt/slides/slide2.xml><?xml version="1.0" encoding="utf-8"?>
 <p:sld xmlns:a="http://schemas.openxmlformats.org/drawingml/2006/main" xmlns:r="http://schemas.openxmlformats.org/officeDocument/2006/relationships" xmlns:p="http://schemas.openxmlformats.org/presentationml/2006/main">
   <p:cSld name="Slide 2">
+    <p:bg>
+      <p:bgPr>
+        <a:blipFill dpi="0" rotWithShape="1">
+          <a:blip r:embed="rId1">
+            <a:lum/>
+          </a:blip>
+          <a:srcRect/>
+          <a:stretch>
+            <a:fillRect/>
+          </a:stretch>
+        </a:blipFill>
+        <a:effectLst/>
+      </p:bgPr>
+    </p:bg>
+    <p:spTree>
+      <p:nvGrpSpPr>
+        <p:cNvPr id="1" name=""/>
+        <p:cNvGrpSpPr/>
+        <p:nvPr/>
+      </p:nvGrpSpPr>
+      <p:grpSpPr>
+        <a:xfrm>
+          <a:off x="0" y="0"/>
+          <a:ext cx="0" cy="0"/>
+          <a:chOff x="0" y="0"/>
+          <a:chExt cx="0" cy="0"/>
+        </a:xfrm>
+      </p:grpSpPr>
+    </p:spTree>
+  </p:cSld>
+  <p:clrMapOvr>
+    <a:masterClrMapping/>
+  </p:clrMapOvr>
+</p:sld>
+</file>
+
+<file path=ppt/slides/slide20.xml><?xml version="1.0" encoding="utf-8"?>
+<p:sld xmlns:a="http://schemas.openxmlformats.org/drawingml/2006/main" xmlns:r="http://schemas.openxmlformats.org/officeDocument/2006/relationships" xmlns:p="http://schemas.openxmlformats.org/presentationml/2006/main">
+  <p:cSld name="Slide 20">
+    <p:bg>
+      <p:bgPr>
+        <a:blipFill dpi="0" rotWithShape="1">
+          <a:blip r:embed="rId1">
+            <a:lum/>
+          </a:blip>
+          <a:srcRect/>
+          <a:stretch>
+            <a:fillRect/>
+          </a:stretch>
+        </a:blipFill>
+        <a:effectLst/>
+      </p:bgPr>
+    </p:bg>
+    <p:spTree>
+      <p:nvGrpSpPr>
+        <p:cNvPr id="1" name=""/>
+        <p:cNvGrpSpPr/>
+        <p:nvPr/>
+      </p:nvGrpSpPr>
+      <p:grpSpPr>
+        <a:xfrm>
+          <a:off x="0" y="0"/>
+          <a:ext cx="0" cy="0"/>
+          <a:chOff x="0" y="0"/>
+          <a:chExt cx="0" cy="0"/>
+        </a:xfrm>
+      </p:grpSpPr>
+    </p:spTree>
+  </p:cSld>
+  <p:clrMapOvr>
+    <a:masterClrMapping/>
+  </p:clrMapOvr>
+</p:sld>
+</file>
+
+<file path=ppt/slides/slide21.xml><?xml version="1.0" encoding="utf-8"?>
+<p:sld xmlns:a="http://schemas.openxmlformats.org/drawingml/2006/main" xmlns:r="http://schemas.openxmlformats.org/officeDocument/2006/relationships" xmlns:p="http://schemas.openxmlformats.org/presentationml/2006/main">
+  <p:cSld name="Slide 21">
+    <p:bg>
+      <p:bgPr>
+        <a:blipFill dpi="0" rotWithShape="1">
+          <a:blip r:embed="rId1">
+            <a:lum/>
+          </a:blip>
+          <a:srcRect/>
+          <a:stretch>
+            <a:fillRect/>
+          </a:stretch>
+        </a:blipFill>
+        <a:effectLst/>
+      </p:bgPr>
+    </p:bg>
+    <p:spTree>
+      <p:nvGrpSpPr>
+        <p:cNvPr id="1" name=""/>
+        <p:cNvGrpSpPr/>
+        <p:nvPr/>
+      </p:nvGrpSpPr>
+      <p:grpSpPr>
+        <a:xfrm>
+          <a:off x="0" y="0"/>
+          <a:ext cx="0" cy="0"/>
+          <a:chOff x="0" y="0"/>
+          <a:chExt cx="0" cy="0"/>
+        </a:xfrm>
+      </p:grpSpPr>
+    </p:spTree>
+  </p:cSld>
+  <p:clrMapOvr>
+    <a:masterClrMapping/>
+  </p:clrMapOvr>
+</p:sld>
+</file>
+
+<file path=ppt/slides/slide22.xml><?xml version="1.0" encoding="utf-8"?>
+<p:sld xmlns:a="http://schemas.openxmlformats.org/drawingml/2006/main" xmlns:r="http://schemas.openxmlformats.org/officeDocument/2006/relationships" xmlns:p="http://schemas.openxmlformats.org/presentationml/2006/main">
+  <p:cSld name="Slide 22">
+    <p:bg>
+      <p:bgPr>
+        <a:blipFill dpi="0" rotWithShape="1">
+          <a:blip r:embed="rId1">
+            <a:lum/>
+          </a:blip>
+          <a:srcRect/>
+          <a:stretch>
+            <a:fillRect/>
+          </a:stretch>
+        </a:blipFill>
+        <a:effectLst/>
+      </p:bgPr>
+    </p:bg>
+    <p:spTree>
+      <p:nvGrpSpPr>
+        <p:cNvPr id="1" name=""/>
+        <p:cNvGrpSpPr/>
+        <p:nvPr/>
+      </p:nvGrpSpPr>
+      <p:grpSpPr>
+        <a:xfrm>
+          <a:off x="0" y="0"/>
+          <a:ext cx="0" cy="0"/>
+          <a:chOff x="0" y="0"/>
+          <a:chExt cx="0" cy="0"/>
+        </a:xfrm>
+      </p:grpSpPr>
+    </p:spTree>
+  </p:cSld>
+  <p:clrMapOvr>
+    <a:masterClrMapping/>
+  </p:clrMapOvr>
+</p:sld>
+</file>
+
+<file path=ppt/slides/slide23.xml><?xml version="1.0" encoding="utf-8"?>
+<p:sld xmlns:a="http://schemas.openxmlformats.org/drawingml/2006/main" xmlns:r="http://schemas.openxmlformats.org/officeDocument/2006/relationships" xmlns:p="http://schemas.openxmlformats.org/presentationml/2006/main">
+  <p:cSld name="Slide 23">
+    <p:bg>
+      <p:bgPr>
+        <a:blipFill dpi="0" rotWithShape="1">
+          <a:blip r:embed="rId1">
+            <a:lum/>
+          </a:blip>
+          <a:srcRect/>
+          <a:stretch>
+            <a:fillRect/>
+          </a:stretch>
+        </a:blipFill>
+        <a:effectLst/>
+      </p:bgPr>
+    </p:bg>
+    <p:spTree>
+      <p:nvGrpSpPr>
+        <p:cNvPr id="1" name=""/>
+        <p:cNvGrpSpPr/>
+        <p:nvPr/>
+      </p:nvGrpSpPr>
+      <p:grpSpPr>
+        <a:xfrm>
+          <a:off x="0" y="0"/>
+          <a:ext cx="0" cy="0"/>
+          <a:chOff x="0" y="0"/>
+          <a:chExt cx="0" cy="0"/>
+        </a:xfrm>
+      </p:grpSpPr>
+    </p:spTree>
+  </p:cSld>
+  <p:clrMapOvr>
+    <a:masterClrMapping/>
+  </p:clrMapOvr>
+</p:sld>
+</file>
+
+<file path=ppt/slides/slide24.xml><?xml version="1.0" encoding="utf-8"?>
+<p:sld xmlns:a="http://schemas.openxmlformats.org/drawingml/2006/main" xmlns:r="http://schemas.openxmlformats.org/officeDocument/2006/relationships" xmlns:p="http://schemas.openxmlformats.org/presentationml/2006/main">
+  <p:cSld name="Slide 24">
+    <p:bg>
+      <p:bgPr>
+        <a:blipFill dpi="0" rotWithShape="1">
+          <a:blip r:embed="rId1">
+            <a:lum/>
+          </a:blip>
+          <a:srcRect/>
+          <a:stretch>
+            <a:fillRect/>
+          </a:stretch>
+        </a:blipFill>
+        <a:effectLst/>
+      </p:bgPr>
+    </p:bg>
+    <p:spTree>
+      <p:nvGrpSpPr>
+        <p:cNvPr id="1" name=""/>
+        <p:cNvGrpSpPr/>
+        <p:nvPr/>
+      </p:nvGrpSpPr>
+      <p:grpSpPr>
+        <a:xfrm>
+          <a:off x="0" y="0"/>
+          <a:ext cx="0" cy="0"/>
+          <a:chOff x="0" y="0"/>
+          <a:chExt cx="0" cy="0"/>
+        </a:xfrm>
+      </p:grpSpPr>
+    </p:spTree>
+  </p:cSld>
+  <p:clrMapOvr>
+    <a:masterClrMapping/>
+  </p:clrMapOvr>
+</p:sld>
+</file>
+
+<file path=ppt/slides/slide25.xml><?xml version="1.0" encoding="utf-8"?>
+<p:sld xmlns:a="http://schemas.openxmlformats.org/drawingml/2006/main" xmlns:r="http://schemas.openxmlformats.org/officeDocument/2006/relationships" xmlns:p="http://schemas.openxmlformats.org/presentationml/2006/main">
+  <p:cSld name="Slide 25">
     <p:bg>
       <p:bgPr>
         <a:blipFill dpi="0" rotWithShape="1">

--- a/zanyatiya/Zanyatie_03_Lekciya_Iniciaciya_Slaydy.pptx
+++ b/zanyatiya/Zanyatie_03_Lekciya_Iniciaciya_Slaydy.pptx
@@ -526,7 +526,7 @@
           <a:p>
             <a:r>
               <a:rPr lang="en-US" dirty="0"/>
-              <a:t>Заявить рамку сразу: сегодня разбор того, что вы уже сделали, приведённый к понятийной структуре. Анонсировать окно замены проекта.</a:t>
+              <a:t>Начать прямо: «В прошлый раз почти ни у кого не заполнилось до конца. Так и было задумано».</a:t>
             </a:r>
             <a:endParaRPr lang="en-US" dirty="0"/>
           </a:p>

--- a/zanyatiya/Zanyatie_03_Lekciya_Iniciaciya_Slaydy.pptx
+++ b/zanyatiya/Zanyatie_03_Lekciya_Iniciaciya_Slaydy.pptx
@@ -526,7 +526,7 @@
           <a:p>
             <a:r>
               <a:rPr lang="en-US" dirty="0"/>
-              <a:t>Начать прямо: «В прошлый раз почти ни у кого не заполнилось до конца. Так и было задумано».</a:t>
+              <a:t>Начать спокойно: «На прошлой паре вы встретились со сложностями. Сегодня их разбираем, дома — ещё один подход».</a:t>
             </a:r>
             <a:endParaRPr lang="en-US" dirty="0"/>
           </a:p>

--- a/zanyatiya/Zanyatie_03_Lekciya_Iniciaciya_Slaydy.pptx
+++ b/zanyatiya/Zanyatie_03_Lekciya_Iniciaciya_Slaydy.pptx
@@ -26,13 +26,9 @@
     <p:sldId id="274" r:id="rId20"/>
     <p:sldId id="275" r:id="rId21"/>
     <p:sldId id="276" r:id="rId22"/>
-    <p:sldId id="277" r:id="rId23"/>
-    <p:sldId id="278" r:id="rId24"/>
-    <p:sldId id="279" r:id="rId25"/>
-    <p:sldId id="280" r:id="rId26"/>
   </p:sldIdLst>
   <p:notesMasterIdLst>
-    <p:notesMasterId r:id="rId27"/>
+    <p:notesMasterId r:id="rId23"/>
   </p:notesMasterIdLst>
   <p:sldSz cx="12192000" cy="6858000"/>
   <p:notesSz cx="6858000" cy="12192000"/>
@@ -1694,358 +1690,6 @@
             <a:fld id="{F7021451-1387-4CA6-816F-3879F97B5CBC}" type="slidenum">
               <a:rPr lang="en-US"/>
               <a:t>21</a:t>
-            </a:fld>
-            <a:endParaRPr lang="en-US"/>
-          </a:p>
-        </p:txBody>
-      </p:sp>
-    </p:spTree>
-    <p:extLst>
-      <p:ext uri="{BB962C8B-B14F-4D97-AF65-F5344CB8AC3E}">
-        <p14:creationId xmlns:p14="http://schemas.microsoft.com/office/powerpoint/2010/main" val="1024086991"/>
-      </p:ext>
-    </p:extLst>
-  </p:cSld>
-  <p:clrMapOvr>
-    <a:masterClrMapping/>
-  </p:clrMapOvr>
-</p:notes>
-</file>
-
-<file path=ppt/notesSlides/notesSlide22.xml><?xml version="1.0" encoding="utf-8"?>
-<p:notes xmlns:a="http://schemas.openxmlformats.org/drawingml/2006/main" xmlns:r="http://schemas.openxmlformats.org/officeDocument/2006/relationships" xmlns:p="http://schemas.openxmlformats.org/presentationml/2006/main">
-  <p:cSld>
-    <p:spTree>
-      <p:nvGrpSpPr>
-        <p:cNvPr id="1" name=""/>
-        <p:cNvGrpSpPr/>
-        <p:nvPr/>
-      </p:nvGrpSpPr>
-      <p:grpSpPr>
-        <a:xfrm>
-          <a:off x="0" y="0"/>
-          <a:ext cx="0" cy="0"/>
-          <a:chOff x="0" y="0"/>
-          <a:chExt cx="0" cy="0"/>
-        </a:xfrm>
-      </p:grpSpPr>
-      <p:sp>
-        <p:nvSpPr>
-          <p:cNvPr id="2" name="Slide Image Placeholder 1"/>
-          <p:cNvSpPr>
-            <a:spLocks noGrp="1" noRot="1" noChangeAspect="1"/>
-          </p:cNvSpPr>
-          <p:nvPr>
-            <p:ph type="sldImg"/>
-          </p:nvPr>
-        </p:nvSpPr>
-        <p:spPr/>
-      </p:sp>
-      <p:sp>
-        <p:nvSpPr>
-          <p:cNvPr id="3" name="Notes Placeholder 2"/>
-          <p:cNvSpPr>
-            <a:spLocks noGrp="1"/>
-          </p:cNvSpPr>
-          <p:nvPr>
-            <p:ph type="body" idx="1"/>
-          </p:nvPr>
-        </p:nvSpPr>
-        <p:spPr/>
-        <p:txBody>
-          <a:bodyPr/>
-          <a:lstStyle/>
-          <a:p>
-            <a:r>
-              <a:rPr lang="en-US" dirty="0"/>
-              <a:t/>
-            </a:r>
-            <a:endParaRPr lang="en-US" dirty="0"/>
-          </a:p>
-        </p:txBody>
-      </p:sp>
-      <p:sp>
-        <p:nvSpPr>
-          <p:cNvPr id="4" name="Slide Number Placeholder 3"/>
-          <p:cNvSpPr>
-            <a:spLocks noGrp="1"/>
-          </p:cNvSpPr>
-          <p:nvPr>
-            <p:ph type="sldNum" sz="quarter" idx="10"/>
-          </p:nvPr>
-        </p:nvSpPr>
-        <p:spPr/>
-        <p:txBody>
-          <a:bodyPr/>
-          <a:lstStyle/>
-          <a:p>
-            <a:fld id="{F7021451-1387-4CA6-816F-3879F97B5CBC}" type="slidenum">
-              <a:rPr lang="en-US"/>
-              <a:t>22</a:t>
-            </a:fld>
-            <a:endParaRPr lang="en-US"/>
-          </a:p>
-        </p:txBody>
-      </p:sp>
-    </p:spTree>
-    <p:extLst>
-      <p:ext uri="{BB962C8B-B14F-4D97-AF65-F5344CB8AC3E}">
-        <p14:creationId xmlns:p14="http://schemas.microsoft.com/office/powerpoint/2010/main" val="1024086991"/>
-      </p:ext>
-    </p:extLst>
-  </p:cSld>
-  <p:clrMapOvr>
-    <a:masterClrMapping/>
-  </p:clrMapOvr>
-</p:notes>
-</file>
-
-<file path=ppt/notesSlides/notesSlide23.xml><?xml version="1.0" encoding="utf-8"?>
-<p:notes xmlns:a="http://schemas.openxmlformats.org/drawingml/2006/main" xmlns:r="http://schemas.openxmlformats.org/officeDocument/2006/relationships" xmlns:p="http://schemas.openxmlformats.org/presentationml/2006/main">
-  <p:cSld>
-    <p:spTree>
-      <p:nvGrpSpPr>
-        <p:cNvPr id="1" name=""/>
-        <p:cNvGrpSpPr/>
-        <p:nvPr/>
-      </p:nvGrpSpPr>
-      <p:grpSpPr>
-        <a:xfrm>
-          <a:off x="0" y="0"/>
-          <a:ext cx="0" cy="0"/>
-          <a:chOff x="0" y="0"/>
-          <a:chExt cx="0" cy="0"/>
-        </a:xfrm>
-      </p:grpSpPr>
-      <p:sp>
-        <p:nvSpPr>
-          <p:cNvPr id="2" name="Slide Image Placeholder 1"/>
-          <p:cNvSpPr>
-            <a:spLocks noGrp="1" noRot="1" noChangeAspect="1"/>
-          </p:cNvSpPr>
-          <p:nvPr>
-            <p:ph type="sldImg"/>
-          </p:nvPr>
-        </p:nvSpPr>
-        <p:spPr/>
-      </p:sp>
-      <p:sp>
-        <p:nvSpPr>
-          <p:cNvPr id="3" name="Notes Placeholder 2"/>
-          <p:cNvSpPr>
-            <a:spLocks noGrp="1"/>
-          </p:cNvSpPr>
-          <p:nvPr>
-            <p:ph type="body" idx="1"/>
-          </p:nvPr>
-        </p:nvSpPr>
-        <p:spPr/>
-        <p:txBody>
-          <a:bodyPr/>
-          <a:lstStyle/>
-          <a:p>
-            <a:r>
-              <a:rPr lang="en-US" dirty="0"/>
-              <a:t/>
-            </a:r>
-            <a:endParaRPr lang="en-US" dirty="0"/>
-          </a:p>
-        </p:txBody>
-      </p:sp>
-      <p:sp>
-        <p:nvSpPr>
-          <p:cNvPr id="4" name="Slide Number Placeholder 3"/>
-          <p:cNvSpPr>
-            <a:spLocks noGrp="1"/>
-          </p:cNvSpPr>
-          <p:nvPr>
-            <p:ph type="sldNum" sz="quarter" idx="10"/>
-          </p:nvPr>
-        </p:nvSpPr>
-        <p:spPr/>
-        <p:txBody>
-          <a:bodyPr/>
-          <a:lstStyle/>
-          <a:p>
-            <a:fld id="{F7021451-1387-4CA6-816F-3879F97B5CBC}" type="slidenum">
-              <a:rPr lang="en-US"/>
-              <a:t>23</a:t>
-            </a:fld>
-            <a:endParaRPr lang="en-US"/>
-          </a:p>
-        </p:txBody>
-      </p:sp>
-    </p:spTree>
-    <p:extLst>
-      <p:ext uri="{BB962C8B-B14F-4D97-AF65-F5344CB8AC3E}">
-        <p14:creationId xmlns:p14="http://schemas.microsoft.com/office/powerpoint/2010/main" val="1024086991"/>
-      </p:ext>
-    </p:extLst>
-  </p:cSld>
-  <p:clrMapOvr>
-    <a:masterClrMapping/>
-  </p:clrMapOvr>
-</p:notes>
-</file>
-
-<file path=ppt/notesSlides/notesSlide24.xml><?xml version="1.0" encoding="utf-8"?>
-<p:notes xmlns:a="http://schemas.openxmlformats.org/drawingml/2006/main" xmlns:r="http://schemas.openxmlformats.org/officeDocument/2006/relationships" xmlns:p="http://schemas.openxmlformats.org/presentationml/2006/main">
-  <p:cSld>
-    <p:spTree>
-      <p:nvGrpSpPr>
-        <p:cNvPr id="1" name=""/>
-        <p:cNvGrpSpPr/>
-        <p:nvPr/>
-      </p:nvGrpSpPr>
-      <p:grpSpPr>
-        <a:xfrm>
-          <a:off x="0" y="0"/>
-          <a:ext cx="0" cy="0"/>
-          <a:chOff x="0" y="0"/>
-          <a:chExt cx="0" cy="0"/>
-        </a:xfrm>
-      </p:grpSpPr>
-      <p:sp>
-        <p:nvSpPr>
-          <p:cNvPr id="2" name="Slide Image Placeholder 1"/>
-          <p:cNvSpPr>
-            <a:spLocks noGrp="1" noRot="1" noChangeAspect="1"/>
-          </p:cNvSpPr>
-          <p:nvPr>
-            <p:ph type="sldImg"/>
-          </p:nvPr>
-        </p:nvSpPr>
-        <p:spPr/>
-      </p:sp>
-      <p:sp>
-        <p:nvSpPr>
-          <p:cNvPr id="3" name="Notes Placeholder 2"/>
-          <p:cNvSpPr>
-            <a:spLocks noGrp="1"/>
-          </p:cNvSpPr>
-          <p:nvPr>
-            <p:ph type="body" idx="1"/>
-          </p:nvPr>
-        </p:nvSpPr>
-        <p:spPr/>
-        <p:txBody>
-          <a:bodyPr/>
-          <a:lstStyle/>
-          <a:p>
-            <a:r>
-              <a:rPr lang="en-US" dirty="0"/>
-              <a:t/>
-            </a:r>
-            <a:endParaRPr lang="en-US" dirty="0"/>
-          </a:p>
-        </p:txBody>
-      </p:sp>
-      <p:sp>
-        <p:nvSpPr>
-          <p:cNvPr id="4" name="Slide Number Placeholder 3"/>
-          <p:cNvSpPr>
-            <a:spLocks noGrp="1"/>
-          </p:cNvSpPr>
-          <p:nvPr>
-            <p:ph type="sldNum" sz="quarter" idx="10"/>
-          </p:nvPr>
-        </p:nvSpPr>
-        <p:spPr/>
-        <p:txBody>
-          <a:bodyPr/>
-          <a:lstStyle/>
-          <a:p>
-            <a:fld id="{F7021451-1387-4CA6-816F-3879F97B5CBC}" type="slidenum">
-              <a:rPr lang="en-US"/>
-              <a:t>24</a:t>
-            </a:fld>
-            <a:endParaRPr lang="en-US"/>
-          </a:p>
-        </p:txBody>
-      </p:sp>
-    </p:spTree>
-    <p:extLst>
-      <p:ext uri="{BB962C8B-B14F-4D97-AF65-F5344CB8AC3E}">
-        <p14:creationId xmlns:p14="http://schemas.microsoft.com/office/powerpoint/2010/main" val="1024086991"/>
-      </p:ext>
-    </p:extLst>
-  </p:cSld>
-  <p:clrMapOvr>
-    <a:masterClrMapping/>
-  </p:clrMapOvr>
-</p:notes>
-</file>
-
-<file path=ppt/notesSlides/notesSlide25.xml><?xml version="1.0" encoding="utf-8"?>
-<p:notes xmlns:a="http://schemas.openxmlformats.org/drawingml/2006/main" xmlns:r="http://schemas.openxmlformats.org/officeDocument/2006/relationships" xmlns:p="http://schemas.openxmlformats.org/presentationml/2006/main">
-  <p:cSld>
-    <p:spTree>
-      <p:nvGrpSpPr>
-        <p:cNvPr id="1" name=""/>
-        <p:cNvGrpSpPr/>
-        <p:nvPr/>
-      </p:nvGrpSpPr>
-      <p:grpSpPr>
-        <a:xfrm>
-          <a:off x="0" y="0"/>
-          <a:ext cx="0" cy="0"/>
-          <a:chOff x="0" y="0"/>
-          <a:chExt cx="0" cy="0"/>
-        </a:xfrm>
-      </p:grpSpPr>
-      <p:sp>
-        <p:nvSpPr>
-          <p:cNvPr id="2" name="Slide Image Placeholder 1"/>
-          <p:cNvSpPr>
-            <a:spLocks noGrp="1" noRot="1" noChangeAspect="1"/>
-          </p:cNvSpPr>
-          <p:nvPr>
-            <p:ph type="sldImg"/>
-          </p:nvPr>
-        </p:nvSpPr>
-        <p:spPr/>
-      </p:sp>
-      <p:sp>
-        <p:nvSpPr>
-          <p:cNvPr id="3" name="Notes Placeholder 2"/>
-          <p:cNvSpPr>
-            <a:spLocks noGrp="1"/>
-          </p:cNvSpPr>
-          <p:nvPr>
-            <p:ph type="body" idx="1"/>
-          </p:nvPr>
-        </p:nvSpPr>
-        <p:spPr/>
-        <p:txBody>
-          <a:bodyPr/>
-          <a:lstStyle/>
-          <a:p>
-            <a:r>
-              <a:rPr lang="en-US" dirty="0"/>
-              <a:t/>
-            </a:r>
-            <a:endParaRPr lang="en-US" dirty="0"/>
-          </a:p>
-        </p:txBody>
-      </p:sp>
-      <p:sp>
-        <p:nvSpPr>
-          <p:cNvPr id="4" name="Slide Number Placeholder 3"/>
-          <p:cNvSpPr>
-            <a:spLocks noGrp="1"/>
-          </p:cNvSpPr>
-          <p:nvPr>
-            <p:ph type="sldNum" sz="quarter" idx="10"/>
-          </p:nvPr>
-        </p:nvSpPr>
-        <p:spPr/>
-        <p:txBody>
-          <a:bodyPr/>
-          <a:lstStyle/>
-          <a:p>
-            <a:fld id="{F7021451-1387-4CA6-816F-3879F97B5CBC}" type="slidenum">
-              <a:rPr lang="en-US"/>
-              <a:t>25</a:t>
             </a:fld>
             <a:endParaRPr lang="en-US"/>
           </a:p>
@@ -3497,162 +3141,6 @@
 <file path=ppt/slides/slide21.xml><?xml version="1.0" encoding="utf-8"?>
 <p:sld xmlns:a="http://schemas.openxmlformats.org/drawingml/2006/main" xmlns:r="http://schemas.openxmlformats.org/officeDocument/2006/relationships" xmlns:p="http://schemas.openxmlformats.org/presentationml/2006/main">
   <p:cSld name="Slide 21">
-    <p:bg>
-      <p:bgPr>
-        <a:blipFill dpi="0" rotWithShape="1">
-          <a:blip r:embed="rId1">
-            <a:lum/>
-          </a:blip>
-          <a:srcRect/>
-          <a:stretch>
-            <a:fillRect/>
-          </a:stretch>
-        </a:blipFill>
-        <a:effectLst/>
-      </p:bgPr>
-    </p:bg>
-    <p:spTree>
-      <p:nvGrpSpPr>
-        <p:cNvPr id="1" name=""/>
-        <p:cNvGrpSpPr/>
-        <p:nvPr/>
-      </p:nvGrpSpPr>
-      <p:grpSpPr>
-        <a:xfrm>
-          <a:off x="0" y="0"/>
-          <a:ext cx="0" cy="0"/>
-          <a:chOff x="0" y="0"/>
-          <a:chExt cx="0" cy="0"/>
-        </a:xfrm>
-      </p:grpSpPr>
-    </p:spTree>
-  </p:cSld>
-  <p:clrMapOvr>
-    <a:masterClrMapping/>
-  </p:clrMapOvr>
-</p:sld>
-</file>
-
-<file path=ppt/slides/slide22.xml><?xml version="1.0" encoding="utf-8"?>
-<p:sld xmlns:a="http://schemas.openxmlformats.org/drawingml/2006/main" xmlns:r="http://schemas.openxmlformats.org/officeDocument/2006/relationships" xmlns:p="http://schemas.openxmlformats.org/presentationml/2006/main">
-  <p:cSld name="Slide 22">
-    <p:bg>
-      <p:bgPr>
-        <a:blipFill dpi="0" rotWithShape="1">
-          <a:blip r:embed="rId1">
-            <a:lum/>
-          </a:blip>
-          <a:srcRect/>
-          <a:stretch>
-            <a:fillRect/>
-          </a:stretch>
-        </a:blipFill>
-        <a:effectLst/>
-      </p:bgPr>
-    </p:bg>
-    <p:spTree>
-      <p:nvGrpSpPr>
-        <p:cNvPr id="1" name=""/>
-        <p:cNvGrpSpPr/>
-        <p:nvPr/>
-      </p:nvGrpSpPr>
-      <p:grpSpPr>
-        <a:xfrm>
-          <a:off x="0" y="0"/>
-          <a:ext cx="0" cy="0"/>
-          <a:chOff x="0" y="0"/>
-          <a:chExt cx="0" cy="0"/>
-        </a:xfrm>
-      </p:grpSpPr>
-    </p:spTree>
-  </p:cSld>
-  <p:clrMapOvr>
-    <a:masterClrMapping/>
-  </p:clrMapOvr>
-</p:sld>
-</file>
-
-<file path=ppt/slides/slide23.xml><?xml version="1.0" encoding="utf-8"?>
-<p:sld xmlns:a="http://schemas.openxmlformats.org/drawingml/2006/main" xmlns:r="http://schemas.openxmlformats.org/officeDocument/2006/relationships" xmlns:p="http://schemas.openxmlformats.org/presentationml/2006/main">
-  <p:cSld name="Slide 23">
-    <p:bg>
-      <p:bgPr>
-        <a:blipFill dpi="0" rotWithShape="1">
-          <a:blip r:embed="rId1">
-            <a:lum/>
-          </a:blip>
-          <a:srcRect/>
-          <a:stretch>
-            <a:fillRect/>
-          </a:stretch>
-        </a:blipFill>
-        <a:effectLst/>
-      </p:bgPr>
-    </p:bg>
-    <p:spTree>
-      <p:nvGrpSpPr>
-        <p:cNvPr id="1" name=""/>
-        <p:cNvGrpSpPr/>
-        <p:nvPr/>
-      </p:nvGrpSpPr>
-      <p:grpSpPr>
-        <a:xfrm>
-          <a:off x="0" y="0"/>
-          <a:ext cx="0" cy="0"/>
-          <a:chOff x="0" y="0"/>
-          <a:chExt cx="0" cy="0"/>
-        </a:xfrm>
-      </p:grpSpPr>
-    </p:spTree>
-  </p:cSld>
-  <p:clrMapOvr>
-    <a:masterClrMapping/>
-  </p:clrMapOvr>
-</p:sld>
-</file>
-
-<file path=ppt/slides/slide24.xml><?xml version="1.0" encoding="utf-8"?>
-<p:sld xmlns:a="http://schemas.openxmlformats.org/drawingml/2006/main" xmlns:r="http://schemas.openxmlformats.org/officeDocument/2006/relationships" xmlns:p="http://schemas.openxmlformats.org/presentationml/2006/main">
-  <p:cSld name="Slide 24">
-    <p:bg>
-      <p:bgPr>
-        <a:blipFill dpi="0" rotWithShape="1">
-          <a:blip r:embed="rId1">
-            <a:lum/>
-          </a:blip>
-          <a:srcRect/>
-          <a:stretch>
-            <a:fillRect/>
-          </a:stretch>
-        </a:blipFill>
-        <a:effectLst/>
-      </p:bgPr>
-    </p:bg>
-    <p:spTree>
-      <p:nvGrpSpPr>
-        <p:cNvPr id="1" name=""/>
-        <p:cNvGrpSpPr/>
-        <p:nvPr/>
-      </p:nvGrpSpPr>
-      <p:grpSpPr>
-        <a:xfrm>
-          <a:off x="0" y="0"/>
-          <a:ext cx="0" cy="0"/>
-          <a:chOff x="0" y="0"/>
-          <a:chExt cx="0" cy="0"/>
-        </a:xfrm>
-      </p:grpSpPr>
-    </p:spTree>
-  </p:cSld>
-  <p:clrMapOvr>
-    <a:masterClrMapping/>
-  </p:clrMapOvr>
-</p:sld>
-</file>
-
-<file path=ppt/slides/slide25.xml><?xml version="1.0" encoding="utf-8"?>
-<p:sld xmlns:a="http://schemas.openxmlformats.org/drawingml/2006/main" xmlns:r="http://schemas.openxmlformats.org/officeDocument/2006/relationships" xmlns:p="http://schemas.openxmlformats.org/presentationml/2006/main">
-  <p:cSld name="Slide 25">
     <p:bg>
       <p:bgPr>
         <a:blipFill dpi="0" rotWithShape="1">

--- a/zanyatiya/Zanyatie_03_Lekciya_Iniciaciya_Slaydy.pptx
+++ b/zanyatiya/Zanyatie_03_Lekciya_Iniciaciya_Slaydy.pptx
@@ -26,9 +26,10 @@
     <p:sldId id="274" r:id="rId20"/>
     <p:sldId id="275" r:id="rId21"/>
     <p:sldId id="276" r:id="rId22"/>
+    <p:sldId id="277" r:id="rId23"/>
   </p:sldIdLst>
   <p:notesMasterIdLst>
-    <p:notesMasterId r:id="rId23"/>
+    <p:notesMasterId r:id="rId24"/>
   </p:notesMasterIdLst>
   <p:sldSz cx="12192000" cy="6858000"/>
   <p:notesSz cx="6858000" cy="12192000"/>
@@ -1690,6 +1691,94 @@
             <a:fld id="{F7021451-1387-4CA6-816F-3879F97B5CBC}" type="slidenum">
               <a:rPr lang="en-US"/>
               <a:t>21</a:t>
+            </a:fld>
+            <a:endParaRPr lang="en-US"/>
+          </a:p>
+        </p:txBody>
+      </p:sp>
+    </p:spTree>
+    <p:extLst>
+      <p:ext uri="{BB962C8B-B14F-4D97-AF65-F5344CB8AC3E}">
+        <p14:creationId xmlns:p14="http://schemas.microsoft.com/office/powerpoint/2010/main" val="1024086991"/>
+      </p:ext>
+    </p:extLst>
+  </p:cSld>
+  <p:clrMapOvr>
+    <a:masterClrMapping/>
+  </p:clrMapOvr>
+</p:notes>
+</file>
+
+<file path=ppt/notesSlides/notesSlide22.xml><?xml version="1.0" encoding="utf-8"?>
+<p:notes xmlns:a="http://schemas.openxmlformats.org/drawingml/2006/main" xmlns:r="http://schemas.openxmlformats.org/officeDocument/2006/relationships" xmlns:p="http://schemas.openxmlformats.org/presentationml/2006/main">
+  <p:cSld>
+    <p:spTree>
+      <p:nvGrpSpPr>
+        <p:cNvPr id="1" name=""/>
+        <p:cNvGrpSpPr/>
+        <p:nvPr/>
+      </p:nvGrpSpPr>
+      <p:grpSpPr>
+        <a:xfrm>
+          <a:off x="0" y="0"/>
+          <a:ext cx="0" cy="0"/>
+          <a:chOff x="0" y="0"/>
+          <a:chExt cx="0" cy="0"/>
+        </a:xfrm>
+      </p:grpSpPr>
+      <p:sp>
+        <p:nvSpPr>
+          <p:cNvPr id="2" name="Slide Image Placeholder 1"/>
+          <p:cNvSpPr>
+            <a:spLocks noGrp="1" noRot="1" noChangeAspect="1"/>
+          </p:cNvSpPr>
+          <p:nvPr>
+            <p:ph type="sldImg"/>
+          </p:nvPr>
+        </p:nvSpPr>
+        <p:spPr/>
+      </p:sp>
+      <p:sp>
+        <p:nvSpPr>
+          <p:cNvPr id="3" name="Notes Placeholder 2"/>
+          <p:cNvSpPr>
+            <a:spLocks noGrp="1"/>
+          </p:cNvSpPr>
+          <p:nvPr>
+            <p:ph type="body" idx="1"/>
+          </p:nvPr>
+        </p:nvSpPr>
+        <p:spPr/>
+        <p:txBody>
+          <a:bodyPr/>
+          <a:lstStyle/>
+          <a:p>
+            <a:r>
+              <a:rPr lang="en-US" dirty="0"/>
+              <a:t/>
+            </a:r>
+            <a:endParaRPr lang="en-US" dirty="0"/>
+          </a:p>
+        </p:txBody>
+      </p:sp>
+      <p:sp>
+        <p:nvSpPr>
+          <p:cNvPr id="4" name="Slide Number Placeholder 3"/>
+          <p:cNvSpPr>
+            <a:spLocks noGrp="1"/>
+          </p:cNvSpPr>
+          <p:nvPr>
+            <p:ph type="sldNum" sz="quarter" idx="10"/>
+          </p:nvPr>
+        </p:nvSpPr>
+        <p:spPr/>
+        <p:txBody>
+          <a:bodyPr/>
+          <a:lstStyle/>
+          <a:p>
+            <a:fld id="{F7021451-1387-4CA6-816F-3879F97B5CBC}" type="slidenum">
+              <a:rPr lang="en-US"/>
+              <a:t>22</a:t>
             </a:fld>
             <a:endParaRPr lang="en-US"/>
           </a:p>
@@ -3141,6 +3230,45 @@
 <file path=ppt/slides/slide21.xml><?xml version="1.0" encoding="utf-8"?>
 <p:sld xmlns:a="http://schemas.openxmlformats.org/drawingml/2006/main" xmlns:r="http://schemas.openxmlformats.org/officeDocument/2006/relationships" xmlns:p="http://schemas.openxmlformats.org/presentationml/2006/main">
   <p:cSld name="Slide 21">
+    <p:bg>
+      <p:bgPr>
+        <a:blipFill dpi="0" rotWithShape="1">
+          <a:blip r:embed="rId1">
+            <a:lum/>
+          </a:blip>
+          <a:srcRect/>
+          <a:stretch>
+            <a:fillRect/>
+          </a:stretch>
+        </a:blipFill>
+        <a:effectLst/>
+      </p:bgPr>
+    </p:bg>
+    <p:spTree>
+      <p:nvGrpSpPr>
+        <p:cNvPr id="1" name=""/>
+        <p:cNvGrpSpPr/>
+        <p:nvPr/>
+      </p:nvGrpSpPr>
+      <p:grpSpPr>
+        <a:xfrm>
+          <a:off x="0" y="0"/>
+          <a:ext cx="0" cy="0"/>
+          <a:chOff x="0" y="0"/>
+          <a:chExt cx="0" cy="0"/>
+        </a:xfrm>
+      </p:grpSpPr>
+    </p:spTree>
+  </p:cSld>
+  <p:clrMapOvr>
+    <a:masterClrMapping/>
+  </p:clrMapOvr>
+</p:sld>
+</file>
+
+<file path=ppt/slides/slide22.xml><?xml version="1.0" encoding="utf-8"?>
+<p:sld xmlns:a="http://schemas.openxmlformats.org/drawingml/2006/main" xmlns:r="http://schemas.openxmlformats.org/officeDocument/2006/relationships" xmlns:p="http://schemas.openxmlformats.org/presentationml/2006/main">
+  <p:cSld name="Slide 22">
     <p:bg>
       <p:bgPr>
         <a:blipFill dpi="0" rotWithShape="1">
